--- a/samples/schematic-patterns.pptx
+++ b/samples/schematic-patterns.pptx
@@ -9,9 +9,10 @@
     <p:sldId id="257" r:id="rId3"/>
     <p:sldId id="258" r:id="rId4"/>
     <p:sldId id="259" r:id="rId5"/>
+    <p:sldId id="260" r:id="rId6"/>
   </p:sldIdLst>
   <p:notesMasterIdLst>
-    <p:notesMasterId r:id="rId6"/>
+    <p:notesMasterId r:id="rId7"/>
   </p:notesMasterIdLst>
   <p:sldSz cx="12192000" cy="6858000"/>
   <p:notesSz cx="6858000" cy="12192000"/>
@@ -805,6 +806,96 @@
             <a:fld id="{F7021451-1387-4CA6-816F-3879F97B5CBC}" type="slidenum">
               <a:rPr lang="en-US"/>
               <a:t>4</a:t>
+            </a:fld>
+            <a:endParaRPr lang="en-US"/>
+          </a:p>
+        </p:txBody>
+      </p:sp>
+    </p:spTree>
+    <p:extLst>
+      <p:ext uri="{BB962C8B-B14F-4D97-AF65-F5344CB8AC3E}">
+        <p14:creationId xmlns:p14="http://schemas.microsoft.com/office/powerpoint/2010/main" val="1024086991"/>
+      </p:ext>
+    </p:extLst>
+  </p:cSld>
+  <p:clrMapOvr>
+    <a:masterClrMapping/>
+  </p:clrMapOvr>
+</p:notes>
+</file>
+
+<file path=ppt/notesSlides/notesSlide5.xml><?xml version="1.0" encoding="utf-8"?>
+<p:notes xmlns:a="http://schemas.openxmlformats.org/drawingml/2006/main" xmlns:r="http://schemas.openxmlformats.org/officeDocument/2006/relationships" xmlns:p="http://schemas.openxmlformats.org/presentationml/2006/main">
+  <p:cSld>
+    <p:spTree>
+      <p:nvGrpSpPr>
+        <p:cNvPr id="1" name=""/>
+        <p:cNvGrpSpPr/>
+        <p:nvPr/>
+      </p:nvGrpSpPr>
+      <p:grpSpPr>
+        <a:xfrm>
+          <a:off x="0" y="0"/>
+          <a:ext cx="0" cy="0"/>
+          <a:chOff x="0" y="0"/>
+          <a:chExt cx="0" cy="0"/>
+        </a:xfrm>
+      </p:grpSpPr>
+      <p:sp>
+        <p:nvSpPr>
+          <p:cNvPr id="2" name="Slide Image Placeholder 1"/>
+          <p:cNvSpPr>
+            <a:spLocks noGrp="1" noRot="1" noChangeAspect="1"/>
+          </p:cNvSpPr>
+          <p:nvPr>
+            <p:ph type="sldImg"/>
+          </p:nvPr>
+        </p:nvSpPr>
+        <p:spPr/>
+      </p:sp>
+      <p:sp>
+        <p:nvSpPr>
+          <p:cNvPr id="3" name="Notes Placeholder 2"/>
+          <p:cNvSpPr>
+            <a:spLocks noGrp="1"/>
+          </p:cNvSpPr>
+          <p:nvPr>
+            <p:ph type="body" idx="1"/>
+          </p:nvPr>
+        </p:nvSpPr>
+        <p:spPr/>
+        <p:txBody>
+          <a:bodyPr/>
+          <a:lstStyle/>
+          <a:p>
+            <a:r>
+              <a:rPr lang="en-US" dirty="0"/>
+              <a:t>Source URLs and attribution:
+1. Slideland schematic and taste references | URL: https://www.slideland.tech/ | Notes: Layouts are inspired by common schematic categories, not copied from source visuals.
+Slide 5: 参考URL・出典</a:t>
+            </a:r>
+            <a:endParaRPr lang="en-US" dirty="0"/>
+          </a:p>
+        </p:txBody>
+      </p:sp>
+      <p:sp>
+        <p:nvSpPr>
+          <p:cNvPr id="4" name="Slide Number Placeholder 3"/>
+          <p:cNvSpPr>
+            <a:spLocks noGrp="1"/>
+          </p:cNvSpPr>
+          <p:nvPr>
+            <p:ph type="sldNum" sz="quarter" idx="10"/>
+          </p:nvPr>
+        </p:nvSpPr>
+        <p:spPr/>
+        <p:txBody>
+          <a:bodyPr/>
+          <a:lstStyle/>
+          <a:p>
+            <a:fld id="{F7021451-1387-4CA6-816F-3879F97B5CBC}" type="slidenum">
+              <a:rPr lang="en-US"/>
+              <a:t>5</a:t>
             </a:fld>
             <a:endParaRPr lang="en-US"/>
           </a:p>
@@ -1370,6 +1461,178 @@
           </a:prstGeom>
         </p:spPr>
       </p:pic>
+    </p:spTree>
+  </p:cSld>
+  <p:clrMapOvr>
+    <a:masterClrMapping/>
+  </p:clrMapOvr>
+</p:sld>
+</file>
+
+<file path=ppt/slides/slide5.xml><?xml version="1.0" encoding="utf-8"?>
+<p:sld xmlns:a="http://schemas.openxmlformats.org/drawingml/2006/main" xmlns:r="http://schemas.openxmlformats.org/officeDocument/2006/relationships" xmlns:p="http://schemas.openxmlformats.org/presentationml/2006/main">
+  <p:cSld name="Slide 5">
+    <p:bg>
+      <p:bgPr>
+        <a:solidFill>
+          <a:srgbClr val="FFFFFF"/>
+        </a:solidFill>
+      </p:bgPr>
+    </p:bg>
+    <p:spTree>
+      <p:nvGrpSpPr>
+        <p:cNvPr id="1" name=""/>
+        <p:cNvGrpSpPr/>
+        <p:nvPr/>
+      </p:nvGrpSpPr>
+      <p:grpSpPr>
+        <a:xfrm>
+          <a:off x="0" y="0"/>
+          <a:ext cx="0" cy="0"/>
+          <a:chOff x="0" y="0"/>
+          <a:chExt cx="0" cy="0"/>
+        </a:xfrm>
+      </p:grpSpPr>
+      <p:sp>
+        <p:nvSpPr>
+          <p:cNvPr id="2" name="Text 0"/>
+          <p:cNvSpPr/>
+          <p:nvPr/>
+        </p:nvSpPr>
+        <p:spPr>
+          <a:xfrm>
+            <a:off x="685800" y="530352"/>
+            <a:ext cx="10789920" cy="822960"/>
+          </a:xfrm>
+          <a:prstGeom prst="rect">
+            <a:avLst/>
+          </a:prstGeom>
+          <a:noFill/>
+          <a:ln/>
+        </p:spPr>
+        <p:txBody>
+          <a:bodyPr wrap="square" lIns="254" tIns="254" rIns="254" bIns="254" rtlCol="0" anchor="ctr">
+            <a:normAutofit/>
+          </a:bodyPr>
+          <a:lstStyle/>
+          <a:p>
+            <a:pPr indent="0" marL="0">
+              <a:buNone/>
+            </a:pPr>
+            <a:r>
+              <a:rPr lang="en-US" sz="3400" b="1" dirty="0">
+                <a:solidFill>
+                  <a:srgbClr val="1F2933"/>
+                </a:solidFill>
+                <a:latin typeface="Yu Gothic" pitchFamily="34" charset="0"/>
+                <a:ea typeface="Yu Gothic" pitchFamily="34" charset="-122"/>
+                <a:cs typeface="Yu Gothic" pitchFamily="34" charset="-120"/>
+              </a:rPr>
+              <a:t>参考URL・出典</a:t>
+            </a:r>
+            <a:endParaRPr lang="en-US" sz="3400" dirty="0"/>
+          </a:p>
+        </p:txBody>
+      </p:sp>
+      <p:sp>
+        <p:nvSpPr>
+          <p:cNvPr id="3" name="Text 1"/>
+          <p:cNvSpPr/>
+          <p:nvPr/>
+        </p:nvSpPr>
+        <p:spPr>
+          <a:xfrm>
+            <a:off x="713232" y="1353312"/>
+            <a:ext cx="10607040" cy="384048"/>
+          </a:xfrm>
+          <a:prstGeom prst="rect">
+            <a:avLst/>
+          </a:prstGeom>
+          <a:noFill/>
+          <a:ln/>
+        </p:spPr>
+        <p:txBody>
+          <a:bodyPr wrap="square" lIns="254" tIns="254" rIns="254" bIns="254" rtlCol="0" anchor="ctr">
+            <a:normAutofit/>
+          </a:bodyPr>
+          <a:lstStyle/>
+          <a:p>
+            <a:pPr indent="0" marL="0">
+              <a:buNone/>
+            </a:pPr>
+            <a:r>
+              <a:rPr lang="en-US" sz="2000" dirty="0">
+                <a:solidFill>
+                  <a:srgbClr val="59636E"/>
+                </a:solidFill>
+                <a:latin typeface="Yu Gothic" pitchFamily="34" charset="0"/>
+                <a:ea typeface="Yu Gothic" pitchFamily="34" charset="-122"/>
+                <a:cs typeface="Yu Gothic" pitchFamily="34" charset="-120"/>
+              </a:rPr>
+              <a:t>外部サイトを参照した内容は、以下のURLを出典として確認できます（1件）。</a:t>
+            </a:r>
+            <a:endParaRPr lang="en-US" sz="2000" dirty="0"/>
+          </a:p>
+        </p:txBody>
+      </p:sp>
+      <p:sp>
+        <p:nvSpPr>
+          <p:cNvPr id="4" name="Text 2"/>
+          <p:cNvSpPr/>
+          <p:nvPr/>
+        </p:nvSpPr>
+        <p:spPr>
+          <a:xfrm>
+            <a:off x="777240" y="1901952"/>
+            <a:ext cx="10469880" cy="4352544"/>
+          </a:xfrm>
+          <a:prstGeom prst="rect">
+            <a:avLst/>
+          </a:prstGeom>
+          <a:noFill/>
+          <a:ln/>
+        </p:spPr>
+        <p:txBody>
+          <a:bodyPr wrap="square" lIns="254" tIns="254" rIns="254" bIns="254" rtlCol="0" anchor="ctr">
+            <a:normAutofit/>
+          </a:bodyPr>
+          <a:lstStyle/>
+          <a:p>
+            <a:pPr indent="0" marL="0">
+              <a:buNone/>
+            </a:pPr>
+            <a:r>
+              <a:rPr lang="en-US" sz="1400" dirty="0">
+                <a:solidFill>
+                  <a:srgbClr val="1F2933"/>
+                </a:solidFill>
+                <a:latin typeface="Yu Gothic" pitchFamily="34" charset="0"/>
+                <a:ea typeface="Yu Gothic" pitchFamily="34" charset="-122"/>
+                <a:cs typeface="Yu Gothic" pitchFamily="34" charset="-120"/>
+              </a:rPr>
+              <a:t>1. Slideland schematic and taste references</a:t>
+            </a:r>
+            <a:endParaRPr lang="en-US" sz="1400" dirty="0"/>
+          </a:p>
+          <a:p>
+            <a:pPr indent="0" marL="0">
+              <a:buNone/>
+            </a:pPr>
+            <a:r>
+              <a:rPr lang="en-US" sz="1400" dirty="0">
+                <a:solidFill>
+                  <a:srgbClr val="1F2933"/>
+                </a:solidFill>
+                <a:latin typeface="Yu Gothic" pitchFamily="34" charset="0"/>
+                <a:ea typeface="Yu Gothic" pitchFamily="34" charset="-122"/>
+                <a:cs typeface="Yu Gothic" pitchFamily="34" charset="-120"/>
+              </a:rPr>
+              <a:t>https://www.slideland.tech/</a:t>
+            </a:r>
+            <a:endParaRPr lang="en-US" sz="1400" dirty="0"/>
+          </a:p>
+        </p:txBody>
+      </p:sp>
     </p:spTree>
   </p:cSld>
   <p:clrMapOvr>

--- a/samples/schematic-patterns.pptx
+++ b/samples/schematic-patterns.pptx
@@ -4,6 +4,9 @@
   <p:sldMasterIdLst>
     <p:sldMasterId id="2147483648" r:id="rId1"/>
   </p:sldMasterIdLst>
+  <p:notesMasterIdLst>
+    <p:notesMasterId r:id="rId7"/>
+  </p:notesMasterIdLst>
   <p:sldIdLst>
     <p:sldId id="256" r:id="rId2"/>
     <p:sldId id="257" r:id="rId3"/>
@@ -11,9 +14,6 @@
     <p:sldId id="259" r:id="rId5"/>
     <p:sldId id="260" r:id="rId6"/>
   </p:sldIdLst>
-  <p:notesMasterIdLst>
-    <p:notesMasterId r:id="rId7"/>
-  </p:notesMasterIdLst>
   <p:sldSz cx="12192000" cy="6858000"/>
   <p:notesSz cx="6858000" cy="12192000"/>
   <p:defaultTextStyle>

--- a/samples/schematic-patterns.pptx
+++ b/samples/schematic-patterns.pptx
@@ -5,7 +5,7 @@
     <p:sldMasterId id="2147483648" r:id="rId1"/>
   </p:sldMasterIdLst>
   <p:notesMasterIdLst>
-    <p:notesMasterId r:id="rId7"/>
+    <p:notesMasterId r:id="rId28"/>
   </p:notesMasterIdLst>
   <p:sldIdLst>
     <p:sldId id="256" r:id="rId2"/>
@@ -13,6 +13,27 @@
     <p:sldId id="258" r:id="rId4"/>
     <p:sldId id="259" r:id="rId5"/>
     <p:sldId id="260" r:id="rId6"/>
+    <p:sldId id="261" r:id="rId7"/>
+    <p:sldId id="262" r:id="rId8"/>
+    <p:sldId id="263" r:id="rId9"/>
+    <p:sldId id="264" r:id="rId10"/>
+    <p:sldId id="265" r:id="rId11"/>
+    <p:sldId id="266" r:id="rId12"/>
+    <p:sldId id="267" r:id="rId13"/>
+    <p:sldId id="268" r:id="rId14"/>
+    <p:sldId id="269" r:id="rId15"/>
+    <p:sldId id="270" r:id="rId16"/>
+    <p:sldId id="271" r:id="rId17"/>
+    <p:sldId id="272" r:id="rId18"/>
+    <p:sldId id="273" r:id="rId19"/>
+    <p:sldId id="274" r:id="rId20"/>
+    <p:sldId id="275" r:id="rId21"/>
+    <p:sldId id="276" r:id="rId22"/>
+    <p:sldId id="277" r:id="rId23"/>
+    <p:sldId id="278" r:id="rId24"/>
+    <p:sldId id="279" r:id="rId25"/>
+    <p:sldId id="280" r:id="rId26"/>
+    <p:sldId id="281" r:id="rId27"/>
   </p:sldIdLst>
   <p:sldSz cx="12192000" cy="6858000"/>
   <p:notesSz cx="6858000" cy="12192000"/>
@@ -506,10 +527,10 @@
           <a:p>
             <a:r>
               <a:rPr lang="en-US" dirty="0"/>
-              <a:t>generate_schematic で生成した安全な図解プリセットの例です。
-Slide 1: 横型フロー: 作成から検証までを迷わず進める
-flow-visual: flow schematic sample
-flow-visual long description: flow schematic sample generated from a safe preset to demonstrate Slideland-inspired layouts in pptcreater.</a:t>
+              <a:t>Pattern: table. Style profile: minimal. Two-column comparison or structured attribute table.
+Slide 1: 表: 論点と判断材料をそろえる
+table-visual: 表 (table) schematic sample
+table-visual long description: 表 (table) のサンプルです。Two-column comparison or structured attribute table. pptcreater の安全なschematicプリセットで生成しています。</a:t>
             </a:r>
             <a:endParaRPr lang="en-US" dirty="0"/>
           </a:p>
@@ -551,6 +572,916 @@
 </p:notes>
 </file>
 
+<file path=ppt/notesSlides/notesSlide10.xml><?xml version="1.0" encoding="utf-8"?>
+<p:notes xmlns:a="http://schemas.openxmlformats.org/drawingml/2006/main" xmlns:r="http://schemas.openxmlformats.org/officeDocument/2006/relationships" xmlns:p="http://schemas.openxmlformats.org/presentationml/2006/main">
+  <p:cSld>
+    <p:spTree>
+      <p:nvGrpSpPr>
+        <p:cNvPr id="1" name=""/>
+        <p:cNvGrpSpPr/>
+        <p:nvPr/>
+      </p:nvGrpSpPr>
+      <p:grpSpPr>
+        <a:xfrm>
+          <a:off x="0" y="0"/>
+          <a:ext cx="0" cy="0"/>
+          <a:chOff x="0" y="0"/>
+          <a:chExt cx="0" cy="0"/>
+        </a:xfrm>
+      </p:grpSpPr>
+      <p:sp>
+        <p:nvSpPr>
+          <p:cNvPr id="2" name="Slide Image Placeholder 1"/>
+          <p:cNvSpPr>
+            <a:spLocks noGrp="1" noRot="1" noChangeAspect="1"/>
+          </p:cNvSpPr>
+          <p:nvPr>
+            <p:ph type="sldImg"/>
+          </p:nvPr>
+        </p:nvSpPr>
+        <p:spPr/>
+      </p:sp>
+      <p:sp>
+        <p:nvSpPr>
+          <p:cNvPr id="3" name="Notes Placeholder 2"/>
+          <p:cNvSpPr>
+            <a:spLocks noGrp="1"/>
+          </p:cNvSpPr>
+          <p:nvPr>
+            <p:ph type="body" idx="1"/>
+          </p:nvPr>
+        </p:nvSpPr>
+        <p:spPr/>
+        <p:txBody>
+          <a:bodyPr/>
+          <a:lstStyle/>
+          <a:p>
+            <a:r>
+              <a:rPr lang="en-US" dirty="0"/>
+              <a:t>Pattern: matrix. Style profile: technical. 2x2 positioning map for prioritization or segmentation.
+Slide 10: マトリクス: 優先度を2軸で判断する
+matrix-visual: マトリクス (matrix) schematic sample
+matrix-visual long description: マトリクス (matrix) のサンプルです。2x2 positioning map for prioritization or segmentation. pptcreater の安全なschematicプリセットで生成しています。</a:t>
+            </a:r>
+            <a:endParaRPr lang="en-US" dirty="0"/>
+          </a:p>
+        </p:txBody>
+      </p:sp>
+      <p:sp>
+        <p:nvSpPr>
+          <p:cNvPr id="4" name="Slide Number Placeholder 3"/>
+          <p:cNvSpPr>
+            <a:spLocks noGrp="1"/>
+          </p:cNvSpPr>
+          <p:nvPr>
+            <p:ph type="sldNum" sz="quarter" idx="10"/>
+          </p:nvPr>
+        </p:nvSpPr>
+        <p:spPr/>
+        <p:txBody>
+          <a:bodyPr/>
+          <a:lstStyle/>
+          <a:p>
+            <a:fld id="{F7021451-1387-4CA6-816F-3879F97B5CBC}" type="slidenum">
+              <a:rPr lang="en-US"/>
+              <a:t>10</a:t>
+            </a:fld>
+            <a:endParaRPr lang="en-US"/>
+          </a:p>
+        </p:txBody>
+      </p:sp>
+    </p:spTree>
+    <p:extLst>
+      <p:ext uri="{BB962C8B-B14F-4D97-AF65-F5344CB8AC3E}">
+        <p14:creationId xmlns:p14="http://schemas.microsoft.com/office/powerpoint/2010/main" val="1024086991"/>
+      </p:ext>
+    </p:extLst>
+  </p:cSld>
+  <p:clrMapOvr>
+    <a:masterClrMapping/>
+  </p:clrMapOvr>
+</p:notes>
+</file>
+
+<file path=ppt/notesSlides/notesSlide11.xml><?xml version="1.0" encoding="utf-8"?>
+<p:notes xmlns:a="http://schemas.openxmlformats.org/drawingml/2006/main" xmlns:r="http://schemas.openxmlformats.org/officeDocument/2006/relationships" xmlns:p="http://schemas.openxmlformats.org/presentationml/2006/main">
+  <p:cSld>
+    <p:spTree>
+      <p:nvGrpSpPr>
+        <p:cNvPr id="1" name=""/>
+        <p:cNvGrpSpPr/>
+        <p:nvPr/>
+      </p:nvGrpSpPr>
+      <p:grpSpPr>
+        <a:xfrm>
+          <a:off x="0" y="0"/>
+          <a:ext cx="0" cy="0"/>
+          <a:chOff x="0" y="0"/>
+          <a:chExt cx="0" cy="0"/>
+        </a:xfrm>
+      </p:grpSpPr>
+      <p:sp>
+        <p:nvSpPr>
+          <p:cNvPr id="2" name="Slide Image Placeholder 1"/>
+          <p:cNvSpPr>
+            <a:spLocks noGrp="1" noRot="1" noChangeAspect="1"/>
+          </p:cNvSpPr>
+          <p:nvPr>
+            <p:ph type="sldImg"/>
+          </p:nvPr>
+        </p:nvSpPr>
+        <p:spPr/>
+      </p:sp>
+      <p:sp>
+        <p:nvSpPr>
+          <p:cNvPr id="3" name="Notes Placeholder 2"/>
+          <p:cNvSpPr>
+            <a:spLocks noGrp="1"/>
+          </p:cNvSpPr>
+          <p:nvPr>
+            <p:ph type="body" idx="1"/>
+          </p:nvPr>
+        </p:nvSpPr>
+        <p:spPr/>
+        <p:txBody>
+          <a:bodyPr/>
+          <a:lstStyle/>
+          <a:p>
+            <a:r>
+              <a:rPr lang="en-US" dirty="0"/>
+              <a:t>Pattern: venn. Style profile: minimal. Overlap among two or three sets with an intersection message.
+Slide 11: ベン図: 重なりから価値を説明する
+venn-visual: ベン図 (venn) schematic sample
+venn-visual long description: ベン図 (venn) のサンプルです。Overlap among two or three sets with an intersection message. pptcreater の安全なschematicプリセットで生成しています。</a:t>
+            </a:r>
+            <a:endParaRPr lang="en-US" dirty="0"/>
+          </a:p>
+        </p:txBody>
+      </p:sp>
+      <p:sp>
+        <p:nvSpPr>
+          <p:cNvPr id="4" name="Slide Number Placeholder 3"/>
+          <p:cNvSpPr>
+            <a:spLocks noGrp="1"/>
+          </p:cNvSpPr>
+          <p:nvPr>
+            <p:ph type="sldNum" sz="quarter" idx="10"/>
+          </p:nvPr>
+        </p:nvSpPr>
+        <p:spPr/>
+        <p:txBody>
+          <a:bodyPr/>
+          <a:lstStyle/>
+          <a:p>
+            <a:fld id="{F7021451-1387-4CA6-816F-3879F97B5CBC}" type="slidenum">
+              <a:rPr lang="en-US"/>
+              <a:t>11</a:t>
+            </a:fld>
+            <a:endParaRPr lang="en-US"/>
+          </a:p>
+        </p:txBody>
+      </p:sp>
+    </p:spTree>
+    <p:extLst>
+      <p:ext uri="{BB962C8B-B14F-4D97-AF65-F5344CB8AC3E}">
+        <p14:creationId xmlns:p14="http://schemas.microsoft.com/office/powerpoint/2010/main" val="1024086991"/>
+      </p:ext>
+    </p:extLst>
+  </p:cSld>
+  <p:clrMapOvr>
+    <a:masterClrMapping/>
+  </p:clrMapOvr>
+</p:notes>
+</file>
+
+<file path=ppt/notesSlides/notesSlide12.xml><?xml version="1.0" encoding="utf-8"?>
+<p:notes xmlns:a="http://schemas.openxmlformats.org/drawingml/2006/main" xmlns:r="http://schemas.openxmlformats.org/officeDocument/2006/relationships" xmlns:p="http://schemas.openxmlformats.org/presentationml/2006/main">
+  <p:cSld>
+    <p:spTree>
+      <p:nvGrpSpPr>
+        <p:cNvPr id="1" name=""/>
+        <p:cNvGrpSpPr/>
+        <p:nvPr/>
+      </p:nvGrpSpPr>
+      <p:grpSpPr>
+        <a:xfrm>
+          <a:off x="0" y="0"/>
+          <a:ext cx="0" cy="0"/>
+          <a:chOff x="0" y="0"/>
+          <a:chExt cx="0" cy="0"/>
+        </a:xfrm>
+      </p:grpSpPr>
+      <p:sp>
+        <p:nvSpPr>
+          <p:cNvPr id="2" name="Slide Image Placeholder 1"/>
+          <p:cNvSpPr>
+            <a:spLocks noGrp="1" noRot="1" noChangeAspect="1"/>
+          </p:cNvSpPr>
+          <p:nvPr>
+            <p:ph type="sldImg"/>
+          </p:nvPr>
+        </p:nvSpPr>
+        <p:spPr/>
+      </p:sp>
+      <p:sp>
+        <p:nvSpPr>
+          <p:cNvPr id="3" name="Notes Placeholder 2"/>
+          <p:cNvSpPr>
+            <a:spLocks noGrp="1"/>
+          </p:cNvSpPr>
+          <p:nvPr>
+            <p:ph type="body" idx="1"/>
+          </p:nvPr>
+        </p:nvSpPr>
+        <p:spPr/>
+        <p:txBody>
+          <a:bodyPr/>
+          <a:lstStyle/>
+          <a:p>
+            <a:r>
+              <a:rPr lang="en-US" dirty="0"/>
+              <a:t>Pattern: cross. Style profile: stylish. Inputs combined into a result using a simple plus/equal grammar.
+Slide 12: 数式: 複数要素を成果へつなげる
+cross-visual: 数式 (cross) schematic sample
+cross-visual long description: 数式 (cross) のサンプルです。Inputs combined into a result using a simple plus/equal grammar. pptcreater の安全なschematicプリセットで生成しています。</a:t>
+            </a:r>
+            <a:endParaRPr lang="en-US" dirty="0"/>
+          </a:p>
+        </p:txBody>
+      </p:sp>
+      <p:sp>
+        <p:nvSpPr>
+          <p:cNvPr id="4" name="Slide Number Placeholder 3"/>
+          <p:cNvSpPr>
+            <a:spLocks noGrp="1"/>
+          </p:cNvSpPr>
+          <p:nvPr>
+            <p:ph type="sldNum" sz="quarter" idx="10"/>
+          </p:nvPr>
+        </p:nvSpPr>
+        <p:spPr/>
+        <p:txBody>
+          <a:bodyPr/>
+          <a:lstStyle/>
+          <a:p>
+            <a:fld id="{F7021451-1387-4CA6-816F-3879F97B5CBC}" type="slidenum">
+              <a:rPr lang="en-US"/>
+              <a:t>12</a:t>
+            </a:fld>
+            <a:endParaRPr lang="en-US"/>
+          </a:p>
+        </p:txBody>
+      </p:sp>
+    </p:spTree>
+    <p:extLst>
+      <p:ext uri="{BB962C8B-B14F-4D97-AF65-F5344CB8AC3E}">
+        <p14:creationId xmlns:p14="http://schemas.microsoft.com/office/powerpoint/2010/main" val="1024086991"/>
+      </p:ext>
+    </p:extLst>
+  </p:cSld>
+  <p:clrMapOvr>
+    <a:masterClrMapping/>
+  </p:clrMapOvr>
+</p:notes>
+</file>
+
+<file path=ppt/notesSlides/notesSlide13.xml><?xml version="1.0" encoding="utf-8"?>
+<p:notes xmlns:a="http://schemas.openxmlformats.org/drawingml/2006/main" xmlns:r="http://schemas.openxmlformats.org/officeDocument/2006/relationships" xmlns:p="http://schemas.openxmlformats.org/presentationml/2006/main">
+  <p:cSld>
+    <p:spTree>
+      <p:nvGrpSpPr>
+        <p:cNvPr id="1" name=""/>
+        <p:cNvGrpSpPr/>
+        <p:nvPr/>
+      </p:nvGrpSpPr>
+      <p:grpSpPr>
+        <a:xfrm>
+          <a:off x="0" y="0"/>
+          <a:ext cx="0" cy="0"/>
+          <a:chOff x="0" y="0"/>
+          <a:chExt cx="0" cy="0"/>
+        </a:xfrm>
+      </p:grpSpPr>
+      <p:sp>
+        <p:nvSpPr>
+          <p:cNvPr id="2" name="Slide Image Placeholder 1"/>
+          <p:cNvSpPr>
+            <a:spLocks noGrp="1" noRot="1" noChangeAspect="1"/>
+          </p:cNvSpPr>
+          <p:nvPr>
+            <p:ph type="sldImg"/>
+          </p:nvPr>
+        </p:nvSpPr>
+        <p:spPr/>
+      </p:sp>
+      <p:sp>
+        <p:nvSpPr>
+          <p:cNvPr id="3" name="Notes Placeholder 2"/>
+          <p:cNvSpPr>
+            <a:spLocks noGrp="1"/>
+          </p:cNvSpPr>
+          <p:nvPr>
+            <p:ph type="body" idx="1"/>
+          </p:nvPr>
+        </p:nvSpPr>
+        <p:spPr/>
+        <p:txBody>
+          <a:bodyPr/>
+          <a:lstStyle/>
+          <a:p>
+            <a:r>
+              <a:rPr lang="en-US" dirty="0"/>
+              <a:t>Pattern: set. Style profile: report. Grouped containers with optional member pills.
+Slide 13: グループ/集合: 要素をまとまりで見せる
+set-visual: グループ/集合 (set) schematic sample
+set-visual long description: グループ/集合 (set) のサンプルです。Grouped containers with optional member pills. pptcreater の安全なschematicプリセットで生成しています。</a:t>
+            </a:r>
+            <a:endParaRPr lang="en-US" dirty="0"/>
+          </a:p>
+        </p:txBody>
+      </p:sp>
+      <p:sp>
+        <p:nvSpPr>
+          <p:cNvPr id="4" name="Slide Number Placeholder 3"/>
+          <p:cNvSpPr>
+            <a:spLocks noGrp="1"/>
+          </p:cNvSpPr>
+          <p:nvPr>
+            <p:ph type="sldNum" sz="quarter" idx="10"/>
+          </p:nvPr>
+        </p:nvSpPr>
+        <p:spPr/>
+        <p:txBody>
+          <a:bodyPr/>
+          <a:lstStyle/>
+          <a:p>
+            <a:fld id="{F7021451-1387-4CA6-816F-3879F97B5CBC}" type="slidenum">
+              <a:rPr lang="en-US"/>
+              <a:t>13</a:t>
+            </a:fld>
+            <a:endParaRPr lang="en-US"/>
+          </a:p>
+        </p:txBody>
+      </p:sp>
+    </p:spTree>
+    <p:extLst>
+      <p:ext uri="{BB962C8B-B14F-4D97-AF65-F5344CB8AC3E}">
+        <p14:creationId xmlns:p14="http://schemas.microsoft.com/office/powerpoint/2010/main" val="1024086991"/>
+      </p:ext>
+    </p:extLst>
+  </p:cSld>
+  <p:clrMapOvr>
+    <a:masterClrMapping/>
+  </p:clrMapOvr>
+</p:notes>
+</file>
+
+<file path=ppt/notesSlides/notesSlide14.xml><?xml version="1.0" encoding="utf-8"?>
+<p:notes xmlns:a="http://schemas.openxmlformats.org/drawingml/2006/main" xmlns:r="http://schemas.openxmlformats.org/officeDocument/2006/relationships" xmlns:p="http://schemas.openxmlformats.org/presentationml/2006/main">
+  <p:cSld>
+    <p:spTree>
+      <p:nvGrpSpPr>
+        <p:cNvPr id="1" name=""/>
+        <p:cNvGrpSpPr/>
+        <p:nvPr/>
+      </p:nvGrpSpPr>
+      <p:grpSpPr>
+        <a:xfrm>
+          <a:off x="0" y="0"/>
+          <a:ext cx="0" cy="0"/>
+          <a:chOff x="0" y="0"/>
+          <a:chExt cx="0" cy="0"/>
+        </a:xfrm>
+      </p:grpSpPr>
+      <p:sp>
+        <p:nvSpPr>
+          <p:cNvPr id="2" name="Slide Image Placeholder 1"/>
+          <p:cNvSpPr>
+            <a:spLocks noGrp="1" noRot="1" noChangeAspect="1"/>
+          </p:cNvSpPr>
+          <p:nvPr>
+            <p:ph type="sldImg"/>
+          </p:nvPr>
+        </p:nvSpPr>
+        <p:spPr/>
+      </p:sp>
+      <p:sp>
+        <p:nvSpPr>
+          <p:cNvPr id="3" name="Notes Placeholder 2"/>
+          <p:cNvSpPr>
+            <a:spLocks noGrp="1"/>
+          </p:cNvSpPr>
+          <p:nvPr>
+            <p:ph type="body" idx="1"/>
+          </p:nvPr>
+        </p:nvSpPr>
+        <p:spPr/>
+        <p:txBody>
+          <a:bodyPr/>
+          <a:lstStyle/>
+          <a:p>
+            <a:r>
+              <a:rPr lang="en-US" dirty="0"/>
+              <a:t>Pattern: contrast. Style profile: presentation. Side-by-side option comparison with aligned rows and a center VS badge.
+Slide 14: 項目比較: 2案の違いを並べて見せる
+contrast-visual: 項目比較 (contrast) schematic sample
+contrast-visual long description: 項目比較 (contrast) のサンプルです。Side-by-side option comparison with aligned rows and a center VS badge. pptcreater の安全なschematicプリセットで生成しています。</a:t>
+            </a:r>
+            <a:endParaRPr lang="en-US" dirty="0"/>
+          </a:p>
+        </p:txBody>
+      </p:sp>
+      <p:sp>
+        <p:nvSpPr>
+          <p:cNvPr id="4" name="Slide Number Placeholder 3"/>
+          <p:cNvSpPr>
+            <a:spLocks noGrp="1"/>
+          </p:cNvSpPr>
+          <p:nvPr>
+            <p:ph type="sldNum" sz="quarter" idx="10"/>
+          </p:nvPr>
+        </p:nvSpPr>
+        <p:spPr/>
+        <p:txBody>
+          <a:bodyPr/>
+          <a:lstStyle/>
+          <a:p>
+            <a:fld id="{F7021451-1387-4CA6-816F-3879F97B5CBC}" type="slidenum">
+              <a:rPr lang="en-US"/>
+              <a:t>14</a:t>
+            </a:fld>
+            <a:endParaRPr lang="en-US"/>
+          </a:p>
+        </p:txBody>
+      </p:sp>
+    </p:spTree>
+    <p:extLst>
+      <p:ext uri="{BB962C8B-B14F-4D97-AF65-F5344CB8AC3E}">
+        <p14:creationId xmlns:p14="http://schemas.microsoft.com/office/powerpoint/2010/main" val="1024086991"/>
+      </p:ext>
+    </p:extLst>
+  </p:cSld>
+  <p:clrMapOvr>
+    <a:masterClrMapping/>
+  </p:clrMapOvr>
+</p:notes>
+</file>
+
+<file path=ppt/notesSlides/notesSlide15.xml><?xml version="1.0" encoding="utf-8"?>
+<p:notes xmlns:a="http://schemas.openxmlformats.org/drawingml/2006/main" xmlns:r="http://schemas.openxmlformats.org/officeDocument/2006/relationships" xmlns:p="http://schemas.openxmlformats.org/presentationml/2006/main">
+  <p:cSld>
+    <p:spTree>
+      <p:nvGrpSpPr>
+        <p:cNvPr id="1" name=""/>
+        <p:cNvGrpSpPr/>
+        <p:nvPr/>
+      </p:nvGrpSpPr>
+      <p:grpSpPr>
+        <a:xfrm>
+          <a:off x="0" y="0"/>
+          <a:ext cx="0" cy="0"/>
+          <a:chOff x="0" y="0"/>
+          <a:chExt cx="0" cy="0"/>
+        </a:xfrm>
+      </p:grpSpPr>
+      <p:sp>
+        <p:nvSpPr>
+          <p:cNvPr id="2" name="Slide Image Placeholder 1"/>
+          <p:cNvSpPr>
+            <a:spLocks noGrp="1" noRot="1" noChangeAspect="1"/>
+          </p:cNvSpPr>
+          <p:nvPr>
+            <p:ph type="sldImg"/>
+          </p:nvPr>
+        </p:nvSpPr>
+        <p:spPr/>
+      </p:sp>
+      <p:sp>
+        <p:nvSpPr>
+          <p:cNvPr id="3" name="Notes Placeholder 2"/>
+          <p:cNvSpPr>
+            <a:spLocks noGrp="1"/>
+          </p:cNvSpPr>
+          <p:nvPr>
+            <p:ph type="body" idx="1"/>
+          </p:nvPr>
+        </p:nvSpPr>
+        <p:spPr/>
+        <p:txBody>
+          <a:bodyPr/>
+          <a:lstStyle/>
+          <a:p>
+            <a:r>
+              <a:rPr lang="en-US" dirty="0"/>
+              <a:t>Pattern: scale-contrast. Style profile: technical. Relative-size bubbles based on parsed numeric values.
+Slide 15: 規模比較: 数値差を面積で直感化する
+scale-contrast-visual: 規模比較 (scale-contrast) schematic sample
+scale-contrast-visual long description: 規模比較 (scale-contrast) のサンプルです。Relative-size bubbles based on parsed numeric values. pptcreater の安全なschematicプリセットで生成しています。</a:t>
+            </a:r>
+            <a:endParaRPr lang="en-US" dirty="0"/>
+          </a:p>
+        </p:txBody>
+      </p:sp>
+      <p:sp>
+        <p:nvSpPr>
+          <p:cNvPr id="4" name="Slide Number Placeholder 3"/>
+          <p:cNvSpPr>
+            <a:spLocks noGrp="1"/>
+          </p:cNvSpPr>
+          <p:nvPr>
+            <p:ph type="sldNum" sz="quarter" idx="10"/>
+          </p:nvPr>
+        </p:nvSpPr>
+        <p:spPr/>
+        <p:txBody>
+          <a:bodyPr/>
+          <a:lstStyle/>
+          <a:p>
+            <a:fld id="{F7021451-1387-4CA6-816F-3879F97B5CBC}" type="slidenum">
+              <a:rPr lang="en-US"/>
+              <a:t>15</a:t>
+            </a:fld>
+            <a:endParaRPr lang="en-US"/>
+          </a:p>
+        </p:txBody>
+      </p:sp>
+    </p:spTree>
+    <p:extLst>
+      <p:ext uri="{BB962C8B-B14F-4D97-AF65-F5344CB8AC3E}">
+        <p14:creationId xmlns:p14="http://schemas.microsoft.com/office/powerpoint/2010/main" val="1024086991"/>
+      </p:ext>
+    </p:extLst>
+  </p:cSld>
+  <p:clrMapOvr>
+    <a:masterClrMapping/>
+  </p:clrMapOvr>
+</p:notes>
+</file>
+
+<file path=ppt/notesSlides/notesSlide16.xml><?xml version="1.0" encoding="utf-8"?>
+<p:notes xmlns:a="http://schemas.openxmlformats.org/drawingml/2006/main" xmlns:r="http://schemas.openxmlformats.org/officeDocument/2006/relationships" xmlns:p="http://schemas.openxmlformats.org/presentationml/2006/main">
+  <p:cSld>
+    <p:spTree>
+      <p:nvGrpSpPr>
+        <p:cNvPr id="1" name=""/>
+        <p:cNvGrpSpPr/>
+        <p:nvPr/>
+      </p:nvGrpSpPr>
+      <p:grpSpPr>
+        <a:xfrm>
+          <a:off x="0" y="0"/>
+          <a:ext cx="0" cy="0"/>
+          <a:chOff x="0" y="0"/>
+          <a:chExt cx="0" cy="0"/>
+        </a:xfrm>
+      </p:grpSpPr>
+      <p:sp>
+        <p:nvSpPr>
+          <p:cNvPr id="2" name="Slide Image Placeholder 1"/>
+          <p:cNvSpPr>
+            <a:spLocks noGrp="1" noRot="1" noChangeAspect="1"/>
+          </p:cNvSpPr>
+          <p:nvPr>
+            <p:ph type="sldImg"/>
+          </p:nvPr>
+        </p:nvSpPr>
+        <p:spPr/>
+      </p:sp>
+      <p:sp>
+        <p:nvSpPr>
+          <p:cNvPr id="3" name="Notes Placeholder 2"/>
+          <p:cNvSpPr>
+            <a:spLocks noGrp="1"/>
+          </p:cNvSpPr>
+          <p:nvPr>
+            <p:ph type="body" idx="1"/>
+          </p:nvPr>
+        </p:nvSpPr>
+        <p:spPr/>
+        <p:txBody>
+          <a:bodyPr/>
+          <a:lstStyle/>
+          <a:p>
+            <a:r>
+              <a:rPr lang="en-US" dirty="0"/>
+              <a:t>Pattern: grow. Style profile: minimal. Concentric market-size or scope analysis.
+Slide 16: 規模分析: TAM/SAM/SOMを同心円で示す
+grow-visual: 規模分析 (grow) schematic sample
+grow-visual long description: 規模分析 (grow) のサンプルです。Concentric market-size or scope analysis. pptcreater の安全なschematicプリセットで生成しています。</a:t>
+            </a:r>
+            <a:endParaRPr lang="en-US" dirty="0"/>
+          </a:p>
+        </p:txBody>
+      </p:sp>
+      <p:sp>
+        <p:nvSpPr>
+          <p:cNvPr id="4" name="Slide Number Placeholder 3"/>
+          <p:cNvSpPr>
+            <a:spLocks noGrp="1"/>
+          </p:cNvSpPr>
+          <p:nvPr>
+            <p:ph type="sldNum" sz="quarter" idx="10"/>
+          </p:nvPr>
+        </p:nvSpPr>
+        <p:spPr/>
+        <p:txBody>
+          <a:bodyPr/>
+          <a:lstStyle/>
+          <a:p>
+            <a:fld id="{F7021451-1387-4CA6-816F-3879F97B5CBC}" type="slidenum">
+              <a:rPr lang="en-US"/>
+              <a:t>16</a:t>
+            </a:fld>
+            <a:endParaRPr lang="en-US"/>
+          </a:p>
+        </p:txBody>
+      </p:sp>
+    </p:spTree>
+    <p:extLst>
+      <p:ext uri="{BB962C8B-B14F-4D97-AF65-F5344CB8AC3E}">
+        <p14:creationId xmlns:p14="http://schemas.microsoft.com/office/powerpoint/2010/main" val="1024086991"/>
+      </p:ext>
+    </p:extLst>
+  </p:cSld>
+  <p:clrMapOvr>
+    <a:masterClrMapping/>
+  </p:clrMapOvr>
+</p:notes>
+</file>
+
+<file path=ppt/notesSlides/notesSlide17.xml><?xml version="1.0" encoding="utf-8"?>
+<p:notes xmlns:a="http://schemas.openxmlformats.org/drawingml/2006/main" xmlns:r="http://schemas.openxmlformats.org/officeDocument/2006/relationships" xmlns:p="http://schemas.openxmlformats.org/presentationml/2006/main">
+  <p:cSld>
+    <p:spTree>
+      <p:nvGrpSpPr>
+        <p:cNvPr id="1" name=""/>
+        <p:cNvGrpSpPr/>
+        <p:nvPr/>
+      </p:nvGrpSpPr>
+      <p:grpSpPr>
+        <a:xfrm>
+          <a:off x="0" y="0"/>
+          <a:ext cx="0" cy="0"/>
+          <a:chOff x="0" y="0"/>
+          <a:chExt cx="0" cy="0"/>
+        </a:xfrm>
+      </p:grpSpPr>
+      <p:sp>
+        <p:nvSpPr>
+          <p:cNvPr id="2" name="Slide Image Placeholder 1"/>
+          <p:cNvSpPr>
+            <a:spLocks noGrp="1" noRot="1" noChangeAspect="1"/>
+          </p:cNvSpPr>
+          <p:nvPr>
+            <p:ph type="sldImg"/>
+          </p:nvPr>
+        </p:nvSpPr>
+        <p:spPr/>
+      </p:sp>
+      <p:sp>
+        <p:nvSpPr>
+          <p:cNvPr id="3" name="Notes Placeholder 2"/>
+          <p:cNvSpPr>
+            <a:spLocks noGrp="1"/>
+          </p:cNvSpPr>
+          <p:nvPr>
+            <p:ph type="body" idx="1"/>
+          </p:nvPr>
+        </p:nvSpPr>
+        <p:spPr/>
+        <p:txBody>
+          <a:bodyPr/>
+          <a:lstStyle/>
+          <a:p>
+            <a:r>
+              <a:rPr lang="en-US" dirty="0"/>
+              <a:t>Pattern: layer. Style profile: stylish. Stacked architecture, governance, or responsibility layers.
+Slide 17: レイヤー構造: アーキテクチャを積層で説明する
+layer-visual: レイヤー構造 (layer) schematic sample
+layer-visual long description: レイヤー構造 (layer) のサンプルです。Stacked architecture, governance, or responsibility layers. pptcreater の安全なschematicプリセットで生成しています。</a:t>
+            </a:r>
+            <a:endParaRPr lang="en-US" dirty="0"/>
+          </a:p>
+        </p:txBody>
+      </p:sp>
+      <p:sp>
+        <p:nvSpPr>
+          <p:cNvPr id="4" name="Slide Number Placeholder 3"/>
+          <p:cNvSpPr>
+            <a:spLocks noGrp="1"/>
+          </p:cNvSpPr>
+          <p:nvPr>
+            <p:ph type="sldNum" sz="quarter" idx="10"/>
+          </p:nvPr>
+        </p:nvSpPr>
+        <p:spPr/>
+        <p:txBody>
+          <a:bodyPr/>
+          <a:lstStyle/>
+          <a:p>
+            <a:fld id="{F7021451-1387-4CA6-816F-3879F97B5CBC}" type="slidenum">
+              <a:rPr lang="en-US"/>
+              <a:t>17</a:t>
+            </a:fld>
+            <a:endParaRPr lang="en-US"/>
+          </a:p>
+        </p:txBody>
+      </p:sp>
+    </p:spTree>
+    <p:extLst>
+      <p:ext uri="{BB962C8B-B14F-4D97-AF65-F5344CB8AC3E}">
+        <p14:creationId xmlns:p14="http://schemas.microsoft.com/office/powerpoint/2010/main" val="1024086991"/>
+      </p:ext>
+    </p:extLst>
+  </p:cSld>
+  <p:clrMapOvr>
+    <a:masterClrMapping/>
+  </p:clrMapOvr>
+</p:notes>
+</file>
+
+<file path=ppt/notesSlides/notesSlide18.xml><?xml version="1.0" encoding="utf-8"?>
+<p:notes xmlns:a="http://schemas.openxmlformats.org/drawingml/2006/main" xmlns:r="http://schemas.openxmlformats.org/officeDocument/2006/relationships" xmlns:p="http://schemas.openxmlformats.org/presentationml/2006/main">
+  <p:cSld>
+    <p:spTree>
+      <p:nvGrpSpPr>
+        <p:cNvPr id="1" name=""/>
+        <p:cNvGrpSpPr/>
+        <p:nvPr/>
+      </p:nvGrpSpPr>
+      <p:grpSpPr>
+        <a:xfrm>
+          <a:off x="0" y="0"/>
+          <a:ext cx="0" cy="0"/>
+          <a:chOff x="0" y="0"/>
+          <a:chExt cx="0" cy="0"/>
+        </a:xfrm>
+      </p:grpSpPr>
+      <p:sp>
+        <p:nvSpPr>
+          <p:cNvPr id="2" name="Slide Image Placeholder 1"/>
+          <p:cNvSpPr>
+            <a:spLocks noGrp="1" noRot="1" noChangeAspect="1"/>
+          </p:cNvSpPr>
+          <p:nvPr>
+            <p:ph type="sldImg"/>
+          </p:nvPr>
+        </p:nvSpPr>
+        <p:spPr/>
+      </p:sp>
+      <p:sp>
+        <p:nvSpPr>
+          <p:cNvPr id="3" name="Notes Placeholder 2"/>
+          <p:cNvSpPr>
+            <a:spLocks noGrp="1"/>
+          </p:cNvSpPr>
+          <p:nvPr>
+            <p:ph type="body" idx="1"/>
+          </p:nvPr>
+        </p:nvSpPr>
+        <p:spPr/>
+        <p:txBody>
+          <a:bodyPr/>
+          <a:lstStyle/>
+          <a:p>
+            <a:r>
+              <a:rPr lang="en-US" dirty="0"/>
+              <a:t>Pattern: triangle. Style profile: report. Pyramid levels showing foundation to apex.
+Slide 18: トライアングル: 基盤から頂点までを示す
+triangle-visual: トライアングル (triangle) schematic sample
+triangle-visual long description: トライアングル (triangle) のサンプルです。Pyramid levels showing foundation to apex. pptcreater の安全なschematicプリセットで生成しています。</a:t>
+            </a:r>
+            <a:endParaRPr lang="en-US" dirty="0"/>
+          </a:p>
+        </p:txBody>
+      </p:sp>
+      <p:sp>
+        <p:nvSpPr>
+          <p:cNvPr id="4" name="Slide Number Placeholder 3"/>
+          <p:cNvSpPr>
+            <a:spLocks noGrp="1"/>
+          </p:cNvSpPr>
+          <p:nvPr>
+            <p:ph type="sldNum" sz="quarter" idx="10"/>
+          </p:nvPr>
+        </p:nvSpPr>
+        <p:spPr/>
+        <p:txBody>
+          <a:bodyPr/>
+          <a:lstStyle/>
+          <a:p>
+            <a:fld id="{F7021451-1387-4CA6-816F-3879F97B5CBC}" type="slidenum">
+              <a:rPr lang="en-US"/>
+              <a:t>18</a:t>
+            </a:fld>
+            <a:endParaRPr lang="en-US"/>
+          </a:p>
+        </p:txBody>
+      </p:sp>
+    </p:spTree>
+    <p:extLst>
+      <p:ext uri="{BB962C8B-B14F-4D97-AF65-F5344CB8AC3E}">
+        <p14:creationId xmlns:p14="http://schemas.microsoft.com/office/powerpoint/2010/main" val="1024086991"/>
+      </p:ext>
+    </p:extLst>
+  </p:cSld>
+  <p:clrMapOvr>
+    <a:masterClrMapping/>
+  </p:clrMapOvr>
+</p:notes>
+</file>
+
+<file path=ppt/notesSlides/notesSlide19.xml><?xml version="1.0" encoding="utf-8"?>
+<p:notes xmlns:a="http://schemas.openxmlformats.org/drawingml/2006/main" xmlns:r="http://schemas.openxmlformats.org/officeDocument/2006/relationships" xmlns:p="http://schemas.openxmlformats.org/presentationml/2006/main">
+  <p:cSld>
+    <p:spTree>
+      <p:nvGrpSpPr>
+        <p:cNvPr id="1" name=""/>
+        <p:cNvGrpSpPr/>
+        <p:nvPr/>
+      </p:nvGrpSpPr>
+      <p:grpSpPr>
+        <a:xfrm>
+          <a:off x="0" y="0"/>
+          <a:ext cx="0" cy="0"/>
+          <a:chOff x="0" y="0"/>
+          <a:chExt cx="0" cy="0"/>
+        </a:xfrm>
+      </p:grpSpPr>
+      <p:sp>
+        <p:nvSpPr>
+          <p:cNvPr id="2" name="Slide Image Placeholder 1"/>
+          <p:cNvSpPr>
+            <a:spLocks noGrp="1" noRot="1" noChangeAspect="1"/>
+          </p:cNvSpPr>
+          <p:nvPr>
+            <p:ph type="sldImg"/>
+          </p:nvPr>
+        </p:nvSpPr>
+        <p:spPr/>
+      </p:sp>
+      <p:sp>
+        <p:nvSpPr>
+          <p:cNvPr id="3" name="Notes Placeholder 2"/>
+          <p:cNvSpPr>
+            <a:spLocks noGrp="1"/>
+          </p:cNvSpPr>
+          <p:nvPr>
+            <p:ph type="body" idx="1"/>
+          </p:nvPr>
+        </p:nvSpPr>
+        <p:spPr/>
+        <p:txBody>
+          <a:bodyPr/>
+          <a:lstStyle/>
+          <a:p>
+            <a:r>
+              <a:rPr lang="en-US" dirty="0"/>
+              <a:t>Pattern: step. Style profile: presentation. Ascending maturity, roadmap, or progression steps.
+Slide 19: 階段: 成熟度やロードマップを段階で示す
+step-visual: 階段/ステップ (step) schematic sample
+step-visual long description: 階段/ステップ (step) のサンプルです。Ascending maturity, roadmap, or progression steps. pptcreater の安全なschematicプリセットで生成しています。</a:t>
+            </a:r>
+            <a:endParaRPr lang="en-US" dirty="0"/>
+          </a:p>
+        </p:txBody>
+      </p:sp>
+      <p:sp>
+        <p:nvSpPr>
+          <p:cNvPr id="4" name="Slide Number Placeholder 3"/>
+          <p:cNvSpPr>
+            <a:spLocks noGrp="1"/>
+          </p:cNvSpPr>
+          <p:nvPr>
+            <p:ph type="sldNum" sz="quarter" idx="10"/>
+          </p:nvPr>
+        </p:nvSpPr>
+        <p:spPr/>
+        <p:txBody>
+          <a:bodyPr/>
+          <a:lstStyle/>
+          <a:p>
+            <a:fld id="{F7021451-1387-4CA6-816F-3879F97B5CBC}" type="slidenum">
+              <a:rPr lang="en-US"/>
+              <a:t>19</a:t>
+            </a:fld>
+            <a:endParaRPr lang="en-US"/>
+          </a:p>
+        </p:txBody>
+      </p:sp>
+    </p:spTree>
+    <p:extLst>
+      <p:ext uri="{BB962C8B-B14F-4D97-AF65-F5344CB8AC3E}">
+        <p14:creationId xmlns:p14="http://schemas.microsoft.com/office/powerpoint/2010/main" val="1024086991"/>
+      </p:ext>
+    </p:extLst>
+  </p:cSld>
+  <p:clrMapOvr>
+    <a:masterClrMapping/>
+  </p:clrMapOvr>
+</p:notes>
+</file>
+
 <file path=ppt/notesSlides/notesSlide2.xml><?xml version="1.0" encoding="utf-8"?>
 <p:notes xmlns:a="http://schemas.openxmlformats.org/drawingml/2006/main" xmlns:r="http://schemas.openxmlformats.org/officeDocument/2006/relationships" xmlns:p="http://schemas.openxmlformats.org/presentationml/2006/main">
   <p:cSld>
@@ -597,10 +1528,10 @@
           <a:p>
             <a:r>
               <a:rPr lang="en-US" dirty="0"/>
-              <a:t>generate_schematic で生成した安全な図解プリセットの例です。
-Slide 2: 表: 論点と判断材料をそろえる
-table-visual: table schematic sample
-table-visual long description: table schematic sample generated from a safe preset to demonstrate Slideland-inspired layouts in pptcreater.</a:t>
+              <a:t>Pattern: tree. Style profile: stylish. Hierarchy with a root concept and child branches.
+Slide 2: ツリー: 複雑な情報を階層で整理する
+tree-visual: ツリー (tree) schematic sample
+tree-visual long description: ツリー (tree) のサンプルです。Hierarchy with a root concept and child branches. pptcreater の安全なschematicプリセットで生成しています。</a:t>
             </a:r>
             <a:endParaRPr lang="en-US" dirty="0"/>
           </a:p>
@@ -642,6 +1573,642 @@
 </p:notes>
 </file>
 
+<file path=ppt/notesSlides/notesSlide20.xml><?xml version="1.0" encoding="utf-8"?>
+<p:notes xmlns:a="http://schemas.openxmlformats.org/drawingml/2006/main" xmlns:r="http://schemas.openxmlformats.org/officeDocument/2006/relationships" xmlns:p="http://schemas.openxmlformats.org/presentationml/2006/main">
+  <p:cSld>
+    <p:spTree>
+      <p:nvGrpSpPr>
+        <p:cNvPr id="1" name=""/>
+        <p:cNvGrpSpPr/>
+        <p:nvPr/>
+      </p:nvGrpSpPr>
+      <p:grpSpPr>
+        <a:xfrm>
+          <a:off x="0" y="0"/>
+          <a:ext cx="0" cy="0"/>
+          <a:chOff x="0" y="0"/>
+          <a:chExt cx="0" cy="0"/>
+        </a:xfrm>
+      </p:grpSpPr>
+      <p:sp>
+        <p:nvSpPr>
+          <p:cNvPr id="2" name="Slide Image Placeholder 1"/>
+          <p:cNvSpPr>
+            <a:spLocks noGrp="1" noRot="1" noChangeAspect="1"/>
+          </p:cNvSpPr>
+          <p:nvPr>
+            <p:ph type="sldImg"/>
+          </p:nvPr>
+        </p:nvSpPr>
+        <p:spPr/>
+      </p:sp>
+      <p:sp>
+        <p:nvSpPr>
+          <p:cNvPr id="3" name="Notes Placeholder 2"/>
+          <p:cNvSpPr>
+            <a:spLocks noGrp="1"/>
+          </p:cNvSpPr>
+          <p:nvPr>
+            <p:ph type="body" idx="1"/>
+          </p:nvPr>
+        </p:nvSpPr>
+        <p:spPr/>
+        <p:txBody>
+          <a:bodyPr/>
+          <a:lstStyle/>
+          <a:p>
+            <a:r>
+              <a:rPr lang="en-US" dirty="0"/>
+              <a:t>Pattern: gantt. Style profile: technical. Simple task-by-period schedule with safe staggered bars.
+Slide 20: ガントチャート: 作業と期間を同じ面で見る
+gantt-visual: ガントチャート (gantt) schematic sample
+gantt-visual long description: ガントチャート (gantt) のサンプルです。Simple task-by-period schedule with safe staggered bars. pptcreater の安全なschematicプリセットで生成しています。</a:t>
+            </a:r>
+            <a:endParaRPr lang="en-US" dirty="0"/>
+          </a:p>
+        </p:txBody>
+      </p:sp>
+      <p:sp>
+        <p:nvSpPr>
+          <p:cNvPr id="4" name="Slide Number Placeholder 3"/>
+          <p:cNvSpPr>
+            <a:spLocks noGrp="1"/>
+          </p:cNvSpPr>
+          <p:nvPr>
+            <p:ph type="sldNum" sz="quarter" idx="10"/>
+          </p:nvPr>
+        </p:nvSpPr>
+        <p:spPr/>
+        <p:txBody>
+          <a:bodyPr/>
+          <a:lstStyle/>
+          <a:p>
+            <a:fld id="{F7021451-1387-4CA6-816F-3879F97B5CBC}" type="slidenum">
+              <a:rPr lang="en-US"/>
+              <a:t>20</a:t>
+            </a:fld>
+            <a:endParaRPr lang="en-US"/>
+          </a:p>
+        </p:txBody>
+      </p:sp>
+    </p:spTree>
+    <p:extLst>
+      <p:ext uri="{BB962C8B-B14F-4D97-AF65-F5344CB8AC3E}">
+        <p14:creationId xmlns:p14="http://schemas.microsoft.com/office/powerpoint/2010/main" val="1024086991"/>
+      </p:ext>
+    </p:extLst>
+  </p:cSld>
+  <p:clrMapOvr>
+    <a:masterClrMapping/>
+  </p:clrMapOvr>
+</p:notes>
+</file>
+
+<file path=ppt/notesSlides/notesSlide21.xml><?xml version="1.0" encoding="utf-8"?>
+<p:notes xmlns:a="http://schemas.openxmlformats.org/drawingml/2006/main" xmlns:r="http://schemas.openxmlformats.org/officeDocument/2006/relationships" xmlns:p="http://schemas.openxmlformats.org/presentationml/2006/main">
+  <p:cSld>
+    <p:spTree>
+      <p:nvGrpSpPr>
+        <p:cNvPr id="1" name=""/>
+        <p:cNvGrpSpPr/>
+        <p:nvPr/>
+      </p:nvGrpSpPr>
+      <p:grpSpPr>
+        <a:xfrm>
+          <a:off x="0" y="0"/>
+          <a:ext cx="0" cy="0"/>
+          <a:chOff x="0" y="0"/>
+          <a:chExt cx="0" cy="0"/>
+        </a:xfrm>
+      </p:grpSpPr>
+      <p:sp>
+        <p:nvSpPr>
+          <p:cNvPr id="2" name="Slide Image Placeholder 1"/>
+          <p:cNvSpPr>
+            <a:spLocks noGrp="1" noRot="1" noChangeAspect="1"/>
+          </p:cNvSpPr>
+          <p:nvPr>
+            <p:ph type="sldImg"/>
+          </p:nvPr>
+        </p:nvSpPr>
+        <p:spPr/>
+      </p:sp>
+      <p:sp>
+        <p:nvSpPr>
+          <p:cNvPr id="3" name="Notes Placeholder 2"/>
+          <p:cNvSpPr>
+            <a:spLocks noGrp="1"/>
+          </p:cNvSpPr>
+          <p:nvPr>
+            <p:ph type="body" idx="1"/>
+          </p:nvPr>
+        </p:nvSpPr>
+        <p:spPr/>
+        <p:txBody>
+          <a:bodyPr/>
+          <a:lstStyle/>
+          <a:p>
+            <a:r>
+              <a:rPr lang="en-US" dirty="0"/>
+              <a:t>Pattern: ranking. Style profile: minimal. Ordered list with rank badges and value bars.
+Slide 21: ランキング: 優先順位と差を同時に見せる
+ranking-visual: ランキング (ranking) schematic sample
+ranking-visual long description: ランキング (ranking) のサンプルです。Ordered list with rank badges and value bars. pptcreater の安全なschematicプリセットで生成しています。</a:t>
+            </a:r>
+            <a:endParaRPr lang="en-US" dirty="0"/>
+          </a:p>
+        </p:txBody>
+      </p:sp>
+      <p:sp>
+        <p:nvSpPr>
+          <p:cNvPr id="4" name="Slide Number Placeholder 3"/>
+          <p:cNvSpPr>
+            <a:spLocks noGrp="1"/>
+          </p:cNvSpPr>
+          <p:nvPr>
+            <p:ph type="sldNum" sz="quarter" idx="10"/>
+          </p:nvPr>
+        </p:nvSpPr>
+        <p:spPr/>
+        <p:txBody>
+          <a:bodyPr/>
+          <a:lstStyle/>
+          <a:p>
+            <a:fld id="{F7021451-1387-4CA6-816F-3879F97B5CBC}" type="slidenum">
+              <a:rPr lang="en-US"/>
+              <a:t>21</a:t>
+            </a:fld>
+            <a:endParaRPr lang="en-US"/>
+          </a:p>
+        </p:txBody>
+      </p:sp>
+    </p:spTree>
+    <p:extLst>
+      <p:ext uri="{BB962C8B-B14F-4D97-AF65-F5344CB8AC3E}">
+        <p14:creationId xmlns:p14="http://schemas.microsoft.com/office/powerpoint/2010/main" val="1024086991"/>
+      </p:ext>
+    </p:extLst>
+  </p:cSld>
+  <p:clrMapOvr>
+    <a:masterClrMapping/>
+  </p:clrMapOvr>
+</p:notes>
+</file>
+
+<file path=ppt/notesSlides/notesSlide22.xml><?xml version="1.0" encoding="utf-8"?>
+<p:notes xmlns:a="http://schemas.openxmlformats.org/drawingml/2006/main" xmlns:r="http://schemas.openxmlformats.org/officeDocument/2006/relationships" xmlns:p="http://schemas.openxmlformats.org/presentationml/2006/main">
+  <p:cSld>
+    <p:spTree>
+      <p:nvGrpSpPr>
+        <p:cNvPr id="1" name=""/>
+        <p:cNvGrpSpPr/>
+        <p:nvPr/>
+      </p:nvGrpSpPr>
+      <p:grpSpPr>
+        <a:xfrm>
+          <a:off x="0" y="0"/>
+          <a:ext cx="0" cy="0"/>
+          <a:chOff x="0" y="0"/>
+          <a:chExt cx="0" cy="0"/>
+        </a:xfrm>
+      </p:grpSpPr>
+      <p:sp>
+        <p:nvSpPr>
+          <p:cNvPr id="2" name="Slide Image Placeholder 1"/>
+          <p:cNvSpPr>
+            <a:spLocks noGrp="1" noRot="1" noChangeAspect="1"/>
+          </p:cNvSpPr>
+          <p:nvPr>
+            <p:ph type="sldImg"/>
+          </p:nvPr>
+        </p:nvSpPr>
+        <p:spPr/>
+      </p:sp>
+      <p:sp>
+        <p:nvSpPr>
+          <p:cNvPr id="3" name="Notes Placeholder 2"/>
+          <p:cNvSpPr>
+            <a:spLocks noGrp="1"/>
+          </p:cNvSpPr>
+          <p:nvPr>
+            <p:ph type="body" idx="1"/>
+          </p:nvPr>
+        </p:nvSpPr>
+        <p:spPr/>
+        <p:txBody>
+          <a:bodyPr/>
+          <a:lstStyle/>
+          <a:p>
+            <a:r>
+              <a:rPr lang="en-US" dirty="0"/>
+              <a:t>Pattern: list. Style profile: stylish. Readable vertical list with badges.
+Slide 22: 箇条書き縦: 重要項目を読みやすく並べる
+list-visual: 箇条書き縦 (list) schematic sample
+list-visual long description: 箇条書き縦 (list) のサンプルです。Readable vertical list with badges. pptcreater の安全なschematicプリセットで生成しています。</a:t>
+            </a:r>
+            <a:endParaRPr lang="en-US" dirty="0"/>
+          </a:p>
+        </p:txBody>
+      </p:sp>
+      <p:sp>
+        <p:nvSpPr>
+          <p:cNvPr id="4" name="Slide Number Placeholder 3"/>
+          <p:cNvSpPr>
+            <a:spLocks noGrp="1"/>
+          </p:cNvSpPr>
+          <p:nvPr>
+            <p:ph type="sldNum" sz="quarter" idx="10"/>
+          </p:nvPr>
+        </p:nvSpPr>
+        <p:spPr/>
+        <p:txBody>
+          <a:bodyPr/>
+          <a:lstStyle/>
+          <a:p>
+            <a:fld id="{F7021451-1387-4CA6-816F-3879F97B5CBC}" type="slidenum">
+              <a:rPr lang="en-US"/>
+              <a:t>22</a:t>
+            </a:fld>
+            <a:endParaRPr lang="en-US"/>
+          </a:p>
+        </p:txBody>
+      </p:sp>
+    </p:spTree>
+    <p:extLst>
+      <p:ext uri="{BB962C8B-B14F-4D97-AF65-F5344CB8AC3E}">
+        <p14:creationId xmlns:p14="http://schemas.microsoft.com/office/powerpoint/2010/main" val="1024086991"/>
+      </p:ext>
+    </p:extLst>
+  </p:cSld>
+  <p:clrMapOvr>
+    <a:masterClrMapping/>
+  </p:clrMapOvr>
+</p:notes>
+</file>
+
+<file path=ppt/notesSlides/notesSlide23.xml><?xml version="1.0" encoding="utf-8"?>
+<p:notes xmlns:a="http://schemas.openxmlformats.org/drawingml/2006/main" xmlns:r="http://schemas.openxmlformats.org/officeDocument/2006/relationships" xmlns:p="http://schemas.openxmlformats.org/presentationml/2006/main">
+  <p:cSld>
+    <p:spTree>
+      <p:nvGrpSpPr>
+        <p:cNvPr id="1" name=""/>
+        <p:cNvGrpSpPr/>
+        <p:nvPr/>
+      </p:nvGrpSpPr>
+      <p:grpSpPr>
+        <a:xfrm>
+          <a:off x="0" y="0"/>
+          <a:ext cx="0" cy="0"/>
+          <a:chOff x="0" y="0"/>
+          <a:chExt cx="0" cy="0"/>
+        </a:xfrm>
+      </p:grpSpPr>
+      <p:sp>
+        <p:nvSpPr>
+          <p:cNvPr id="2" name="Slide Image Placeholder 1"/>
+          <p:cNvSpPr>
+            <a:spLocks noGrp="1" noRot="1" noChangeAspect="1"/>
+          </p:cNvSpPr>
+          <p:nvPr>
+            <p:ph type="sldImg"/>
+          </p:nvPr>
+        </p:nvSpPr>
+        <p:spPr/>
+      </p:sp>
+      <p:sp>
+        <p:nvSpPr>
+          <p:cNvPr id="3" name="Notes Placeholder 2"/>
+          <p:cNvSpPr>
+            <a:spLocks noGrp="1"/>
+          </p:cNvSpPr>
+          <p:nvPr>
+            <p:ph type="body" idx="1"/>
+          </p:nvPr>
+        </p:nvSpPr>
+        <p:spPr/>
+        <p:txBody>
+          <a:bodyPr/>
+          <a:lstStyle/>
+          <a:p>
+            <a:r>
+              <a:rPr lang="en-US" dirty="0"/>
+              <a:t>Pattern: list-horizontal. Style profile: report. Horizontal card list for three or four key points.
+Slide 23: 箇条書き横: 3-4点をカードで見せる
+list-horizontal-visual: 箇条書き横 (list-horizontal) schematic sample
+list-horizontal-visual long description: 箇条書き横 (list-horizontal) のサンプルです。Horizontal card list for three or four key points. pptcreater の安全なschematicプリセットで生成しています。</a:t>
+            </a:r>
+            <a:endParaRPr lang="en-US" dirty="0"/>
+          </a:p>
+        </p:txBody>
+      </p:sp>
+      <p:sp>
+        <p:nvSpPr>
+          <p:cNvPr id="4" name="Slide Number Placeholder 3"/>
+          <p:cNvSpPr>
+            <a:spLocks noGrp="1"/>
+          </p:cNvSpPr>
+          <p:nvPr>
+            <p:ph type="sldNum" sz="quarter" idx="10"/>
+          </p:nvPr>
+        </p:nvSpPr>
+        <p:spPr/>
+        <p:txBody>
+          <a:bodyPr/>
+          <a:lstStyle/>
+          <a:p>
+            <a:fld id="{F7021451-1387-4CA6-816F-3879F97B5CBC}" type="slidenum">
+              <a:rPr lang="en-US"/>
+              <a:t>23</a:t>
+            </a:fld>
+            <a:endParaRPr lang="en-US"/>
+          </a:p>
+        </p:txBody>
+      </p:sp>
+    </p:spTree>
+    <p:extLst>
+      <p:ext uri="{BB962C8B-B14F-4D97-AF65-F5344CB8AC3E}">
+        <p14:creationId xmlns:p14="http://schemas.microsoft.com/office/powerpoint/2010/main" val="1024086991"/>
+      </p:ext>
+    </p:extLst>
+  </p:cSld>
+  <p:clrMapOvr>
+    <a:masterClrMapping/>
+  </p:clrMapOvr>
+</p:notes>
+</file>
+
+<file path=ppt/notesSlides/notesSlide24.xml><?xml version="1.0" encoding="utf-8"?>
+<p:notes xmlns:a="http://schemas.openxmlformats.org/drawingml/2006/main" xmlns:r="http://schemas.openxmlformats.org/officeDocument/2006/relationships" xmlns:p="http://schemas.openxmlformats.org/presentationml/2006/main">
+  <p:cSld>
+    <p:spTree>
+      <p:nvGrpSpPr>
+        <p:cNvPr id="1" name=""/>
+        <p:cNvGrpSpPr/>
+        <p:nvPr/>
+      </p:nvGrpSpPr>
+      <p:grpSpPr>
+        <a:xfrm>
+          <a:off x="0" y="0"/>
+          <a:ext cx="0" cy="0"/>
+          <a:chOff x="0" y="0"/>
+          <a:chExt cx="0" cy="0"/>
+        </a:xfrm>
+      </p:grpSpPr>
+      <p:sp>
+        <p:nvSpPr>
+          <p:cNvPr id="2" name="Slide Image Placeholder 1"/>
+          <p:cNvSpPr>
+            <a:spLocks noGrp="1" noRot="1" noChangeAspect="1"/>
+          </p:cNvSpPr>
+          <p:nvPr>
+            <p:ph type="sldImg"/>
+          </p:nvPr>
+        </p:nvSpPr>
+        <p:spPr/>
+      </p:sp>
+      <p:sp>
+        <p:nvSpPr>
+          <p:cNvPr id="3" name="Notes Placeholder 2"/>
+          <p:cNvSpPr>
+            <a:spLocks noGrp="1"/>
+          </p:cNvSpPr>
+          <p:nvPr>
+            <p:ph type="body" idx="1"/>
+          </p:nvPr>
+        </p:nvSpPr>
+        <p:spPr/>
+        <p:txBody>
+          <a:bodyPr/>
+          <a:lstStyle/>
+          <a:p>
+            <a:r>
+              <a:rPr lang="en-US" dirty="0"/>
+              <a:t>Pattern: list-enumeration. Style profile: presentation. Numbered vertical list for ordered checkpoints.
+Slide 24: 箇条書き羅列: 手順やチェックを番号で示す
+list-enumeration-visual: 箇条書き羅列 (list-enumeration) schematic sample
+list-enumeration-visual long description: 箇条書き羅列 (list-enumeration) のサンプルです。Numbered vertical list for ordered checkpoints. pptcreater の安全なschematicプリセットで生成しています。</a:t>
+            </a:r>
+            <a:endParaRPr lang="en-US" dirty="0"/>
+          </a:p>
+        </p:txBody>
+      </p:sp>
+      <p:sp>
+        <p:nvSpPr>
+          <p:cNvPr id="4" name="Slide Number Placeholder 3"/>
+          <p:cNvSpPr>
+            <a:spLocks noGrp="1"/>
+          </p:cNvSpPr>
+          <p:nvPr>
+            <p:ph type="sldNum" sz="quarter" idx="10"/>
+          </p:nvPr>
+        </p:nvSpPr>
+        <p:spPr/>
+        <p:txBody>
+          <a:bodyPr/>
+          <a:lstStyle/>
+          <a:p>
+            <a:fld id="{F7021451-1387-4CA6-816F-3879F97B5CBC}" type="slidenum">
+              <a:rPr lang="en-US"/>
+              <a:t>24</a:t>
+            </a:fld>
+            <a:endParaRPr lang="en-US"/>
+          </a:p>
+        </p:txBody>
+      </p:sp>
+    </p:spTree>
+    <p:extLst>
+      <p:ext uri="{BB962C8B-B14F-4D97-AF65-F5344CB8AC3E}">
+        <p14:creationId xmlns:p14="http://schemas.microsoft.com/office/powerpoint/2010/main" val="1024086991"/>
+      </p:ext>
+    </p:extLst>
+  </p:cSld>
+  <p:clrMapOvr>
+    <a:masterClrMapping/>
+  </p:clrMapOvr>
+</p:notes>
+</file>
+
+<file path=ppt/notesSlides/notesSlide25.xml><?xml version="1.0" encoding="utf-8"?>
+<p:notes xmlns:a="http://schemas.openxmlformats.org/drawingml/2006/main" xmlns:r="http://schemas.openxmlformats.org/officeDocument/2006/relationships" xmlns:p="http://schemas.openxmlformats.org/presentationml/2006/main">
+  <p:cSld>
+    <p:spTree>
+      <p:nvGrpSpPr>
+        <p:cNvPr id="1" name=""/>
+        <p:cNvGrpSpPr/>
+        <p:nvPr/>
+      </p:nvGrpSpPr>
+      <p:grpSpPr>
+        <a:xfrm>
+          <a:off x="0" y="0"/>
+          <a:ext cx="0" cy="0"/>
+          <a:chOff x="0" y="0"/>
+          <a:chExt cx="0" cy="0"/>
+        </a:xfrm>
+      </p:grpSpPr>
+      <p:sp>
+        <p:nvSpPr>
+          <p:cNvPr id="2" name="Slide Image Placeholder 1"/>
+          <p:cNvSpPr>
+            <a:spLocks noGrp="1" noRot="1" noChangeAspect="1"/>
+          </p:cNvSpPr>
+          <p:nvPr>
+            <p:ph type="sldImg"/>
+          </p:nvPr>
+        </p:nvSpPr>
+        <p:spPr/>
+      </p:sp>
+      <p:sp>
+        <p:nvSpPr>
+          <p:cNvPr id="3" name="Notes Placeholder 2"/>
+          <p:cNvSpPr>
+            <a:spLocks noGrp="1"/>
+          </p:cNvSpPr>
+          <p:nvPr>
+            <p:ph type="body" idx="1"/>
+          </p:nvPr>
+        </p:nvSpPr>
+        <p:spPr/>
+        <p:txBody>
+          <a:bodyPr/>
+          <a:lstStyle/>
+          <a:p>
+            <a:r>
+              <a:rPr lang="en-US" dirty="0"/>
+              <a:t>Pattern: mockup. Style profile: technical. Window/card mockup for product, portal, or dashboard concepts.
+Slide 25: モックアップ: UIやポータルの概念を簡潔に示す
+mockup-visual: モックアップ (mockup) schematic sample
+mockup-visual long description: モックアップ (mockup) のサンプルです。Window/card mockup for product, portal, or dashboard concepts. pptcreater の安全なschematicプリセットで生成しています。</a:t>
+            </a:r>
+            <a:endParaRPr lang="en-US" dirty="0"/>
+          </a:p>
+        </p:txBody>
+      </p:sp>
+      <p:sp>
+        <p:nvSpPr>
+          <p:cNvPr id="4" name="Slide Number Placeholder 3"/>
+          <p:cNvSpPr>
+            <a:spLocks noGrp="1"/>
+          </p:cNvSpPr>
+          <p:nvPr>
+            <p:ph type="sldNum" sz="quarter" idx="10"/>
+          </p:nvPr>
+        </p:nvSpPr>
+        <p:spPr/>
+        <p:txBody>
+          <a:bodyPr/>
+          <a:lstStyle/>
+          <a:p>
+            <a:fld id="{F7021451-1387-4CA6-816F-3879F97B5CBC}" type="slidenum">
+              <a:rPr lang="en-US"/>
+              <a:t>25</a:t>
+            </a:fld>
+            <a:endParaRPr lang="en-US"/>
+          </a:p>
+        </p:txBody>
+      </p:sp>
+    </p:spTree>
+    <p:extLst>
+      <p:ext uri="{BB962C8B-B14F-4D97-AF65-F5344CB8AC3E}">
+        <p14:creationId xmlns:p14="http://schemas.microsoft.com/office/powerpoint/2010/main" val="1024086991"/>
+      </p:ext>
+    </p:extLst>
+  </p:cSld>
+  <p:clrMapOvr>
+    <a:masterClrMapping/>
+  </p:clrMapOvr>
+</p:notes>
+</file>
+
+<file path=ppt/notesSlides/notesSlide26.xml><?xml version="1.0" encoding="utf-8"?>
+<p:notes xmlns:a="http://schemas.openxmlformats.org/drawingml/2006/main" xmlns:r="http://schemas.openxmlformats.org/officeDocument/2006/relationships" xmlns:p="http://schemas.openxmlformats.org/presentationml/2006/main">
+  <p:cSld>
+    <p:spTree>
+      <p:nvGrpSpPr>
+        <p:cNvPr id="1" name=""/>
+        <p:cNvGrpSpPr/>
+        <p:nvPr/>
+      </p:nvGrpSpPr>
+      <p:grpSpPr>
+        <a:xfrm>
+          <a:off x="0" y="0"/>
+          <a:ext cx="0" cy="0"/>
+          <a:chOff x="0" y="0"/>
+          <a:chExt cx="0" cy="0"/>
+        </a:xfrm>
+      </p:grpSpPr>
+      <p:sp>
+        <p:nvSpPr>
+          <p:cNvPr id="2" name="Slide Image Placeholder 1"/>
+          <p:cNvSpPr>
+            <a:spLocks noGrp="1" noRot="1" noChangeAspect="1"/>
+          </p:cNvSpPr>
+          <p:nvPr>
+            <p:ph type="sldImg"/>
+          </p:nvPr>
+        </p:nvSpPr>
+        <p:spPr/>
+      </p:sp>
+      <p:sp>
+        <p:nvSpPr>
+          <p:cNvPr id="3" name="Notes Placeholder 2"/>
+          <p:cNvSpPr>
+            <a:spLocks noGrp="1"/>
+          </p:cNvSpPr>
+          <p:nvPr>
+            <p:ph type="body" idx="1"/>
+          </p:nvPr>
+        </p:nvSpPr>
+        <p:spPr/>
+        <p:txBody>
+          <a:bodyPr/>
+          <a:lstStyle/>
+          <a:p>
+            <a:r>
+              <a:rPr lang="en-US" dirty="0"/>
+              <a:t>Source URLs and attribution:
+1. Slideland schematic and taste references | URL: https://www.slideland.tech/docs/schematic | Notes: Layouts are inspired by common schematic categories, not copied from source visuals.
+Slide 26: 参考URL・出典</a:t>
+            </a:r>
+            <a:endParaRPr lang="en-US" dirty="0"/>
+          </a:p>
+        </p:txBody>
+      </p:sp>
+      <p:sp>
+        <p:nvSpPr>
+          <p:cNvPr id="4" name="Slide Number Placeholder 3"/>
+          <p:cNvSpPr>
+            <a:spLocks noGrp="1"/>
+          </p:cNvSpPr>
+          <p:nvPr>
+            <p:ph type="sldNum" sz="quarter" idx="10"/>
+          </p:nvPr>
+        </p:nvSpPr>
+        <p:spPr/>
+        <p:txBody>
+          <a:bodyPr/>
+          <a:lstStyle/>
+          <a:p>
+            <a:fld id="{F7021451-1387-4CA6-816F-3879F97B5CBC}" type="slidenum">
+              <a:rPr lang="en-US"/>
+              <a:t>26</a:t>
+            </a:fld>
+            <a:endParaRPr lang="en-US"/>
+          </a:p>
+        </p:txBody>
+      </p:sp>
+    </p:spTree>
+    <p:extLst>
+      <p:ext uri="{BB962C8B-B14F-4D97-AF65-F5344CB8AC3E}">
+        <p14:creationId xmlns:p14="http://schemas.microsoft.com/office/powerpoint/2010/main" val="1024086991"/>
+      </p:ext>
+    </p:extLst>
+  </p:cSld>
+  <p:clrMapOvr>
+    <a:masterClrMapping/>
+  </p:clrMapOvr>
+</p:notes>
+</file>
+
 <file path=ppt/notesSlides/notesSlide3.xml><?xml version="1.0" encoding="utf-8"?>
 <p:notes xmlns:a="http://schemas.openxmlformats.org/drawingml/2006/main" xmlns:r="http://schemas.openxmlformats.org/officeDocument/2006/relationships" xmlns:p="http://schemas.openxmlformats.org/presentationml/2006/main">
   <p:cSld>
@@ -688,10 +2255,10 @@
           <a:p>
             <a:r>
               <a:rPr lang="en-US" dirty="0"/>
-              <a:t>generate_schematic で生成した安全な図解プリセットの例です。
-Slide 3: ツリー: 複雑な情報を階層で整理する
-tree-visual: tree schematic sample
-tree-visual long description: tree schematic sample generated from a safe preset to demonstrate Slideland-inspired layouts in pptcreater.</a:t>
+              <a:t>Pattern: flow. Style profile: report. Left-to-right process, handoff, or customer journey.
+Slide 3: 横型フロー: 作成から検証までを迷わず進める
+flow-visual: 横フロー (flow) schematic sample
+flow-visual long description: 横フロー (flow) のサンプルです。Left-to-right process, handoff, or customer journey. pptcreater の安全なschematicプリセットで生成しています。</a:t>
             </a:r>
             <a:endParaRPr lang="en-US" dirty="0"/>
           </a:p>
@@ -779,10 +2346,10 @@
           <a:p>
             <a:r>
               <a:rPr lang="en-US" dirty="0"/>
-              <a:t>generate_schematic で生成した安全な図解プリセットの例です。
-Slide 4: 横並びリスト: 重要ポイントを短く見せる
-list-horizontal-visual: list-horizontal schematic sample
-list-horizontal-visual long description: list-horizontal schematic sample generated from a safe preset to demonstrate Slideland-inspired layouts in pptcreater.</a:t>
+              <a:t>Pattern: vertical-flow. Style profile: presentation. Top-to-bottom sequence for procedures or escalation paths.
+Slide 4: 縦型フロー: 承認プロセスを上から下へ示す
+vertical-flow-visual: 縦フロー (vertical-flow) schematic sample
+vertical-flow-visual long description: 縦フロー (vertical-flow) のサンプルです。Top-to-bottom sequence for procedures or escalation paths. pptcreater の安全なschematicプリセットで生成しています。</a:t>
             </a:r>
             <a:endParaRPr lang="en-US" dirty="0"/>
           </a:p>
@@ -870,9 +2437,10 @@
           <a:p>
             <a:r>
               <a:rPr lang="en-US" dirty="0"/>
-              <a:t>Source URLs and attribution:
-1. Slideland schematic and taste references | URL: https://www.slideland.tech/ | Notes: Layouts are inspired by common schematic categories, not copied from source visuals.
-Slide 5: 参考URL・出典</a:t>
+              <a:t>Pattern: cycle. Style profile: technical. Repeating loop with directional relationships.
+Slide 5: サイクル: 継続改善を循環で見せる
+cycle-visual: サイクル (cycle) schematic sample
+cycle-visual long description: サイクル (cycle) のサンプルです。Repeating loop with directional relationships. pptcreater の安全なschematicプリセットで生成しています。</a:t>
             </a:r>
             <a:endParaRPr lang="en-US" dirty="0"/>
           </a:p>
@@ -896,6 +2464,370 @@
             <a:fld id="{F7021451-1387-4CA6-816F-3879F97B5CBC}" type="slidenum">
               <a:rPr lang="en-US"/>
               <a:t>5</a:t>
+            </a:fld>
+            <a:endParaRPr lang="en-US"/>
+          </a:p>
+        </p:txBody>
+      </p:sp>
+    </p:spTree>
+    <p:extLst>
+      <p:ext uri="{BB962C8B-B14F-4D97-AF65-F5344CB8AC3E}">
+        <p14:creationId xmlns:p14="http://schemas.microsoft.com/office/powerpoint/2010/main" val="1024086991"/>
+      </p:ext>
+    </p:extLst>
+  </p:cSld>
+  <p:clrMapOvr>
+    <a:masterClrMapping/>
+  </p:clrMapOvr>
+</p:notes>
+</file>
+
+<file path=ppt/notesSlides/notesSlide6.xml><?xml version="1.0" encoding="utf-8"?>
+<p:notes xmlns:a="http://schemas.openxmlformats.org/drawingml/2006/main" xmlns:r="http://schemas.openxmlformats.org/officeDocument/2006/relationships" xmlns:p="http://schemas.openxmlformats.org/presentationml/2006/main">
+  <p:cSld>
+    <p:spTree>
+      <p:nvGrpSpPr>
+        <p:cNvPr id="1" name=""/>
+        <p:cNvGrpSpPr/>
+        <p:nvPr/>
+      </p:nvGrpSpPr>
+      <p:grpSpPr>
+        <a:xfrm>
+          <a:off x="0" y="0"/>
+          <a:ext cx="0" cy="0"/>
+          <a:chOff x="0" y="0"/>
+          <a:chExt cx="0" cy="0"/>
+        </a:xfrm>
+      </p:grpSpPr>
+      <p:sp>
+        <p:nvSpPr>
+          <p:cNvPr id="2" name="Slide Image Placeholder 1"/>
+          <p:cNvSpPr>
+            <a:spLocks noGrp="1" noRot="1" noChangeAspect="1"/>
+          </p:cNvSpPr>
+          <p:nvPr>
+            <p:ph type="sldImg"/>
+          </p:nvPr>
+        </p:nvSpPr>
+        <p:spPr/>
+      </p:sp>
+      <p:sp>
+        <p:nvSpPr>
+          <p:cNvPr id="3" name="Notes Placeholder 2"/>
+          <p:cNvSpPr>
+            <a:spLocks noGrp="1"/>
+          </p:cNvSpPr>
+          <p:nvPr>
+            <p:ph type="body" idx="1"/>
+          </p:nvPr>
+        </p:nvSpPr>
+        <p:spPr/>
+        <p:txBody>
+          <a:bodyPr/>
+          <a:lstStyle/>
+          <a:p>
+            <a:r>
+              <a:rPr lang="en-US" dirty="0"/>
+              <a:t>Pattern: before-after. Style profile: minimal. Current state versus target state with a central transition.
+Slide 6: 前後比較: 現状と改善後の差分を見せる
+before-after-visual: 前後比較 (before-after) schematic sample
+before-after-visual long description: 前後比較 (before-after) のサンプルです。Current state versus target state with a central transition. pptcreater の安全なschematicプリセットで生成しています。</a:t>
+            </a:r>
+            <a:endParaRPr lang="en-US" dirty="0"/>
+          </a:p>
+        </p:txBody>
+      </p:sp>
+      <p:sp>
+        <p:nvSpPr>
+          <p:cNvPr id="4" name="Slide Number Placeholder 3"/>
+          <p:cNvSpPr>
+            <a:spLocks noGrp="1"/>
+          </p:cNvSpPr>
+          <p:nvPr>
+            <p:ph type="sldNum" sz="quarter" idx="10"/>
+          </p:nvPr>
+        </p:nvSpPr>
+        <p:spPr/>
+        <p:txBody>
+          <a:bodyPr/>
+          <a:lstStyle/>
+          <a:p>
+            <a:fld id="{F7021451-1387-4CA6-816F-3879F97B5CBC}" type="slidenum">
+              <a:rPr lang="en-US"/>
+              <a:t>6</a:t>
+            </a:fld>
+            <a:endParaRPr lang="en-US"/>
+          </a:p>
+        </p:txBody>
+      </p:sp>
+    </p:spTree>
+    <p:extLst>
+      <p:ext uri="{BB962C8B-B14F-4D97-AF65-F5344CB8AC3E}">
+        <p14:creationId xmlns:p14="http://schemas.microsoft.com/office/powerpoint/2010/main" val="1024086991"/>
+      </p:ext>
+    </p:extLst>
+  </p:cSld>
+  <p:clrMapOvr>
+    <a:masterClrMapping/>
+  </p:clrMapOvr>
+</p:notes>
+</file>
+
+<file path=ppt/notesSlides/notesSlide7.xml><?xml version="1.0" encoding="utf-8"?>
+<p:notes xmlns:a="http://schemas.openxmlformats.org/drawingml/2006/main" xmlns:r="http://schemas.openxmlformats.org/officeDocument/2006/relationships" xmlns:p="http://schemas.openxmlformats.org/presentationml/2006/main">
+  <p:cSld>
+    <p:spTree>
+      <p:nvGrpSpPr>
+        <p:cNvPr id="1" name=""/>
+        <p:cNvGrpSpPr/>
+        <p:nvPr/>
+      </p:nvGrpSpPr>
+      <p:grpSpPr>
+        <a:xfrm>
+          <a:off x="0" y="0"/>
+          <a:ext cx="0" cy="0"/>
+          <a:chOff x="0" y="0"/>
+          <a:chExt cx="0" cy="0"/>
+        </a:xfrm>
+      </p:grpSpPr>
+      <p:sp>
+        <p:nvSpPr>
+          <p:cNvPr id="2" name="Slide Image Placeholder 1"/>
+          <p:cNvSpPr>
+            <a:spLocks noGrp="1" noRot="1" noChangeAspect="1"/>
+          </p:cNvSpPr>
+          <p:nvPr>
+            <p:ph type="sldImg"/>
+          </p:nvPr>
+        </p:nvSpPr>
+        <p:spPr/>
+      </p:sp>
+      <p:sp>
+        <p:nvSpPr>
+          <p:cNvPr id="3" name="Notes Placeholder 2"/>
+          <p:cNvSpPr>
+            <a:spLocks noGrp="1"/>
+          </p:cNvSpPr>
+          <p:nvPr>
+            <p:ph type="body" idx="1"/>
+          </p:nvPr>
+        </p:nvSpPr>
+        <p:spPr/>
+        <p:txBody>
+          <a:bodyPr/>
+          <a:lstStyle/>
+          <a:p>
+            <a:r>
+              <a:rPr lang="en-US" dirty="0"/>
+              <a:t>Pattern: map. Style profile: stylish. Spatial control map or conceptual territory with numbered locations.
+Slide 7: マップ: 制御ポイントを空間的に把握する
+map-visual: マップ (map) schematic sample
+map-visual long description: マップ (map) のサンプルです。Spatial control map or conceptual territory with numbered locations. pptcreater の安全なschematicプリセットで生成しています。</a:t>
+            </a:r>
+            <a:endParaRPr lang="en-US" dirty="0"/>
+          </a:p>
+        </p:txBody>
+      </p:sp>
+      <p:sp>
+        <p:nvSpPr>
+          <p:cNvPr id="4" name="Slide Number Placeholder 3"/>
+          <p:cNvSpPr>
+            <a:spLocks noGrp="1"/>
+          </p:cNvSpPr>
+          <p:nvPr>
+            <p:ph type="sldNum" sz="quarter" idx="10"/>
+          </p:nvPr>
+        </p:nvSpPr>
+        <p:spPr/>
+        <p:txBody>
+          <a:bodyPr/>
+          <a:lstStyle/>
+          <a:p>
+            <a:fld id="{F7021451-1387-4CA6-816F-3879F97B5CBC}" type="slidenum">
+              <a:rPr lang="en-US"/>
+              <a:t>7</a:t>
+            </a:fld>
+            <a:endParaRPr lang="en-US"/>
+          </a:p>
+        </p:txBody>
+      </p:sp>
+    </p:spTree>
+    <p:extLst>
+      <p:ext uri="{BB962C8B-B14F-4D97-AF65-F5344CB8AC3E}">
+        <p14:creationId xmlns:p14="http://schemas.microsoft.com/office/powerpoint/2010/main" val="1024086991"/>
+      </p:ext>
+    </p:extLst>
+  </p:cSld>
+  <p:clrMapOvr>
+    <a:masterClrMapping/>
+  </p:clrMapOvr>
+</p:notes>
+</file>
+
+<file path=ppt/notesSlides/notesSlide8.xml><?xml version="1.0" encoding="utf-8"?>
+<p:notes xmlns:a="http://schemas.openxmlformats.org/drawingml/2006/main" xmlns:r="http://schemas.openxmlformats.org/officeDocument/2006/relationships" xmlns:p="http://schemas.openxmlformats.org/presentationml/2006/main">
+  <p:cSld>
+    <p:spTree>
+      <p:nvGrpSpPr>
+        <p:cNvPr id="1" name=""/>
+        <p:cNvGrpSpPr/>
+        <p:nvPr/>
+      </p:nvGrpSpPr>
+      <p:grpSpPr>
+        <a:xfrm>
+          <a:off x="0" y="0"/>
+          <a:ext cx="0" cy="0"/>
+          <a:chOff x="0" y="0"/>
+          <a:chExt cx="0" cy="0"/>
+        </a:xfrm>
+      </p:grpSpPr>
+      <p:sp>
+        <p:nvSpPr>
+          <p:cNvPr id="2" name="Slide Image Placeholder 1"/>
+          <p:cNvSpPr>
+            <a:spLocks noGrp="1" noRot="1" noChangeAspect="1"/>
+          </p:cNvSpPr>
+          <p:nvPr>
+            <p:ph type="sldImg"/>
+          </p:nvPr>
+        </p:nvSpPr>
+        <p:spPr/>
+      </p:sp>
+      <p:sp>
+        <p:nvSpPr>
+          <p:cNvPr id="3" name="Notes Placeholder 2"/>
+          <p:cNvSpPr>
+            <a:spLocks noGrp="1"/>
+          </p:cNvSpPr>
+          <p:nvPr>
+            <p:ph type="body" idx="1"/>
+          </p:nvPr>
+        </p:nvSpPr>
+        <p:spPr/>
+        <p:txBody>
+          <a:bodyPr/>
+          <a:lstStyle/>
+          <a:p>
+            <a:r>
+              <a:rPr lang="en-US" dirty="0"/>
+              <a:t>Pattern: puzzle. Style profile: report. Interlocking modules that form one capability set.
+Slide 8: パズル/ハニカム: 構成要素を一体感で示す
+puzzle-visual: パズル/ハニカム (puzzle) schematic sample
+puzzle-visual long description: パズル/ハニカム (puzzle) のサンプルです。Interlocking modules that form one capability set. pptcreater の安全なschematicプリセットで生成しています。</a:t>
+            </a:r>
+            <a:endParaRPr lang="en-US" dirty="0"/>
+          </a:p>
+        </p:txBody>
+      </p:sp>
+      <p:sp>
+        <p:nvSpPr>
+          <p:cNvPr id="4" name="Slide Number Placeholder 3"/>
+          <p:cNvSpPr>
+            <a:spLocks noGrp="1"/>
+          </p:cNvSpPr>
+          <p:nvPr>
+            <p:ph type="sldNum" sz="quarter" idx="10"/>
+          </p:nvPr>
+        </p:nvSpPr>
+        <p:spPr/>
+        <p:txBody>
+          <a:bodyPr/>
+          <a:lstStyle/>
+          <a:p>
+            <a:fld id="{F7021451-1387-4CA6-816F-3879F97B5CBC}" type="slidenum">
+              <a:rPr lang="en-US"/>
+              <a:t>8</a:t>
+            </a:fld>
+            <a:endParaRPr lang="en-US"/>
+          </a:p>
+        </p:txBody>
+      </p:sp>
+    </p:spTree>
+    <p:extLst>
+      <p:ext uri="{BB962C8B-B14F-4D97-AF65-F5344CB8AC3E}">
+        <p14:creationId xmlns:p14="http://schemas.microsoft.com/office/powerpoint/2010/main" val="1024086991"/>
+      </p:ext>
+    </p:extLst>
+  </p:cSld>
+  <p:clrMapOvr>
+    <a:masterClrMapping/>
+  </p:clrMapOvr>
+</p:notes>
+</file>
+
+<file path=ppt/notesSlides/notesSlide9.xml><?xml version="1.0" encoding="utf-8"?>
+<p:notes xmlns:a="http://schemas.openxmlformats.org/drawingml/2006/main" xmlns:r="http://schemas.openxmlformats.org/officeDocument/2006/relationships" xmlns:p="http://schemas.openxmlformats.org/presentationml/2006/main">
+  <p:cSld>
+    <p:spTree>
+      <p:nvGrpSpPr>
+        <p:cNvPr id="1" name=""/>
+        <p:cNvGrpSpPr/>
+        <p:nvPr/>
+      </p:nvGrpSpPr>
+      <p:grpSpPr>
+        <a:xfrm>
+          <a:off x="0" y="0"/>
+          <a:ext cx="0" cy="0"/>
+          <a:chOff x="0" y="0"/>
+          <a:chExt cx="0" cy="0"/>
+        </a:xfrm>
+      </p:grpSpPr>
+      <p:sp>
+        <p:nvSpPr>
+          <p:cNvPr id="2" name="Slide Image Placeholder 1"/>
+          <p:cNvSpPr>
+            <a:spLocks noGrp="1" noRot="1" noChangeAspect="1"/>
+          </p:cNvSpPr>
+          <p:nvPr>
+            <p:ph type="sldImg"/>
+          </p:nvPr>
+        </p:nvSpPr>
+        <p:spPr/>
+      </p:sp>
+      <p:sp>
+        <p:nvSpPr>
+          <p:cNvPr id="3" name="Notes Placeholder 2"/>
+          <p:cNvSpPr>
+            <a:spLocks noGrp="1"/>
+          </p:cNvSpPr>
+          <p:nvPr>
+            <p:ph type="body" idx="1"/>
+          </p:nvPr>
+        </p:nvSpPr>
+        <p:spPr/>
+        <p:txBody>
+          <a:bodyPr/>
+          <a:lstStyle/>
+          <a:p>
+            <a:r>
+              <a:rPr lang="en-US" dirty="0"/>
+              <a:t>Pattern: correlation. Style profile: presentation. Central concept with related surrounding ideas and optional relationship labels.
+Slide 9: 相関図: 中心概念と周辺要素の関係を示す
+correlation-visual: 相関図/概念図 (correlation) schematic sample
+correlation-visual long description: 相関図/概念図 (correlation) のサンプルです。Central concept with related surrounding ideas and optional relationship labels. pptcreater の安全なschematicプリセットで生成しています。</a:t>
+            </a:r>
+            <a:endParaRPr lang="en-US" dirty="0"/>
+          </a:p>
+        </p:txBody>
+      </p:sp>
+      <p:sp>
+        <p:nvSpPr>
+          <p:cNvPr id="4" name="Slide Number Placeholder 3"/>
+          <p:cNvSpPr>
+            <a:spLocks noGrp="1"/>
+          </p:cNvSpPr>
+          <p:nvPr>
+            <p:ph type="sldNum" sz="quarter" idx="10"/>
+          </p:nvPr>
+        </p:nvSpPr>
+        <p:spPr/>
+        <p:txBody>
+          <a:bodyPr/>
+          <a:lstStyle/>
+          <a:p>
+            <a:fld id="{F7021451-1387-4CA6-816F-3879F97B5CBC}" type="slidenum">
+              <a:rPr lang="en-US"/>
+              <a:t>9</a:t>
             </a:fld>
             <a:endParaRPr lang="en-US"/>
           </a:p>
@@ -1247,7 +3179,7 @@
       </p:grpSpPr>
       <p:pic>
         <p:nvPicPr>
-          <p:cNvPr id="2" name="Image 0" descr="flow schematic sample">    </p:cNvPr>
+          <p:cNvPr id="2" name="Image 0" descr="表 (table) schematic sample">    </p:cNvPr>
           <p:cNvPicPr>
             <a:picLocks noChangeAspect="1"/>
           </p:cNvPicPr>
@@ -1267,8 +3199,8 @@
         </p:blipFill>
         <p:spPr>
           <a:xfrm>
-            <a:off x="530352" y="530352"/>
-            <a:ext cx="11128248" cy="5797296"/>
+            <a:off x="0" y="0"/>
+            <a:ext cx="12191695" cy="6858000"/>
           </a:xfrm>
           <a:prstGeom prst="rect">
             <a:avLst/>
@@ -1283,9 +3215,9 @@
 </p:sld>
 </file>
 
-<file path=ppt/slides/slide2.xml><?xml version="1.0" encoding="utf-8"?>
+<file path=ppt/slides/slide10.xml><?xml version="1.0" encoding="utf-8"?>
 <p:sld xmlns:a="http://schemas.openxmlformats.org/drawingml/2006/main" xmlns:r="http://schemas.openxmlformats.org/officeDocument/2006/relationships" xmlns:p="http://schemas.openxmlformats.org/presentationml/2006/main">
-  <p:cSld name="Slide 2">
+  <p:cSld name="Slide 10">
     <p:bg>
       <p:bgPr>
         <a:solidFill>
@@ -1309,7 +3241,7 @@
       </p:grpSpPr>
       <p:pic>
         <p:nvPicPr>
-          <p:cNvPr id="2" name="Image 0" descr="table schematic sample">    </p:cNvPr>
+          <p:cNvPr id="2" name="Image 0" descr="マトリクス (matrix) schematic sample">    </p:cNvPr>
           <p:cNvPicPr>
             <a:picLocks noChangeAspect="1"/>
           </p:cNvPicPr>
@@ -1329,8 +3261,8 @@
         </p:blipFill>
         <p:spPr>
           <a:xfrm>
-            <a:off x="530352" y="530352"/>
-            <a:ext cx="11128248" cy="5797296"/>
+            <a:off x="0" y="0"/>
+            <a:ext cx="12191695" cy="6858000"/>
           </a:xfrm>
           <a:prstGeom prst="rect">
             <a:avLst/>
@@ -1345,9 +3277,9 @@
 </p:sld>
 </file>
 
-<file path=ppt/slides/slide3.xml><?xml version="1.0" encoding="utf-8"?>
+<file path=ppt/slides/slide11.xml><?xml version="1.0" encoding="utf-8"?>
 <p:sld xmlns:a="http://schemas.openxmlformats.org/drawingml/2006/main" xmlns:r="http://schemas.openxmlformats.org/officeDocument/2006/relationships" xmlns:p="http://schemas.openxmlformats.org/presentationml/2006/main">
-  <p:cSld name="Slide 3">
+  <p:cSld name="Slide 11">
     <p:bg>
       <p:bgPr>
         <a:solidFill>
@@ -1371,7 +3303,7 @@
       </p:grpSpPr>
       <p:pic>
         <p:nvPicPr>
-          <p:cNvPr id="2" name="Image 0" descr="tree schematic sample">    </p:cNvPr>
+          <p:cNvPr id="2" name="Image 0" descr="ベン図 (venn) schematic sample">    </p:cNvPr>
           <p:cNvPicPr>
             <a:picLocks noChangeAspect="1"/>
           </p:cNvPicPr>
@@ -1391,8 +3323,8 @@
         </p:blipFill>
         <p:spPr>
           <a:xfrm>
-            <a:off x="530352" y="530352"/>
-            <a:ext cx="11128248" cy="5797296"/>
+            <a:off x="0" y="0"/>
+            <a:ext cx="12191695" cy="6858000"/>
           </a:xfrm>
           <a:prstGeom prst="rect">
             <a:avLst/>
@@ -1407,9 +3339,9 @@
 </p:sld>
 </file>
 
-<file path=ppt/slides/slide4.xml><?xml version="1.0" encoding="utf-8"?>
+<file path=ppt/slides/slide12.xml><?xml version="1.0" encoding="utf-8"?>
 <p:sld xmlns:a="http://schemas.openxmlformats.org/drawingml/2006/main" xmlns:r="http://schemas.openxmlformats.org/officeDocument/2006/relationships" xmlns:p="http://schemas.openxmlformats.org/presentationml/2006/main">
-  <p:cSld name="Slide 4">
+  <p:cSld name="Slide 12">
     <p:bg>
       <p:bgPr>
         <a:solidFill>
@@ -1433,7 +3365,7 @@
       </p:grpSpPr>
       <p:pic>
         <p:nvPicPr>
-          <p:cNvPr id="2" name="Image 0" descr="list-horizontal schematic sample">    </p:cNvPr>
+          <p:cNvPr id="2" name="Image 0" descr="数式 (cross) schematic sample">    </p:cNvPr>
           <p:cNvPicPr>
             <a:picLocks noChangeAspect="1"/>
           </p:cNvPicPr>
@@ -1453,8 +3385,8 @@
         </p:blipFill>
         <p:spPr>
           <a:xfrm>
-            <a:off x="530352" y="530352"/>
-            <a:ext cx="11128248" cy="5797296"/>
+            <a:off x="0" y="0"/>
+            <a:ext cx="12191695" cy="6858000"/>
           </a:xfrm>
           <a:prstGeom prst="rect">
             <a:avLst/>
@@ -1469,9 +3401,877 @@
 </p:sld>
 </file>
 
-<file path=ppt/slides/slide5.xml><?xml version="1.0" encoding="utf-8"?>
+<file path=ppt/slides/slide13.xml><?xml version="1.0" encoding="utf-8"?>
 <p:sld xmlns:a="http://schemas.openxmlformats.org/drawingml/2006/main" xmlns:r="http://schemas.openxmlformats.org/officeDocument/2006/relationships" xmlns:p="http://schemas.openxmlformats.org/presentationml/2006/main">
-  <p:cSld name="Slide 5">
+  <p:cSld name="Slide 13">
+    <p:bg>
+      <p:bgPr>
+        <a:solidFill>
+          <a:srgbClr val="FFFFFF"/>
+        </a:solidFill>
+      </p:bgPr>
+    </p:bg>
+    <p:spTree>
+      <p:nvGrpSpPr>
+        <p:cNvPr id="1" name=""/>
+        <p:cNvGrpSpPr/>
+        <p:nvPr/>
+      </p:nvGrpSpPr>
+      <p:grpSpPr>
+        <a:xfrm>
+          <a:off x="0" y="0"/>
+          <a:ext cx="0" cy="0"/>
+          <a:chOff x="0" y="0"/>
+          <a:chExt cx="0" cy="0"/>
+        </a:xfrm>
+      </p:grpSpPr>
+      <p:pic>
+        <p:nvPicPr>
+          <p:cNvPr id="2" name="Image 0" descr="グループ/集合 (set) schematic sample">    </p:cNvPr>
+          <p:cNvPicPr>
+            <a:picLocks noChangeAspect="1"/>
+          </p:cNvPicPr>
+          <p:nvPr/>
+        </p:nvPicPr>
+        <p:blipFill>
+          <a:blip r:embed="rId1">
+            <a:extLst>
+              <a:ext uri="{96DAC541-7B7A-43D3-8B79-37D633B846F1}">
+                <asvg:svgBlip xmlns:asvg="http://schemas.microsoft.com/office/drawing/2016/SVG/main" r:embed="rId2"/>
+              </a:ext>
+            </a:extLst>
+          </a:blip>
+          <a:stretch>
+            <a:fillRect/>
+          </a:stretch>
+        </p:blipFill>
+        <p:spPr>
+          <a:xfrm>
+            <a:off x="0" y="0"/>
+            <a:ext cx="12191695" cy="6858000"/>
+          </a:xfrm>
+          <a:prstGeom prst="rect">
+            <a:avLst/>
+          </a:prstGeom>
+        </p:spPr>
+      </p:pic>
+    </p:spTree>
+  </p:cSld>
+  <p:clrMapOvr>
+    <a:masterClrMapping/>
+  </p:clrMapOvr>
+</p:sld>
+</file>
+
+<file path=ppt/slides/slide14.xml><?xml version="1.0" encoding="utf-8"?>
+<p:sld xmlns:a="http://schemas.openxmlformats.org/drawingml/2006/main" xmlns:r="http://schemas.openxmlformats.org/officeDocument/2006/relationships" xmlns:p="http://schemas.openxmlformats.org/presentationml/2006/main">
+  <p:cSld name="Slide 14">
+    <p:bg>
+      <p:bgPr>
+        <a:solidFill>
+          <a:srgbClr val="FFFFFF"/>
+        </a:solidFill>
+      </p:bgPr>
+    </p:bg>
+    <p:spTree>
+      <p:nvGrpSpPr>
+        <p:cNvPr id="1" name=""/>
+        <p:cNvGrpSpPr/>
+        <p:nvPr/>
+      </p:nvGrpSpPr>
+      <p:grpSpPr>
+        <a:xfrm>
+          <a:off x="0" y="0"/>
+          <a:ext cx="0" cy="0"/>
+          <a:chOff x="0" y="0"/>
+          <a:chExt cx="0" cy="0"/>
+        </a:xfrm>
+      </p:grpSpPr>
+      <p:pic>
+        <p:nvPicPr>
+          <p:cNvPr id="2" name="Image 0" descr="項目比較 (contrast) schematic sample">    </p:cNvPr>
+          <p:cNvPicPr>
+            <a:picLocks noChangeAspect="1"/>
+          </p:cNvPicPr>
+          <p:nvPr/>
+        </p:nvPicPr>
+        <p:blipFill>
+          <a:blip r:embed="rId1">
+            <a:extLst>
+              <a:ext uri="{96DAC541-7B7A-43D3-8B79-37D633B846F1}">
+                <asvg:svgBlip xmlns:asvg="http://schemas.microsoft.com/office/drawing/2016/SVG/main" r:embed="rId2"/>
+              </a:ext>
+            </a:extLst>
+          </a:blip>
+          <a:stretch>
+            <a:fillRect/>
+          </a:stretch>
+        </p:blipFill>
+        <p:spPr>
+          <a:xfrm>
+            <a:off x="0" y="0"/>
+            <a:ext cx="12191695" cy="6858000"/>
+          </a:xfrm>
+          <a:prstGeom prst="rect">
+            <a:avLst/>
+          </a:prstGeom>
+        </p:spPr>
+      </p:pic>
+    </p:spTree>
+  </p:cSld>
+  <p:clrMapOvr>
+    <a:masterClrMapping/>
+  </p:clrMapOvr>
+</p:sld>
+</file>
+
+<file path=ppt/slides/slide15.xml><?xml version="1.0" encoding="utf-8"?>
+<p:sld xmlns:a="http://schemas.openxmlformats.org/drawingml/2006/main" xmlns:r="http://schemas.openxmlformats.org/officeDocument/2006/relationships" xmlns:p="http://schemas.openxmlformats.org/presentationml/2006/main">
+  <p:cSld name="Slide 15">
+    <p:bg>
+      <p:bgPr>
+        <a:solidFill>
+          <a:srgbClr val="FFFFFF"/>
+        </a:solidFill>
+      </p:bgPr>
+    </p:bg>
+    <p:spTree>
+      <p:nvGrpSpPr>
+        <p:cNvPr id="1" name=""/>
+        <p:cNvGrpSpPr/>
+        <p:nvPr/>
+      </p:nvGrpSpPr>
+      <p:grpSpPr>
+        <a:xfrm>
+          <a:off x="0" y="0"/>
+          <a:ext cx="0" cy="0"/>
+          <a:chOff x="0" y="0"/>
+          <a:chExt cx="0" cy="0"/>
+        </a:xfrm>
+      </p:grpSpPr>
+      <p:pic>
+        <p:nvPicPr>
+          <p:cNvPr id="2" name="Image 0" descr="規模比較 (scale-contrast) schematic sample">    </p:cNvPr>
+          <p:cNvPicPr>
+            <a:picLocks noChangeAspect="1"/>
+          </p:cNvPicPr>
+          <p:nvPr/>
+        </p:nvPicPr>
+        <p:blipFill>
+          <a:blip r:embed="rId1">
+            <a:extLst>
+              <a:ext uri="{96DAC541-7B7A-43D3-8B79-37D633B846F1}">
+                <asvg:svgBlip xmlns:asvg="http://schemas.microsoft.com/office/drawing/2016/SVG/main" r:embed="rId2"/>
+              </a:ext>
+            </a:extLst>
+          </a:blip>
+          <a:stretch>
+            <a:fillRect/>
+          </a:stretch>
+        </p:blipFill>
+        <p:spPr>
+          <a:xfrm>
+            <a:off x="0" y="0"/>
+            <a:ext cx="12191695" cy="6858000"/>
+          </a:xfrm>
+          <a:prstGeom prst="rect">
+            <a:avLst/>
+          </a:prstGeom>
+        </p:spPr>
+      </p:pic>
+    </p:spTree>
+  </p:cSld>
+  <p:clrMapOvr>
+    <a:masterClrMapping/>
+  </p:clrMapOvr>
+</p:sld>
+</file>
+
+<file path=ppt/slides/slide16.xml><?xml version="1.0" encoding="utf-8"?>
+<p:sld xmlns:a="http://schemas.openxmlformats.org/drawingml/2006/main" xmlns:r="http://schemas.openxmlformats.org/officeDocument/2006/relationships" xmlns:p="http://schemas.openxmlformats.org/presentationml/2006/main">
+  <p:cSld name="Slide 16">
+    <p:bg>
+      <p:bgPr>
+        <a:solidFill>
+          <a:srgbClr val="FFFFFF"/>
+        </a:solidFill>
+      </p:bgPr>
+    </p:bg>
+    <p:spTree>
+      <p:nvGrpSpPr>
+        <p:cNvPr id="1" name=""/>
+        <p:cNvGrpSpPr/>
+        <p:nvPr/>
+      </p:nvGrpSpPr>
+      <p:grpSpPr>
+        <a:xfrm>
+          <a:off x="0" y="0"/>
+          <a:ext cx="0" cy="0"/>
+          <a:chOff x="0" y="0"/>
+          <a:chExt cx="0" cy="0"/>
+        </a:xfrm>
+      </p:grpSpPr>
+      <p:pic>
+        <p:nvPicPr>
+          <p:cNvPr id="2" name="Image 0" descr="規模分析 (grow) schematic sample">    </p:cNvPr>
+          <p:cNvPicPr>
+            <a:picLocks noChangeAspect="1"/>
+          </p:cNvPicPr>
+          <p:nvPr/>
+        </p:nvPicPr>
+        <p:blipFill>
+          <a:blip r:embed="rId1">
+            <a:extLst>
+              <a:ext uri="{96DAC541-7B7A-43D3-8B79-37D633B846F1}">
+                <asvg:svgBlip xmlns:asvg="http://schemas.microsoft.com/office/drawing/2016/SVG/main" r:embed="rId2"/>
+              </a:ext>
+            </a:extLst>
+          </a:blip>
+          <a:stretch>
+            <a:fillRect/>
+          </a:stretch>
+        </p:blipFill>
+        <p:spPr>
+          <a:xfrm>
+            <a:off x="0" y="0"/>
+            <a:ext cx="12191695" cy="6858000"/>
+          </a:xfrm>
+          <a:prstGeom prst="rect">
+            <a:avLst/>
+          </a:prstGeom>
+        </p:spPr>
+      </p:pic>
+    </p:spTree>
+  </p:cSld>
+  <p:clrMapOvr>
+    <a:masterClrMapping/>
+  </p:clrMapOvr>
+</p:sld>
+</file>
+
+<file path=ppt/slides/slide17.xml><?xml version="1.0" encoding="utf-8"?>
+<p:sld xmlns:a="http://schemas.openxmlformats.org/drawingml/2006/main" xmlns:r="http://schemas.openxmlformats.org/officeDocument/2006/relationships" xmlns:p="http://schemas.openxmlformats.org/presentationml/2006/main">
+  <p:cSld name="Slide 17">
+    <p:bg>
+      <p:bgPr>
+        <a:solidFill>
+          <a:srgbClr val="FFFFFF"/>
+        </a:solidFill>
+      </p:bgPr>
+    </p:bg>
+    <p:spTree>
+      <p:nvGrpSpPr>
+        <p:cNvPr id="1" name=""/>
+        <p:cNvGrpSpPr/>
+        <p:nvPr/>
+      </p:nvGrpSpPr>
+      <p:grpSpPr>
+        <a:xfrm>
+          <a:off x="0" y="0"/>
+          <a:ext cx="0" cy="0"/>
+          <a:chOff x="0" y="0"/>
+          <a:chExt cx="0" cy="0"/>
+        </a:xfrm>
+      </p:grpSpPr>
+      <p:pic>
+        <p:nvPicPr>
+          <p:cNvPr id="2" name="Image 0" descr="レイヤー構造 (layer) schematic sample">    </p:cNvPr>
+          <p:cNvPicPr>
+            <a:picLocks noChangeAspect="1"/>
+          </p:cNvPicPr>
+          <p:nvPr/>
+        </p:nvPicPr>
+        <p:blipFill>
+          <a:blip r:embed="rId1">
+            <a:extLst>
+              <a:ext uri="{96DAC541-7B7A-43D3-8B79-37D633B846F1}">
+                <asvg:svgBlip xmlns:asvg="http://schemas.microsoft.com/office/drawing/2016/SVG/main" r:embed="rId2"/>
+              </a:ext>
+            </a:extLst>
+          </a:blip>
+          <a:stretch>
+            <a:fillRect/>
+          </a:stretch>
+        </p:blipFill>
+        <p:spPr>
+          <a:xfrm>
+            <a:off x="0" y="0"/>
+            <a:ext cx="12191695" cy="6858000"/>
+          </a:xfrm>
+          <a:prstGeom prst="rect">
+            <a:avLst/>
+          </a:prstGeom>
+        </p:spPr>
+      </p:pic>
+    </p:spTree>
+  </p:cSld>
+  <p:clrMapOvr>
+    <a:masterClrMapping/>
+  </p:clrMapOvr>
+</p:sld>
+</file>
+
+<file path=ppt/slides/slide18.xml><?xml version="1.0" encoding="utf-8"?>
+<p:sld xmlns:a="http://schemas.openxmlformats.org/drawingml/2006/main" xmlns:r="http://schemas.openxmlformats.org/officeDocument/2006/relationships" xmlns:p="http://schemas.openxmlformats.org/presentationml/2006/main">
+  <p:cSld name="Slide 18">
+    <p:bg>
+      <p:bgPr>
+        <a:solidFill>
+          <a:srgbClr val="FFFFFF"/>
+        </a:solidFill>
+      </p:bgPr>
+    </p:bg>
+    <p:spTree>
+      <p:nvGrpSpPr>
+        <p:cNvPr id="1" name=""/>
+        <p:cNvGrpSpPr/>
+        <p:nvPr/>
+      </p:nvGrpSpPr>
+      <p:grpSpPr>
+        <a:xfrm>
+          <a:off x="0" y="0"/>
+          <a:ext cx="0" cy="0"/>
+          <a:chOff x="0" y="0"/>
+          <a:chExt cx="0" cy="0"/>
+        </a:xfrm>
+      </p:grpSpPr>
+      <p:pic>
+        <p:nvPicPr>
+          <p:cNvPr id="2" name="Image 0" descr="トライアングル (triangle) schematic sample">    </p:cNvPr>
+          <p:cNvPicPr>
+            <a:picLocks noChangeAspect="1"/>
+          </p:cNvPicPr>
+          <p:nvPr/>
+        </p:nvPicPr>
+        <p:blipFill>
+          <a:blip r:embed="rId1">
+            <a:extLst>
+              <a:ext uri="{96DAC541-7B7A-43D3-8B79-37D633B846F1}">
+                <asvg:svgBlip xmlns:asvg="http://schemas.microsoft.com/office/drawing/2016/SVG/main" r:embed="rId2"/>
+              </a:ext>
+            </a:extLst>
+          </a:blip>
+          <a:stretch>
+            <a:fillRect/>
+          </a:stretch>
+        </p:blipFill>
+        <p:spPr>
+          <a:xfrm>
+            <a:off x="0" y="0"/>
+            <a:ext cx="12191695" cy="6858000"/>
+          </a:xfrm>
+          <a:prstGeom prst="rect">
+            <a:avLst/>
+          </a:prstGeom>
+        </p:spPr>
+      </p:pic>
+    </p:spTree>
+  </p:cSld>
+  <p:clrMapOvr>
+    <a:masterClrMapping/>
+  </p:clrMapOvr>
+</p:sld>
+</file>
+
+<file path=ppt/slides/slide19.xml><?xml version="1.0" encoding="utf-8"?>
+<p:sld xmlns:a="http://schemas.openxmlformats.org/drawingml/2006/main" xmlns:r="http://schemas.openxmlformats.org/officeDocument/2006/relationships" xmlns:p="http://schemas.openxmlformats.org/presentationml/2006/main">
+  <p:cSld name="Slide 19">
+    <p:bg>
+      <p:bgPr>
+        <a:solidFill>
+          <a:srgbClr val="FFFFFF"/>
+        </a:solidFill>
+      </p:bgPr>
+    </p:bg>
+    <p:spTree>
+      <p:nvGrpSpPr>
+        <p:cNvPr id="1" name=""/>
+        <p:cNvGrpSpPr/>
+        <p:nvPr/>
+      </p:nvGrpSpPr>
+      <p:grpSpPr>
+        <a:xfrm>
+          <a:off x="0" y="0"/>
+          <a:ext cx="0" cy="0"/>
+          <a:chOff x="0" y="0"/>
+          <a:chExt cx="0" cy="0"/>
+        </a:xfrm>
+      </p:grpSpPr>
+      <p:pic>
+        <p:nvPicPr>
+          <p:cNvPr id="2" name="Image 0" descr="階段/ステップ (step) schematic sample">    </p:cNvPr>
+          <p:cNvPicPr>
+            <a:picLocks noChangeAspect="1"/>
+          </p:cNvPicPr>
+          <p:nvPr/>
+        </p:nvPicPr>
+        <p:blipFill>
+          <a:blip r:embed="rId1">
+            <a:extLst>
+              <a:ext uri="{96DAC541-7B7A-43D3-8B79-37D633B846F1}">
+                <asvg:svgBlip xmlns:asvg="http://schemas.microsoft.com/office/drawing/2016/SVG/main" r:embed="rId2"/>
+              </a:ext>
+            </a:extLst>
+          </a:blip>
+          <a:stretch>
+            <a:fillRect/>
+          </a:stretch>
+        </p:blipFill>
+        <p:spPr>
+          <a:xfrm>
+            <a:off x="0" y="0"/>
+            <a:ext cx="12191695" cy="6858000"/>
+          </a:xfrm>
+          <a:prstGeom prst="rect">
+            <a:avLst/>
+          </a:prstGeom>
+        </p:spPr>
+      </p:pic>
+    </p:spTree>
+  </p:cSld>
+  <p:clrMapOvr>
+    <a:masterClrMapping/>
+  </p:clrMapOvr>
+</p:sld>
+</file>
+
+<file path=ppt/slides/slide2.xml><?xml version="1.0" encoding="utf-8"?>
+<p:sld xmlns:a="http://schemas.openxmlformats.org/drawingml/2006/main" xmlns:r="http://schemas.openxmlformats.org/officeDocument/2006/relationships" xmlns:p="http://schemas.openxmlformats.org/presentationml/2006/main">
+  <p:cSld name="Slide 2">
+    <p:bg>
+      <p:bgPr>
+        <a:solidFill>
+          <a:srgbClr val="FFFFFF"/>
+        </a:solidFill>
+      </p:bgPr>
+    </p:bg>
+    <p:spTree>
+      <p:nvGrpSpPr>
+        <p:cNvPr id="1" name=""/>
+        <p:cNvGrpSpPr/>
+        <p:nvPr/>
+      </p:nvGrpSpPr>
+      <p:grpSpPr>
+        <a:xfrm>
+          <a:off x="0" y="0"/>
+          <a:ext cx="0" cy="0"/>
+          <a:chOff x="0" y="0"/>
+          <a:chExt cx="0" cy="0"/>
+        </a:xfrm>
+      </p:grpSpPr>
+      <p:pic>
+        <p:nvPicPr>
+          <p:cNvPr id="2" name="Image 0" descr="ツリー (tree) schematic sample">    </p:cNvPr>
+          <p:cNvPicPr>
+            <a:picLocks noChangeAspect="1"/>
+          </p:cNvPicPr>
+          <p:nvPr/>
+        </p:nvPicPr>
+        <p:blipFill>
+          <a:blip r:embed="rId1">
+            <a:extLst>
+              <a:ext uri="{96DAC541-7B7A-43D3-8B79-37D633B846F1}">
+                <asvg:svgBlip xmlns:asvg="http://schemas.microsoft.com/office/drawing/2016/SVG/main" r:embed="rId2"/>
+              </a:ext>
+            </a:extLst>
+          </a:blip>
+          <a:stretch>
+            <a:fillRect/>
+          </a:stretch>
+        </p:blipFill>
+        <p:spPr>
+          <a:xfrm>
+            <a:off x="0" y="0"/>
+            <a:ext cx="12191695" cy="6858000"/>
+          </a:xfrm>
+          <a:prstGeom prst="rect">
+            <a:avLst/>
+          </a:prstGeom>
+        </p:spPr>
+      </p:pic>
+    </p:spTree>
+  </p:cSld>
+  <p:clrMapOvr>
+    <a:masterClrMapping/>
+  </p:clrMapOvr>
+</p:sld>
+</file>
+
+<file path=ppt/slides/slide20.xml><?xml version="1.0" encoding="utf-8"?>
+<p:sld xmlns:a="http://schemas.openxmlformats.org/drawingml/2006/main" xmlns:r="http://schemas.openxmlformats.org/officeDocument/2006/relationships" xmlns:p="http://schemas.openxmlformats.org/presentationml/2006/main">
+  <p:cSld name="Slide 20">
+    <p:bg>
+      <p:bgPr>
+        <a:solidFill>
+          <a:srgbClr val="FFFFFF"/>
+        </a:solidFill>
+      </p:bgPr>
+    </p:bg>
+    <p:spTree>
+      <p:nvGrpSpPr>
+        <p:cNvPr id="1" name=""/>
+        <p:cNvGrpSpPr/>
+        <p:nvPr/>
+      </p:nvGrpSpPr>
+      <p:grpSpPr>
+        <a:xfrm>
+          <a:off x="0" y="0"/>
+          <a:ext cx="0" cy="0"/>
+          <a:chOff x="0" y="0"/>
+          <a:chExt cx="0" cy="0"/>
+        </a:xfrm>
+      </p:grpSpPr>
+      <p:pic>
+        <p:nvPicPr>
+          <p:cNvPr id="2" name="Image 0" descr="ガントチャート (gantt) schematic sample">    </p:cNvPr>
+          <p:cNvPicPr>
+            <a:picLocks noChangeAspect="1"/>
+          </p:cNvPicPr>
+          <p:nvPr/>
+        </p:nvPicPr>
+        <p:blipFill>
+          <a:blip r:embed="rId1">
+            <a:extLst>
+              <a:ext uri="{96DAC541-7B7A-43D3-8B79-37D633B846F1}">
+                <asvg:svgBlip xmlns:asvg="http://schemas.microsoft.com/office/drawing/2016/SVG/main" r:embed="rId2"/>
+              </a:ext>
+            </a:extLst>
+          </a:blip>
+          <a:stretch>
+            <a:fillRect/>
+          </a:stretch>
+        </p:blipFill>
+        <p:spPr>
+          <a:xfrm>
+            <a:off x="0" y="0"/>
+            <a:ext cx="12191695" cy="6858000"/>
+          </a:xfrm>
+          <a:prstGeom prst="rect">
+            <a:avLst/>
+          </a:prstGeom>
+        </p:spPr>
+      </p:pic>
+    </p:spTree>
+  </p:cSld>
+  <p:clrMapOvr>
+    <a:masterClrMapping/>
+  </p:clrMapOvr>
+</p:sld>
+</file>
+
+<file path=ppt/slides/slide21.xml><?xml version="1.0" encoding="utf-8"?>
+<p:sld xmlns:a="http://schemas.openxmlformats.org/drawingml/2006/main" xmlns:r="http://schemas.openxmlformats.org/officeDocument/2006/relationships" xmlns:p="http://schemas.openxmlformats.org/presentationml/2006/main">
+  <p:cSld name="Slide 21">
+    <p:bg>
+      <p:bgPr>
+        <a:solidFill>
+          <a:srgbClr val="FFFFFF"/>
+        </a:solidFill>
+      </p:bgPr>
+    </p:bg>
+    <p:spTree>
+      <p:nvGrpSpPr>
+        <p:cNvPr id="1" name=""/>
+        <p:cNvGrpSpPr/>
+        <p:nvPr/>
+      </p:nvGrpSpPr>
+      <p:grpSpPr>
+        <a:xfrm>
+          <a:off x="0" y="0"/>
+          <a:ext cx="0" cy="0"/>
+          <a:chOff x="0" y="0"/>
+          <a:chExt cx="0" cy="0"/>
+        </a:xfrm>
+      </p:grpSpPr>
+      <p:pic>
+        <p:nvPicPr>
+          <p:cNvPr id="2" name="Image 0" descr="ランキング (ranking) schematic sample">    </p:cNvPr>
+          <p:cNvPicPr>
+            <a:picLocks noChangeAspect="1"/>
+          </p:cNvPicPr>
+          <p:nvPr/>
+        </p:nvPicPr>
+        <p:blipFill>
+          <a:blip r:embed="rId1">
+            <a:extLst>
+              <a:ext uri="{96DAC541-7B7A-43D3-8B79-37D633B846F1}">
+                <asvg:svgBlip xmlns:asvg="http://schemas.microsoft.com/office/drawing/2016/SVG/main" r:embed="rId2"/>
+              </a:ext>
+            </a:extLst>
+          </a:blip>
+          <a:stretch>
+            <a:fillRect/>
+          </a:stretch>
+        </p:blipFill>
+        <p:spPr>
+          <a:xfrm>
+            <a:off x="0" y="0"/>
+            <a:ext cx="12191695" cy="6858000"/>
+          </a:xfrm>
+          <a:prstGeom prst="rect">
+            <a:avLst/>
+          </a:prstGeom>
+        </p:spPr>
+      </p:pic>
+    </p:spTree>
+  </p:cSld>
+  <p:clrMapOvr>
+    <a:masterClrMapping/>
+  </p:clrMapOvr>
+</p:sld>
+</file>
+
+<file path=ppt/slides/slide22.xml><?xml version="1.0" encoding="utf-8"?>
+<p:sld xmlns:a="http://schemas.openxmlformats.org/drawingml/2006/main" xmlns:r="http://schemas.openxmlformats.org/officeDocument/2006/relationships" xmlns:p="http://schemas.openxmlformats.org/presentationml/2006/main">
+  <p:cSld name="Slide 22">
+    <p:bg>
+      <p:bgPr>
+        <a:solidFill>
+          <a:srgbClr val="FFFFFF"/>
+        </a:solidFill>
+      </p:bgPr>
+    </p:bg>
+    <p:spTree>
+      <p:nvGrpSpPr>
+        <p:cNvPr id="1" name=""/>
+        <p:cNvGrpSpPr/>
+        <p:nvPr/>
+      </p:nvGrpSpPr>
+      <p:grpSpPr>
+        <a:xfrm>
+          <a:off x="0" y="0"/>
+          <a:ext cx="0" cy="0"/>
+          <a:chOff x="0" y="0"/>
+          <a:chExt cx="0" cy="0"/>
+        </a:xfrm>
+      </p:grpSpPr>
+      <p:pic>
+        <p:nvPicPr>
+          <p:cNvPr id="2" name="Image 0" descr="箇条書き縦 (list) schematic sample">    </p:cNvPr>
+          <p:cNvPicPr>
+            <a:picLocks noChangeAspect="1"/>
+          </p:cNvPicPr>
+          <p:nvPr/>
+        </p:nvPicPr>
+        <p:blipFill>
+          <a:blip r:embed="rId1">
+            <a:extLst>
+              <a:ext uri="{96DAC541-7B7A-43D3-8B79-37D633B846F1}">
+                <asvg:svgBlip xmlns:asvg="http://schemas.microsoft.com/office/drawing/2016/SVG/main" r:embed="rId2"/>
+              </a:ext>
+            </a:extLst>
+          </a:blip>
+          <a:stretch>
+            <a:fillRect/>
+          </a:stretch>
+        </p:blipFill>
+        <p:spPr>
+          <a:xfrm>
+            <a:off x="0" y="0"/>
+            <a:ext cx="12191695" cy="6858000"/>
+          </a:xfrm>
+          <a:prstGeom prst="rect">
+            <a:avLst/>
+          </a:prstGeom>
+        </p:spPr>
+      </p:pic>
+    </p:spTree>
+  </p:cSld>
+  <p:clrMapOvr>
+    <a:masterClrMapping/>
+  </p:clrMapOvr>
+</p:sld>
+</file>
+
+<file path=ppt/slides/slide23.xml><?xml version="1.0" encoding="utf-8"?>
+<p:sld xmlns:a="http://schemas.openxmlformats.org/drawingml/2006/main" xmlns:r="http://schemas.openxmlformats.org/officeDocument/2006/relationships" xmlns:p="http://schemas.openxmlformats.org/presentationml/2006/main">
+  <p:cSld name="Slide 23">
+    <p:bg>
+      <p:bgPr>
+        <a:solidFill>
+          <a:srgbClr val="FFFFFF"/>
+        </a:solidFill>
+      </p:bgPr>
+    </p:bg>
+    <p:spTree>
+      <p:nvGrpSpPr>
+        <p:cNvPr id="1" name=""/>
+        <p:cNvGrpSpPr/>
+        <p:nvPr/>
+      </p:nvGrpSpPr>
+      <p:grpSpPr>
+        <a:xfrm>
+          <a:off x="0" y="0"/>
+          <a:ext cx="0" cy="0"/>
+          <a:chOff x="0" y="0"/>
+          <a:chExt cx="0" cy="0"/>
+        </a:xfrm>
+      </p:grpSpPr>
+      <p:pic>
+        <p:nvPicPr>
+          <p:cNvPr id="2" name="Image 0" descr="箇条書き横 (list-horizontal) schematic sample">    </p:cNvPr>
+          <p:cNvPicPr>
+            <a:picLocks noChangeAspect="1"/>
+          </p:cNvPicPr>
+          <p:nvPr/>
+        </p:nvPicPr>
+        <p:blipFill>
+          <a:blip r:embed="rId1">
+            <a:extLst>
+              <a:ext uri="{96DAC541-7B7A-43D3-8B79-37D633B846F1}">
+                <asvg:svgBlip xmlns:asvg="http://schemas.microsoft.com/office/drawing/2016/SVG/main" r:embed="rId2"/>
+              </a:ext>
+            </a:extLst>
+          </a:blip>
+          <a:stretch>
+            <a:fillRect/>
+          </a:stretch>
+        </p:blipFill>
+        <p:spPr>
+          <a:xfrm>
+            <a:off x="0" y="0"/>
+            <a:ext cx="12191695" cy="6858000"/>
+          </a:xfrm>
+          <a:prstGeom prst="rect">
+            <a:avLst/>
+          </a:prstGeom>
+        </p:spPr>
+      </p:pic>
+    </p:spTree>
+  </p:cSld>
+  <p:clrMapOvr>
+    <a:masterClrMapping/>
+  </p:clrMapOvr>
+</p:sld>
+</file>
+
+<file path=ppt/slides/slide24.xml><?xml version="1.0" encoding="utf-8"?>
+<p:sld xmlns:a="http://schemas.openxmlformats.org/drawingml/2006/main" xmlns:r="http://schemas.openxmlformats.org/officeDocument/2006/relationships" xmlns:p="http://schemas.openxmlformats.org/presentationml/2006/main">
+  <p:cSld name="Slide 24">
+    <p:bg>
+      <p:bgPr>
+        <a:solidFill>
+          <a:srgbClr val="FFFFFF"/>
+        </a:solidFill>
+      </p:bgPr>
+    </p:bg>
+    <p:spTree>
+      <p:nvGrpSpPr>
+        <p:cNvPr id="1" name=""/>
+        <p:cNvGrpSpPr/>
+        <p:nvPr/>
+      </p:nvGrpSpPr>
+      <p:grpSpPr>
+        <a:xfrm>
+          <a:off x="0" y="0"/>
+          <a:ext cx="0" cy="0"/>
+          <a:chOff x="0" y="0"/>
+          <a:chExt cx="0" cy="0"/>
+        </a:xfrm>
+      </p:grpSpPr>
+      <p:pic>
+        <p:nvPicPr>
+          <p:cNvPr id="2" name="Image 0" descr="箇条書き羅列 (list-enumeration) schematic sample">    </p:cNvPr>
+          <p:cNvPicPr>
+            <a:picLocks noChangeAspect="1"/>
+          </p:cNvPicPr>
+          <p:nvPr/>
+        </p:nvPicPr>
+        <p:blipFill>
+          <a:blip r:embed="rId1">
+            <a:extLst>
+              <a:ext uri="{96DAC541-7B7A-43D3-8B79-37D633B846F1}">
+                <asvg:svgBlip xmlns:asvg="http://schemas.microsoft.com/office/drawing/2016/SVG/main" r:embed="rId2"/>
+              </a:ext>
+            </a:extLst>
+          </a:blip>
+          <a:stretch>
+            <a:fillRect/>
+          </a:stretch>
+        </p:blipFill>
+        <p:spPr>
+          <a:xfrm>
+            <a:off x="0" y="0"/>
+            <a:ext cx="12191695" cy="6858000"/>
+          </a:xfrm>
+          <a:prstGeom prst="rect">
+            <a:avLst/>
+          </a:prstGeom>
+        </p:spPr>
+      </p:pic>
+    </p:spTree>
+  </p:cSld>
+  <p:clrMapOvr>
+    <a:masterClrMapping/>
+  </p:clrMapOvr>
+</p:sld>
+</file>
+
+<file path=ppt/slides/slide25.xml><?xml version="1.0" encoding="utf-8"?>
+<p:sld xmlns:a="http://schemas.openxmlformats.org/drawingml/2006/main" xmlns:r="http://schemas.openxmlformats.org/officeDocument/2006/relationships" xmlns:p="http://schemas.openxmlformats.org/presentationml/2006/main">
+  <p:cSld name="Slide 25">
+    <p:bg>
+      <p:bgPr>
+        <a:solidFill>
+          <a:srgbClr val="FFFFFF"/>
+        </a:solidFill>
+      </p:bgPr>
+    </p:bg>
+    <p:spTree>
+      <p:nvGrpSpPr>
+        <p:cNvPr id="1" name=""/>
+        <p:cNvGrpSpPr/>
+        <p:nvPr/>
+      </p:nvGrpSpPr>
+      <p:grpSpPr>
+        <a:xfrm>
+          <a:off x="0" y="0"/>
+          <a:ext cx="0" cy="0"/>
+          <a:chOff x="0" y="0"/>
+          <a:chExt cx="0" cy="0"/>
+        </a:xfrm>
+      </p:grpSpPr>
+      <p:pic>
+        <p:nvPicPr>
+          <p:cNvPr id="2" name="Image 0" descr="モックアップ (mockup) schematic sample">    </p:cNvPr>
+          <p:cNvPicPr>
+            <a:picLocks noChangeAspect="1"/>
+          </p:cNvPicPr>
+          <p:nvPr/>
+        </p:nvPicPr>
+        <p:blipFill>
+          <a:blip r:embed="rId1">
+            <a:extLst>
+              <a:ext uri="{96DAC541-7B7A-43D3-8B79-37D633B846F1}">
+                <asvg:svgBlip xmlns:asvg="http://schemas.microsoft.com/office/drawing/2016/SVG/main" r:embed="rId2"/>
+              </a:ext>
+            </a:extLst>
+          </a:blip>
+          <a:stretch>
+            <a:fillRect/>
+          </a:stretch>
+        </p:blipFill>
+        <p:spPr>
+          <a:xfrm>
+            <a:off x="0" y="0"/>
+            <a:ext cx="12191695" cy="6858000"/>
+          </a:xfrm>
+          <a:prstGeom prst="rect">
+            <a:avLst/>
+          </a:prstGeom>
+        </p:spPr>
+      </p:pic>
+    </p:spTree>
+  </p:cSld>
+  <p:clrMapOvr>
+    <a:masterClrMapping/>
+  </p:clrMapOvr>
+</p:sld>
+</file>
+
+<file path=ppt/slides/slide26.xml><?xml version="1.0" encoding="utf-8"?>
+<p:sld xmlns:a="http://schemas.openxmlformats.org/drawingml/2006/main" xmlns:r="http://schemas.openxmlformats.org/officeDocument/2006/relationships" xmlns:p="http://schemas.openxmlformats.org/presentationml/2006/main">
+  <p:cSld name="Slide 26">
     <p:bg>
       <p:bgPr>
         <a:solidFill>
@@ -1627,12 +4427,446 @@
                 <a:ea typeface="Yu Gothic" pitchFamily="34" charset="-122"/>
                 <a:cs typeface="Yu Gothic" pitchFamily="34" charset="-120"/>
               </a:rPr>
-              <a:t>https://www.slideland.tech/</a:t>
+              <a:t>https://www.slideland.tech/docs/schematic</a:t>
             </a:r>
             <a:endParaRPr lang="en-US" sz="1400" dirty="0"/>
           </a:p>
         </p:txBody>
       </p:sp>
+    </p:spTree>
+  </p:cSld>
+  <p:clrMapOvr>
+    <a:masterClrMapping/>
+  </p:clrMapOvr>
+</p:sld>
+</file>
+
+<file path=ppt/slides/slide3.xml><?xml version="1.0" encoding="utf-8"?>
+<p:sld xmlns:a="http://schemas.openxmlformats.org/drawingml/2006/main" xmlns:r="http://schemas.openxmlformats.org/officeDocument/2006/relationships" xmlns:p="http://schemas.openxmlformats.org/presentationml/2006/main">
+  <p:cSld name="Slide 3">
+    <p:bg>
+      <p:bgPr>
+        <a:solidFill>
+          <a:srgbClr val="FFFFFF"/>
+        </a:solidFill>
+      </p:bgPr>
+    </p:bg>
+    <p:spTree>
+      <p:nvGrpSpPr>
+        <p:cNvPr id="1" name=""/>
+        <p:cNvGrpSpPr/>
+        <p:nvPr/>
+      </p:nvGrpSpPr>
+      <p:grpSpPr>
+        <a:xfrm>
+          <a:off x="0" y="0"/>
+          <a:ext cx="0" cy="0"/>
+          <a:chOff x="0" y="0"/>
+          <a:chExt cx="0" cy="0"/>
+        </a:xfrm>
+      </p:grpSpPr>
+      <p:pic>
+        <p:nvPicPr>
+          <p:cNvPr id="2" name="Image 0" descr="横フロー (flow) schematic sample">    </p:cNvPr>
+          <p:cNvPicPr>
+            <a:picLocks noChangeAspect="1"/>
+          </p:cNvPicPr>
+          <p:nvPr/>
+        </p:nvPicPr>
+        <p:blipFill>
+          <a:blip r:embed="rId1">
+            <a:extLst>
+              <a:ext uri="{96DAC541-7B7A-43D3-8B79-37D633B846F1}">
+                <asvg:svgBlip xmlns:asvg="http://schemas.microsoft.com/office/drawing/2016/SVG/main" r:embed="rId2"/>
+              </a:ext>
+            </a:extLst>
+          </a:blip>
+          <a:stretch>
+            <a:fillRect/>
+          </a:stretch>
+        </p:blipFill>
+        <p:spPr>
+          <a:xfrm>
+            <a:off x="0" y="0"/>
+            <a:ext cx="12191695" cy="6858000"/>
+          </a:xfrm>
+          <a:prstGeom prst="rect">
+            <a:avLst/>
+          </a:prstGeom>
+        </p:spPr>
+      </p:pic>
+    </p:spTree>
+  </p:cSld>
+  <p:clrMapOvr>
+    <a:masterClrMapping/>
+  </p:clrMapOvr>
+</p:sld>
+</file>
+
+<file path=ppt/slides/slide4.xml><?xml version="1.0" encoding="utf-8"?>
+<p:sld xmlns:a="http://schemas.openxmlformats.org/drawingml/2006/main" xmlns:r="http://schemas.openxmlformats.org/officeDocument/2006/relationships" xmlns:p="http://schemas.openxmlformats.org/presentationml/2006/main">
+  <p:cSld name="Slide 4">
+    <p:bg>
+      <p:bgPr>
+        <a:solidFill>
+          <a:srgbClr val="FFFFFF"/>
+        </a:solidFill>
+      </p:bgPr>
+    </p:bg>
+    <p:spTree>
+      <p:nvGrpSpPr>
+        <p:cNvPr id="1" name=""/>
+        <p:cNvGrpSpPr/>
+        <p:nvPr/>
+      </p:nvGrpSpPr>
+      <p:grpSpPr>
+        <a:xfrm>
+          <a:off x="0" y="0"/>
+          <a:ext cx="0" cy="0"/>
+          <a:chOff x="0" y="0"/>
+          <a:chExt cx="0" cy="0"/>
+        </a:xfrm>
+      </p:grpSpPr>
+      <p:pic>
+        <p:nvPicPr>
+          <p:cNvPr id="2" name="Image 0" descr="縦フロー (vertical-flow) schematic sample">    </p:cNvPr>
+          <p:cNvPicPr>
+            <a:picLocks noChangeAspect="1"/>
+          </p:cNvPicPr>
+          <p:nvPr/>
+        </p:nvPicPr>
+        <p:blipFill>
+          <a:blip r:embed="rId1">
+            <a:extLst>
+              <a:ext uri="{96DAC541-7B7A-43D3-8B79-37D633B846F1}">
+                <asvg:svgBlip xmlns:asvg="http://schemas.microsoft.com/office/drawing/2016/SVG/main" r:embed="rId2"/>
+              </a:ext>
+            </a:extLst>
+          </a:blip>
+          <a:stretch>
+            <a:fillRect/>
+          </a:stretch>
+        </p:blipFill>
+        <p:spPr>
+          <a:xfrm>
+            <a:off x="0" y="0"/>
+            <a:ext cx="12191695" cy="6858000"/>
+          </a:xfrm>
+          <a:prstGeom prst="rect">
+            <a:avLst/>
+          </a:prstGeom>
+        </p:spPr>
+      </p:pic>
+    </p:spTree>
+  </p:cSld>
+  <p:clrMapOvr>
+    <a:masterClrMapping/>
+  </p:clrMapOvr>
+</p:sld>
+</file>
+
+<file path=ppt/slides/slide5.xml><?xml version="1.0" encoding="utf-8"?>
+<p:sld xmlns:a="http://schemas.openxmlformats.org/drawingml/2006/main" xmlns:r="http://schemas.openxmlformats.org/officeDocument/2006/relationships" xmlns:p="http://schemas.openxmlformats.org/presentationml/2006/main">
+  <p:cSld name="Slide 5">
+    <p:bg>
+      <p:bgPr>
+        <a:solidFill>
+          <a:srgbClr val="FFFFFF"/>
+        </a:solidFill>
+      </p:bgPr>
+    </p:bg>
+    <p:spTree>
+      <p:nvGrpSpPr>
+        <p:cNvPr id="1" name=""/>
+        <p:cNvGrpSpPr/>
+        <p:nvPr/>
+      </p:nvGrpSpPr>
+      <p:grpSpPr>
+        <a:xfrm>
+          <a:off x="0" y="0"/>
+          <a:ext cx="0" cy="0"/>
+          <a:chOff x="0" y="0"/>
+          <a:chExt cx="0" cy="0"/>
+        </a:xfrm>
+      </p:grpSpPr>
+      <p:pic>
+        <p:nvPicPr>
+          <p:cNvPr id="2" name="Image 0" descr="サイクル (cycle) schematic sample">    </p:cNvPr>
+          <p:cNvPicPr>
+            <a:picLocks noChangeAspect="1"/>
+          </p:cNvPicPr>
+          <p:nvPr/>
+        </p:nvPicPr>
+        <p:blipFill>
+          <a:blip r:embed="rId1">
+            <a:extLst>
+              <a:ext uri="{96DAC541-7B7A-43D3-8B79-37D633B846F1}">
+                <asvg:svgBlip xmlns:asvg="http://schemas.microsoft.com/office/drawing/2016/SVG/main" r:embed="rId2"/>
+              </a:ext>
+            </a:extLst>
+          </a:blip>
+          <a:stretch>
+            <a:fillRect/>
+          </a:stretch>
+        </p:blipFill>
+        <p:spPr>
+          <a:xfrm>
+            <a:off x="0" y="0"/>
+            <a:ext cx="12191695" cy="6858000"/>
+          </a:xfrm>
+          <a:prstGeom prst="rect">
+            <a:avLst/>
+          </a:prstGeom>
+        </p:spPr>
+      </p:pic>
+    </p:spTree>
+  </p:cSld>
+  <p:clrMapOvr>
+    <a:masterClrMapping/>
+  </p:clrMapOvr>
+</p:sld>
+</file>
+
+<file path=ppt/slides/slide6.xml><?xml version="1.0" encoding="utf-8"?>
+<p:sld xmlns:a="http://schemas.openxmlformats.org/drawingml/2006/main" xmlns:r="http://schemas.openxmlformats.org/officeDocument/2006/relationships" xmlns:p="http://schemas.openxmlformats.org/presentationml/2006/main">
+  <p:cSld name="Slide 6">
+    <p:bg>
+      <p:bgPr>
+        <a:solidFill>
+          <a:srgbClr val="FFFFFF"/>
+        </a:solidFill>
+      </p:bgPr>
+    </p:bg>
+    <p:spTree>
+      <p:nvGrpSpPr>
+        <p:cNvPr id="1" name=""/>
+        <p:cNvGrpSpPr/>
+        <p:nvPr/>
+      </p:nvGrpSpPr>
+      <p:grpSpPr>
+        <a:xfrm>
+          <a:off x="0" y="0"/>
+          <a:ext cx="0" cy="0"/>
+          <a:chOff x="0" y="0"/>
+          <a:chExt cx="0" cy="0"/>
+        </a:xfrm>
+      </p:grpSpPr>
+      <p:pic>
+        <p:nvPicPr>
+          <p:cNvPr id="2" name="Image 0" descr="前後比較 (before-after) schematic sample">    </p:cNvPr>
+          <p:cNvPicPr>
+            <a:picLocks noChangeAspect="1"/>
+          </p:cNvPicPr>
+          <p:nvPr/>
+        </p:nvPicPr>
+        <p:blipFill>
+          <a:blip r:embed="rId1">
+            <a:extLst>
+              <a:ext uri="{96DAC541-7B7A-43D3-8B79-37D633B846F1}">
+                <asvg:svgBlip xmlns:asvg="http://schemas.microsoft.com/office/drawing/2016/SVG/main" r:embed="rId2"/>
+              </a:ext>
+            </a:extLst>
+          </a:blip>
+          <a:stretch>
+            <a:fillRect/>
+          </a:stretch>
+        </p:blipFill>
+        <p:spPr>
+          <a:xfrm>
+            <a:off x="0" y="0"/>
+            <a:ext cx="12191695" cy="6858000"/>
+          </a:xfrm>
+          <a:prstGeom prst="rect">
+            <a:avLst/>
+          </a:prstGeom>
+        </p:spPr>
+      </p:pic>
+    </p:spTree>
+  </p:cSld>
+  <p:clrMapOvr>
+    <a:masterClrMapping/>
+  </p:clrMapOvr>
+</p:sld>
+</file>
+
+<file path=ppt/slides/slide7.xml><?xml version="1.0" encoding="utf-8"?>
+<p:sld xmlns:a="http://schemas.openxmlformats.org/drawingml/2006/main" xmlns:r="http://schemas.openxmlformats.org/officeDocument/2006/relationships" xmlns:p="http://schemas.openxmlformats.org/presentationml/2006/main">
+  <p:cSld name="Slide 7">
+    <p:bg>
+      <p:bgPr>
+        <a:solidFill>
+          <a:srgbClr val="FFFFFF"/>
+        </a:solidFill>
+      </p:bgPr>
+    </p:bg>
+    <p:spTree>
+      <p:nvGrpSpPr>
+        <p:cNvPr id="1" name=""/>
+        <p:cNvGrpSpPr/>
+        <p:nvPr/>
+      </p:nvGrpSpPr>
+      <p:grpSpPr>
+        <a:xfrm>
+          <a:off x="0" y="0"/>
+          <a:ext cx="0" cy="0"/>
+          <a:chOff x="0" y="0"/>
+          <a:chExt cx="0" cy="0"/>
+        </a:xfrm>
+      </p:grpSpPr>
+      <p:pic>
+        <p:nvPicPr>
+          <p:cNvPr id="2" name="Image 0" descr="マップ (map) schematic sample">    </p:cNvPr>
+          <p:cNvPicPr>
+            <a:picLocks noChangeAspect="1"/>
+          </p:cNvPicPr>
+          <p:nvPr/>
+        </p:nvPicPr>
+        <p:blipFill>
+          <a:blip r:embed="rId1">
+            <a:extLst>
+              <a:ext uri="{96DAC541-7B7A-43D3-8B79-37D633B846F1}">
+                <asvg:svgBlip xmlns:asvg="http://schemas.microsoft.com/office/drawing/2016/SVG/main" r:embed="rId2"/>
+              </a:ext>
+            </a:extLst>
+          </a:blip>
+          <a:stretch>
+            <a:fillRect/>
+          </a:stretch>
+        </p:blipFill>
+        <p:spPr>
+          <a:xfrm>
+            <a:off x="0" y="0"/>
+            <a:ext cx="12191695" cy="6858000"/>
+          </a:xfrm>
+          <a:prstGeom prst="rect">
+            <a:avLst/>
+          </a:prstGeom>
+        </p:spPr>
+      </p:pic>
+    </p:spTree>
+  </p:cSld>
+  <p:clrMapOvr>
+    <a:masterClrMapping/>
+  </p:clrMapOvr>
+</p:sld>
+</file>
+
+<file path=ppt/slides/slide8.xml><?xml version="1.0" encoding="utf-8"?>
+<p:sld xmlns:a="http://schemas.openxmlformats.org/drawingml/2006/main" xmlns:r="http://schemas.openxmlformats.org/officeDocument/2006/relationships" xmlns:p="http://schemas.openxmlformats.org/presentationml/2006/main">
+  <p:cSld name="Slide 8">
+    <p:bg>
+      <p:bgPr>
+        <a:solidFill>
+          <a:srgbClr val="FFFFFF"/>
+        </a:solidFill>
+      </p:bgPr>
+    </p:bg>
+    <p:spTree>
+      <p:nvGrpSpPr>
+        <p:cNvPr id="1" name=""/>
+        <p:cNvGrpSpPr/>
+        <p:nvPr/>
+      </p:nvGrpSpPr>
+      <p:grpSpPr>
+        <a:xfrm>
+          <a:off x="0" y="0"/>
+          <a:ext cx="0" cy="0"/>
+          <a:chOff x="0" y="0"/>
+          <a:chExt cx="0" cy="0"/>
+        </a:xfrm>
+      </p:grpSpPr>
+      <p:pic>
+        <p:nvPicPr>
+          <p:cNvPr id="2" name="Image 0" descr="パズル/ハニカム (puzzle) schematic sample">    </p:cNvPr>
+          <p:cNvPicPr>
+            <a:picLocks noChangeAspect="1"/>
+          </p:cNvPicPr>
+          <p:nvPr/>
+        </p:nvPicPr>
+        <p:blipFill>
+          <a:blip r:embed="rId1">
+            <a:extLst>
+              <a:ext uri="{96DAC541-7B7A-43D3-8B79-37D633B846F1}">
+                <asvg:svgBlip xmlns:asvg="http://schemas.microsoft.com/office/drawing/2016/SVG/main" r:embed="rId2"/>
+              </a:ext>
+            </a:extLst>
+          </a:blip>
+          <a:stretch>
+            <a:fillRect/>
+          </a:stretch>
+        </p:blipFill>
+        <p:spPr>
+          <a:xfrm>
+            <a:off x="0" y="0"/>
+            <a:ext cx="12191695" cy="6858000"/>
+          </a:xfrm>
+          <a:prstGeom prst="rect">
+            <a:avLst/>
+          </a:prstGeom>
+        </p:spPr>
+      </p:pic>
+    </p:spTree>
+  </p:cSld>
+  <p:clrMapOvr>
+    <a:masterClrMapping/>
+  </p:clrMapOvr>
+</p:sld>
+</file>
+
+<file path=ppt/slides/slide9.xml><?xml version="1.0" encoding="utf-8"?>
+<p:sld xmlns:a="http://schemas.openxmlformats.org/drawingml/2006/main" xmlns:r="http://schemas.openxmlformats.org/officeDocument/2006/relationships" xmlns:p="http://schemas.openxmlformats.org/presentationml/2006/main">
+  <p:cSld name="Slide 9">
+    <p:bg>
+      <p:bgPr>
+        <a:solidFill>
+          <a:srgbClr val="FFFFFF"/>
+        </a:solidFill>
+      </p:bgPr>
+    </p:bg>
+    <p:spTree>
+      <p:nvGrpSpPr>
+        <p:cNvPr id="1" name=""/>
+        <p:cNvGrpSpPr/>
+        <p:nvPr/>
+      </p:nvGrpSpPr>
+      <p:grpSpPr>
+        <a:xfrm>
+          <a:off x="0" y="0"/>
+          <a:ext cx="0" cy="0"/>
+          <a:chOff x="0" y="0"/>
+          <a:chExt cx="0" cy="0"/>
+        </a:xfrm>
+      </p:grpSpPr>
+      <p:pic>
+        <p:nvPicPr>
+          <p:cNvPr id="2" name="Image 0" descr="相関図/概念図 (correlation) schematic sample">    </p:cNvPr>
+          <p:cNvPicPr>
+            <a:picLocks noChangeAspect="1"/>
+          </p:cNvPicPr>
+          <p:nvPr/>
+        </p:nvPicPr>
+        <p:blipFill>
+          <a:blip r:embed="rId1">
+            <a:extLst>
+              <a:ext uri="{96DAC541-7B7A-43D3-8B79-37D633B846F1}">
+                <asvg:svgBlip xmlns:asvg="http://schemas.microsoft.com/office/drawing/2016/SVG/main" r:embed="rId2"/>
+              </a:ext>
+            </a:extLst>
+          </a:blip>
+          <a:stretch>
+            <a:fillRect/>
+          </a:stretch>
+        </p:blipFill>
+        <p:spPr>
+          <a:xfrm>
+            <a:off x="0" y="0"/>
+            <a:ext cx="12191695" cy="6858000"/>
+          </a:xfrm>
+          <a:prstGeom prst="rect">
+            <a:avLst/>
+          </a:prstGeom>
+        </p:spPr>
+      </p:pic>
     </p:spTree>
   </p:cSld>
   <p:clrMapOvr>

--- a/samples/schematic-patterns.pptx
+++ b/samples/schematic-patterns.pptx
@@ -4,9 +4,6 @@
   <p:sldMasterIdLst>
     <p:sldMasterId id="2147483648" r:id="rId1"/>
   </p:sldMasterIdLst>
-  <p:notesMasterIdLst>
-    <p:notesMasterId r:id="rId28"/>
-  </p:notesMasterIdLst>
   <p:sldIdLst>
     <p:sldId id="256" r:id="rId2"/>
     <p:sldId id="257" r:id="rId3"/>
@@ -35,6 +32,9 @@
     <p:sldId id="280" r:id="rId26"/>
     <p:sldId id="281" r:id="rId27"/>
   </p:sldIdLst>
+  <p:notesMasterIdLst>
+    <p:notesMasterId r:id="rId28"/>
+  </p:notesMasterIdLst>
   <p:sldSz cx="12192000" cy="6858000"/>
   <p:notesSz cx="6858000" cy="12192000"/>
   <p:defaultTextStyle>
@@ -3186,13 +3186,7 @@
           <p:nvPr/>
         </p:nvPicPr>
         <p:blipFill>
-          <a:blip r:embed="rId1">
-            <a:extLst>
-              <a:ext uri="{96DAC541-7B7A-43D3-8B79-37D633B846F1}">
-                <asvg:svgBlip xmlns:asvg="http://schemas.microsoft.com/office/drawing/2016/SVG/main" r:embed="rId2"/>
-              </a:ext>
-            </a:extLst>
-          </a:blip>
+          <a:blip r:embed="rId1"/>
           <a:stretch>
             <a:fillRect/>
           </a:stretch>
@@ -3248,13 +3242,7 @@
           <p:nvPr/>
         </p:nvPicPr>
         <p:blipFill>
-          <a:blip r:embed="rId1">
-            <a:extLst>
-              <a:ext uri="{96DAC541-7B7A-43D3-8B79-37D633B846F1}">
-                <asvg:svgBlip xmlns:asvg="http://schemas.microsoft.com/office/drawing/2016/SVG/main" r:embed="rId2"/>
-              </a:ext>
-            </a:extLst>
-          </a:blip>
+          <a:blip r:embed="rId1"/>
           <a:stretch>
             <a:fillRect/>
           </a:stretch>
@@ -3310,13 +3298,7 @@
           <p:nvPr/>
         </p:nvPicPr>
         <p:blipFill>
-          <a:blip r:embed="rId1">
-            <a:extLst>
-              <a:ext uri="{96DAC541-7B7A-43D3-8B79-37D633B846F1}">
-                <asvg:svgBlip xmlns:asvg="http://schemas.microsoft.com/office/drawing/2016/SVG/main" r:embed="rId2"/>
-              </a:ext>
-            </a:extLst>
-          </a:blip>
+          <a:blip r:embed="rId1"/>
           <a:stretch>
             <a:fillRect/>
           </a:stretch>
@@ -3372,13 +3354,7 @@
           <p:nvPr/>
         </p:nvPicPr>
         <p:blipFill>
-          <a:blip r:embed="rId1">
-            <a:extLst>
-              <a:ext uri="{96DAC541-7B7A-43D3-8B79-37D633B846F1}">
-                <asvg:svgBlip xmlns:asvg="http://schemas.microsoft.com/office/drawing/2016/SVG/main" r:embed="rId2"/>
-              </a:ext>
-            </a:extLst>
-          </a:blip>
+          <a:blip r:embed="rId1"/>
           <a:stretch>
             <a:fillRect/>
           </a:stretch>
@@ -3434,13 +3410,7 @@
           <p:nvPr/>
         </p:nvPicPr>
         <p:blipFill>
-          <a:blip r:embed="rId1">
-            <a:extLst>
-              <a:ext uri="{96DAC541-7B7A-43D3-8B79-37D633B846F1}">
-                <asvg:svgBlip xmlns:asvg="http://schemas.microsoft.com/office/drawing/2016/SVG/main" r:embed="rId2"/>
-              </a:ext>
-            </a:extLst>
-          </a:blip>
+          <a:blip r:embed="rId1"/>
           <a:stretch>
             <a:fillRect/>
           </a:stretch>
@@ -3496,13 +3466,7 @@
           <p:nvPr/>
         </p:nvPicPr>
         <p:blipFill>
-          <a:blip r:embed="rId1">
-            <a:extLst>
-              <a:ext uri="{96DAC541-7B7A-43D3-8B79-37D633B846F1}">
-                <asvg:svgBlip xmlns:asvg="http://schemas.microsoft.com/office/drawing/2016/SVG/main" r:embed="rId2"/>
-              </a:ext>
-            </a:extLst>
-          </a:blip>
+          <a:blip r:embed="rId1"/>
           <a:stretch>
             <a:fillRect/>
           </a:stretch>
@@ -3558,13 +3522,7 @@
           <p:nvPr/>
         </p:nvPicPr>
         <p:blipFill>
-          <a:blip r:embed="rId1">
-            <a:extLst>
-              <a:ext uri="{96DAC541-7B7A-43D3-8B79-37D633B846F1}">
-                <asvg:svgBlip xmlns:asvg="http://schemas.microsoft.com/office/drawing/2016/SVG/main" r:embed="rId2"/>
-              </a:ext>
-            </a:extLst>
-          </a:blip>
+          <a:blip r:embed="rId1"/>
           <a:stretch>
             <a:fillRect/>
           </a:stretch>
@@ -3620,13 +3578,7 @@
           <p:nvPr/>
         </p:nvPicPr>
         <p:blipFill>
-          <a:blip r:embed="rId1">
-            <a:extLst>
-              <a:ext uri="{96DAC541-7B7A-43D3-8B79-37D633B846F1}">
-                <asvg:svgBlip xmlns:asvg="http://schemas.microsoft.com/office/drawing/2016/SVG/main" r:embed="rId2"/>
-              </a:ext>
-            </a:extLst>
-          </a:blip>
+          <a:blip r:embed="rId1"/>
           <a:stretch>
             <a:fillRect/>
           </a:stretch>
@@ -3682,13 +3634,7 @@
           <p:nvPr/>
         </p:nvPicPr>
         <p:blipFill>
-          <a:blip r:embed="rId1">
-            <a:extLst>
-              <a:ext uri="{96DAC541-7B7A-43D3-8B79-37D633B846F1}">
-                <asvg:svgBlip xmlns:asvg="http://schemas.microsoft.com/office/drawing/2016/SVG/main" r:embed="rId2"/>
-              </a:ext>
-            </a:extLst>
-          </a:blip>
+          <a:blip r:embed="rId1"/>
           <a:stretch>
             <a:fillRect/>
           </a:stretch>
@@ -3744,13 +3690,7 @@
           <p:nvPr/>
         </p:nvPicPr>
         <p:blipFill>
-          <a:blip r:embed="rId1">
-            <a:extLst>
-              <a:ext uri="{96DAC541-7B7A-43D3-8B79-37D633B846F1}">
-                <asvg:svgBlip xmlns:asvg="http://schemas.microsoft.com/office/drawing/2016/SVG/main" r:embed="rId2"/>
-              </a:ext>
-            </a:extLst>
-          </a:blip>
+          <a:blip r:embed="rId1"/>
           <a:stretch>
             <a:fillRect/>
           </a:stretch>
@@ -3806,13 +3746,7 @@
           <p:nvPr/>
         </p:nvPicPr>
         <p:blipFill>
-          <a:blip r:embed="rId1">
-            <a:extLst>
-              <a:ext uri="{96DAC541-7B7A-43D3-8B79-37D633B846F1}">
-                <asvg:svgBlip xmlns:asvg="http://schemas.microsoft.com/office/drawing/2016/SVG/main" r:embed="rId2"/>
-              </a:ext>
-            </a:extLst>
-          </a:blip>
+          <a:blip r:embed="rId1"/>
           <a:stretch>
             <a:fillRect/>
           </a:stretch>
@@ -3868,13 +3802,7 @@
           <p:nvPr/>
         </p:nvPicPr>
         <p:blipFill>
-          <a:blip r:embed="rId1">
-            <a:extLst>
-              <a:ext uri="{96DAC541-7B7A-43D3-8B79-37D633B846F1}">
-                <asvg:svgBlip xmlns:asvg="http://schemas.microsoft.com/office/drawing/2016/SVG/main" r:embed="rId2"/>
-              </a:ext>
-            </a:extLst>
-          </a:blip>
+          <a:blip r:embed="rId1"/>
           <a:stretch>
             <a:fillRect/>
           </a:stretch>
@@ -3930,13 +3858,7 @@
           <p:nvPr/>
         </p:nvPicPr>
         <p:blipFill>
-          <a:blip r:embed="rId1">
-            <a:extLst>
-              <a:ext uri="{96DAC541-7B7A-43D3-8B79-37D633B846F1}">
-                <asvg:svgBlip xmlns:asvg="http://schemas.microsoft.com/office/drawing/2016/SVG/main" r:embed="rId2"/>
-              </a:ext>
-            </a:extLst>
-          </a:blip>
+          <a:blip r:embed="rId1"/>
           <a:stretch>
             <a:fillRect/>
           </a:stretch>
@@ -3992,13 +3914,7 @@
           <p:nvPr/>
         </p:nvPicPr>
         <p:blipFill>
-          <a:blip r:embed="rId1">
-            <a:extLst>
-              <a:ext uri="{96DAC541-7B7A-43D3-8B79-37D633B846F1}">
-                <asvg:svgBlip xmlns:asvg="http://schemas.microsoft.com/office/drawing/2016/SVG/main" r:embed="rId2"/>
-              </a:ext>
-            </a:extLst>
-          </a:blip>
+          <a:blip r:embed="rId1"/>
           <a:stretch>
             <a:fillRect/>
           </a:stretch>
@@ -4054,13 +3970,7 @@
           <p:nvPr/>
         </p:nvPicPr>
         <p:blipFill>
-          <a:blip r:embed="rId1">
-            <a:extLst>
-              <a:ext uri="{96DAC541-7B7A-43D3-8B79-37D633B846F1}">
-                <asvg:svgBlip xmlns:asvg="http://schemas.microsoft.com/office/drawing/2016/SVG/main" r:embed="rId2"/>
-              </a:ext>
-            </a:extLst>
-          </a:blip>
+          <a:blip r:embed="rId1"/>
           <a:stretch>
             <a:fillRect/>
           </a:stretch>
@@ -4116,13 +4026,7 @@
           <p:nvPr/>
         </p:nvPicPr>
         <p:blipFill>
-          <a:blip r:embed="rId1">
-            <a:extLst>
-              <a:ext uri="{96DAC541-7B7A-43D3-8B79-37D633B846F1}">
-                <asvg:svgBlip xmlns:asvg="http://schemas.microsoft.com/office/drawing/2016/SVG/main" r:embed="rId2"/>
-              </a:ext>
-            </a:extLst>
-          </a:blip>
+          <a:blip r:embed="rId1"/>
           <a:stretch>
             <a:fillRect/>
           </a:stretch>
@@ -4178,13 +4082,7 @@
           <p:nvPr/>
         </p:nvPicPr>
         <p:blipFill>
-          <a:blip r:embed="rId1">
-            <a:extLst>
-              <a:ext uri="{96DAC541-7B7A-43D3-8B79-37D633B846F1}">
-                <asvg:svgBlip xmlns:asvg="http://schemas.microsoft.com/office/drawing/2016/SVG/main" r:embed="rId2"/>
-              </a:ext>
-            </a:extLst>
-          </a:blip>
+          <a:blip r:embed="rId1"/>
           <a:stretch>
             <a:fillRect/>
           </a:stretch>
@@ -4240,13 +4138,7 @@
           <p:nvPr/>
         </p:nvPicPr>
         <p:blipFill>
-          <a:blip r:embed="rId1">
-            <a:extLst>
-              <a:ext uri="{96DAC541-7B7A-43D3-8B79-37D633B846F1}">
-                <asvg:svgBlip xmlns:asvg="http://schemas.microsoft.com/office/drawing/2016/SVG/main" r:embed="rId2"/>
-              </a:ext>
-            </a:extLst>
-          </a:blip>
+          <a:blip r:embed="rId1"/>
           <a:stretch>
             <a:fillRect/>
           </a:stretch>
@@ -4474,13 +4366,7 @@
           <p:nvPr/>
         </p:nvPicPr>
         <p:blipFill>
-          <a:blip r:embed="rId1">
-            <a:extLst>
-              <a:ext uri="{96DAC541-7B7A-43D3-8B79-37D633B846F1}">
-                <asvg:svgBlip xmlns:asvg="http://schemas.microsoft.com/office/drawing/2016/SVG/main" r:embed="rId2"/>
-              </a:ext>
-            </a:extLst>
-          </a:blip>
+          <a:blip r:embed="rId1"/>
           <a:stretch>
             <a:fillRect/>
           </a:stretch>
@@ -4536,13 +4422,7 @@
           <p:nvPr/>
         </p:nvPicPr>
         <p:blipFill>
-          <a:blip r:embed="rId1">
-            <a:extLst>
-              <a:ext uri="{96DAC541-7B7A-43D3-8B79-37D633B846F1}">
-                <asvg:svgBlip xmlns:asvg="http://schemas.microsoft.com/office/drawing/2016/SVG/main" r:embed="rId2"/>
-              </a:ext>
-            </a:extLst>
-          </a:blip>
+          <a:blip r:embed="rId1"/>
           <a:stretch>
             <a:fillRect/>
           </a:stretch>
@@ -4598,13 +4478,7 @@
           <p:nvPr/>
         </p:nvPicPr>
         <p:blipFill>
-          <a:blip r:embed="rId1">
-            <a:extLst>
-              <a:ext uri="{96DAC541-7B7A-43D3-8B79-37D633B846F1}">
-                <asvg:svgBlip xmlns:asvg="http://schemas.microsoft.com/office/drawing/2016/SVG/main" r:embed="rId2"/>
-              </a:ext>
-            </a:extLst>
-          </a:blip>
+          <a:blip r:embed="rId1"/>
           <a:stretch>
             <a:fillRect/>
           </a:stretch>
@@ -4660,13 +4534,7 @@
           <p:nvPr/>
         </p:nvPicPr>
         <p:blipFill>
-          <a:blip r:embed="rId1">
-            <a:extLst>
-              <a:ext uri="{96DAC541-7B7A-43D3-8B79-37D633B846F1}">
-                <asvg:svgBlip xmlns:asvg="http://schemas.microsoft.com/office/drawing/2016/SVG/main" r:embed="rId2"/>
-              </a:ext>
-            </a:extLst>
-          </a:blip>
+          <a:blip r:embed="rId1"/>
           <a:stretch>
             <a:fillRect/>
           </a:stretch>
@@ -4722,13 +4590,7 @@
           <p:nvPr/>
         </p:nvPicPr>
         <p:blipFill>
-          <a:blip r:embed="rId1">
-            <a:extLst>
-              <a:ext uri="{96DAC541-7B7A-43D3-8B79-37D633B846F1}">
-                <asvg:svgBlip xmlns:asvg="http://schemas.microsoft.com/office/drawing/2016/SVG/main" r:embed="rId2"/>
-              </a:ext>
-            </a:extLst>
-          </a:blip>
+          <a:blip r:embed="rId1"/>
           <a:stretch>
             <a:fillRect/>
           </a:stretch>
@@ -4784,13 +4646,7 @@
           <p:nvPr/>
         </p:nvPicPr>
         <p:blipFill>
-          <a:blip r:embed="rId1">
-            <a:extLst>
-              <a:ext uri="{96DAC541-7B7A-43D3-8B79-37D633B846F1}">
-                <asvg:svgBlip xmlns:asvg="http://schemas.microsoft.com/office/drawing/2016/SVG/main" r:embed="rId2"/>
-              </a:ext>
-            </a:extLst>
-          </a:blip>
+          <a:blip r:embed="rId1"/>
           <a:stretch>
             <a:fillRect/>
           </a:stretch>
@@ -4846,13 +4702,7 @@
           <p:nvPr/>
         </p:nvPicPr>
         <p:blipFill>
-          <a:blip r:embed="rId1">
-            <a:extLst>
-              <a:ext uri="{96DAC541-7B7A-43D3-8B79-37D633B846F1}">
-                <asvg:svgBlip xmlns:asvg="http://schemas.microsoft.com/office/drawing/2016/SVG/main" r:embed="rId2"/>
-              </a:ext>
-            </a:extLst>
-          </a:blip>
+          <a:blip r:embed="rId1"/>
           <a:stretch>
             <a:fillRect/>
           </a:stretch>

--- a/samples/schematic-patterns.pptx
+++ b/samples/schematic-patterns.pptx
@@ -32,9 +32,6 @@
     <p:sldId id="280" r:id="rId26"/>
     <p:sldId id="281" r:id="rId27"/>
   </p:sldIdLst>
-  <p:notesMasterIdLst>
-    <p:notesMasterId r:id="rId28"/>
-  </p:notesMasterIdLst>
   <p:sldSz cx="12192000" cy="6858000"/>
   <p:notesSz cx="6858000" cy="12192000"/>
   <p:defaultTextStyle>
@@ -132,247 +129,79 @@
 </p:presentation>
 </file>
 
-<file path=ppt/notesMasters/notesMaster1.xml><?xml version="1.0" encoding="utf-8"?>
-<p:notesMaster xmlns:a="http://schemas.openxmlformats.org/drawingml/2006/main" xmlns:r="http://schemas.openxmlformats.org/officeDocument/2006/relationships" xmlns:p="http://schemas.openxmlformats.org/presentationml/2006/main">
+<file path=ppt/notesSlides/notesSlide1.xml><?xml version="1.0" encoding="utf-8"?>
+<p:notes xmlns:a="http://schemas.openxmlformats.org/drawingml/2006/main" xmlns:r="http://schemas.openxmlformats.org/officeDocument/2006/relationships" xmlns:p="http://schemas.openxmlformats.org/presentationml/2006/main">
   <p:cSld>
-    <p:bg>
-      <p:bgRef idx="1001">
-        <a:schemeClr val="bg1"/>
-      </p:bgRef>
-    </p:bg>
-    <p:spTree>
-      <p:nvGrpSpPr>
-        <p:cNvPr id="1" name=""/>
-        <p:cNvGrpSpPr/>
-        <p:nvPr/>
-      </p:nvGrpSpPr>
-      <p:grpSpPr>
-        <a:xfrm>
-          <a:off x="0" y="0"/>
-          <a:ext cx="0" cy="0"/>
-          <a:chOff x="0" y="0"/>
-          <a:chExt cx="0" cy="0"/>
-        </a:xfrm>
-      </p:grpSpPr>
-      <p:sp>
-        <p:nvSpPr>
-          <p:cNvPr id="2" name="Header Placeholder 1"/>
-          <p:cNvSpPr>
-            <a:spLocks noGrp="1"/>
-          </p:cNvSpPr>
-          <p:nvPr>
-            <p:ph type="hdr" sz="quarter"/>
-          </p:nvPr>
-        </p:nvSpPr>
-        <p:spPr>
-          <a:xfrm>
-            <a:off x="0" y="0"/>
-            <a:ext cx="2971800" cy="458788"/>
-          </a:xfrm>
-          <a:prstGeom prst="rect">
-            <a:avLst/>
-          </a:prstGeom>
-        </p:spPr>
-        <p:txBody>
-          <a:bodyPr vert="horz" lIns="91440" tIns="45720" rIns="91440" bIns="45720" rtlCol="0"/>
-          <a:lstStyle>
-            <a:lvl1pPr algn="l">
-              <a:defRPr sz="1200"/>
-            </a:lvl1pPr>
-          </a:lstStyle>
-          <a:p>
-            <a:endParaRPr lang="en-US"/>
-          </a:p>
-        </p:txBody>
-      </p:sp>
-      <p:sp>
-        <p:nvSpPr>
-          <p:cNvPr id="3" name="Date Placeholder 2"/>
-          <p:cNvSpPr>
-            <a:spLocks noGrp="1"/>
-          </p:cNvSpPr>
-          <p:nvPr>
-            <p:ph type="dt" idx="1"/>
-          </p:nvPr>
-        </p:nvSpPr>
-        <p:spPr>
-          <a:xfrm>
-            <a:off x="3884613" y="0"/>
-            <a:ext cx="2971800" cy="458788"/>
-          </a:xfrm>
-          <a:prstGeom prst="rect">
-            <a:avLst/>
-          </a:prstGeom>
-        </p:spPr>
-        <p:txBody>
-          <a:bodyPr vert="horz" lIns="91440" tIns="45720" rIns="91440" bIns="45720" rtlCol="0"/>
-          <a:lstStyle>
-            <a:lvl1pPr algn="r">
-              <a:defRPr sz="1200"/>
-            </a:lvl1pPr>
-          </a:lstStyle>
-          <a:p>
-            <a:fld id="{5282F153-3F37-0F45-9E97-73ACFA13230C}" type="datetimeFigureOut">
+    <p:spTree>
+      <p:nvGrpSpPr>
+        <p:cNvPr id="1" name=""/>
+        <p:cNvGrpSpPr/>
+        <p:nvPr/>
+      </p:nvGrpSpPr>
+      <p:grpSpPr>
+        <a:xfrm>
+          <a:off x="0" y="0"/>
+          <a:ext cx="0" cy="0"/>
+          <a:chOff x="0" y="0"/>
+          <a:chExt cx="0" cy="0"/>
+        </a:xfrm>
+      </p:grpSpPr>
+      <p:sp>
+        <p:nvSpPr>
+          <p:cNvPr id="2" name="Slide Image Placeholder 1"/>
+          <p:cNvSpPr>
+            <a:spLocks noGrp="1" noRot="1" noChangeAspect="1"/>
+          </p:cNvSpPr>
+          <p:nvPr>
+            <p:ph type="sldImg"/>
+          </p:nvPr>
+        </p:nvSpPr>
+        <p:spPr/>
+      </p:sp>
+      <p:sp>
+        <p:nvSpPr>
+          <p:cNvPr id="3" name="Notes Placeholder 2"/>
+          <p:cNvSpPr>
+            <a:spLocks noGrp="1"/>
+          </p:cNvSpPr>
+          <p:nvPr>
+            <p:ph type="body" idx="1"/>
+          </p:nvPr>
+        </p:nvSpPr>
+        <p:spPr/>
+        <p:txBody>
+          <a:bodyPr/>
+          <a:lstStyle/>
+          <a:p>
+            <a:r>
+              <a:rPr lang="en-US" dirty="0"/>
+              <a:t>Pattern 1: table. 余白を広く取り、情報を削ぎ落として静かに見せるモード向けテンプレート。
+Slide 1: 判断材料を一枚でそろえる
+minimal-table-visual: 表 (table) minimal schematic template
+minimal-table-visual long description: 主要な観点と確認事項を二列で整理し、論点の抜け漏れを減らす表形式の図解です。 余白を広く取り、情報を削ぎ落として静かに見せるモード向けテンプレート。</a:t>
+            </a:r>
+            <a:endParaRPr lang="en-US" dirty="0"/>
+          </a:p>
+        </p:txBody>
+      </p:sp>
+      <p:sp>
+        <p:nvSpPr>
+          <p:cNvPr id="4" name="Slide Number Placeholder 3"/>
+          <p:cNvSpPr>
+            <a:spLocks noGrp="1"/>
+          </p:cNvSpPr>
+          <p:nvPr>
+            <p:ph type="sldNum" sz="quarter" idx="10"/>
+          </p:nvPr>
+        </p:nvSpPr>
+        <p:spPr/>
+        <p:txBody>
+          <a:bodyPr/>
+          <a:lstStyle/>
+          <a:p>
+            <a:fld id="{F7021451-1387-4CA6-816F-3879F97B5CBC}" type="slidenum">
               <a:rPr lang="en-US"/>
-              <a:t>7/23/19</a:t>
-            </a:fld>
-            <a:endParaRPr lang="en-US"/>
-          </a:p>
-        </p:txBody>
-      </p:sp>
-      <p:sp>
-        <p:nvSpPr>
-          <p:cNvPr id="4" name="Slide Image Placeholder 3"/>
-          <p:cNvSpPr>
-            <a:spLocks noGrp="1" noRot="1" noChangeAspect="1"/>
-          </p:cNvSpPr>
-          <p:nvPr>
-            <p:ph type="sldImg" idx="2"/>
-          </p:nvPr>
-        </p:nvSpPr>
-        <p:spPr>
-          <a:xfrm>
-            <a:off x="685800" y="1143000"/>
-            <a:ext cx="5486400" cy="3086100"/>
-          </a:xfrm>
-          <a:prstGeom prst="rect">
-            <a:avLst/>
-          </a:prstGeom>
-          <a:noFill/>
-          <a:ln w="12700">
-            <a:solidFill>
-              <a:prstClr val="black"/>
-            </a:solidFill>
-          </a:ln>
-        </p:spPr>
-        <p:txBody>
-          <a:bodyPr vert="horz" lIns="91440" tIns="45720" rIns="91440" bIns="45720" rtlCol="0" anchor="ctr"/>
-          <a:lstStyle/>
-          <a:p>
-            <a:endParaRPr lang="en-US"/>
-          </a:p>
-        </p:txBody>
-      </p:sp>
-      <p:sp>
-        <p:nvSpPr>
-          <p:cNvPr id="5" name="Notes Placeholder 4"/>
-          <p:cNvSpPr>
-            <a:spLocks noGrp="1"/>
-          </p:cNvSpPr>
-          <p:nvPr>
-            <p:ph type="body" sz="quarter" idx="3"/>
-          </p:nvPr>
-        </p:nvSpPr>
-        <p:spPr>
-          <a:xfrm>
-            <a:off x="685800" y="4400550"/>
-            <a:ext cx="5486400" cy="3600450"/>
-          </a:xfrm>
-          <a:prstGeom prst="rect">
-            <a:avLst/>
-          </a:prstGeom>
-        </p:spPr>
-        <p:txBody>
-          <a:bodyPr vert="horz" lIns="91440" tIns="45720" rIns="91440" bIns="45720" rtlCol="0"/>
-          <a:lstStyle/>
-          <a:p>
-            <a:pPr lvl="0"/>
-            <a:r>
-              <a:rPr lang="en-US"/>
-              <a:t>Click to edit Master text styles</a:t>
-            </a:r>
-          </a:p>
-          <a:p>
-            <a:pPr lvl="1"/>
-            <a:r>
-              <a:rPr lang="en-US"/>
-              <a:t>Second level</a:t>
-            </a:r>
-          </a:p>
-          <a:p>
-            <a:pPr lvl="2"/>
-            <a:r>
-              <a:rPr lang="en-US"/>
-              <a:t>Third level</a:t>
-            </a:r>
-          </a:p>
-          <a:p>
-            <a:pPr lvl="3"/>
-            <a:r>
-              <a:rPr lang="en-US"/>
-              <a:t>Fourth level</a:t>
-            </a:r>
-          </a:p>
-          <a:p>
-            <a:pPr lvl="4"/>
-            <a:r>
-              <a:rPr lang="en-US"/>
-              <a:t>Fifth level</a:t>
-            </a:r>
-          </a:p>
-        </p:txBody>
-      </p:sp>
-      <p:sp>
-        <p:nvSpPr>
-          <p:cNvPr id="6" name="Footer Placeholder 5"/>
-          <p:cNvSpPr>
-            <a:spLocks noGrp="1"/>
-          </p:cNvSpPr>
-          <p:nvPr>
-            <p:ph type="ftr" sz="quarter" idx="4"/>
-          </p:nvPr>
-        </p:nvSpPr>
-        <p:spPr>
-          <a:xfrm>
-            <a:off x="0" y="8685213"/>
-            <a:ext cx="2971800" cy="458787"/>
-          </a:xfrm>
-          <a:prstGeom prst="rect">
-            <a:avLst/>
-          </a:prstGeom>
-        </p:spPr>
-        <p:txBody>
-          <a:bodyPr vert="horz" lIns="91440" tIns="45720" rIns="91440" bIns="45720" rtlCol="0" anchor="b"/>
-          <a:lstStyle>
-            <a:lvl1pPr algn="l">
-              <a:defRPr sz="1200"/>
-            </a:lvl1pPr>
-          </a:lstStyle>
-          <a:p>
-            <a:endParaRPr lang="en-US"/>
-          </a:p>
-        </p:txBody>
-      </p:sp>
-      <p:sp>
-        <p:nvSpPr>
-          <p:cNvPr id="7" name="Slide Number Placeholder 6"/>
-          <p:cNvSpPr>
-            <a:spLocks noGrp="1"/>
-          </p:cNvSpPr>
-          <p:nvPr>
-            <p:ph type="sldNum" sz="quarter" idx="5"/>
-          </p:nvPr>
-        </p:nvSpPr>
-        <p:spPr>
-          <a:xfrm>
-            <a:off x="3884613" y="8685213"/>
-            <a:ext cx="2971800" cy="458787"/>
-          </a:xfrm>
-          <a:prstGeom prst="rect">
-            <a:avLst/>
-          </a:prstGeom>
-        </p:spPr>
-        <p:txBody>
-          <a:bodyPr vert="horz" lIns="91440" tIns="45720" rIns="91440" bIns="45720" rtlCol="0" anchor="b"/>
-          <a:lstStyle>
-            <a:lvl1pPr algn="r">
-              <a:defRPr sz="1200"/>
-            </a:lvl1pPr>
-          </a:lstStyle>
-          <a:p>
-            <a:fld id="{CE5E9CC1-C706-0F49-92D6-E571CC5EEA8F}" type="slidenum">
-              <a:rPr lang="en-US"/>
-              <a:t>‹#›</a:t>
+              <a:t>1</a:t>
             </a:fld>
             <a:endParaRPr lang="en-US"/>
           </a:p>
@@ -385,103 +214,13 @@
       </p:ext>
     </p:extLst>
   </p:cSld>
-  <p:clrMap bg1="lt1" tx1="dk1" bg2="lt2" tx2="dk2" accent1="accent1" accent2="accent2" accent3="accent3" accent4="accent4" accent5="accent5" accent6="accent6" hlink="hlink" folHlink="folHlink"/>
-  <p:notesStyle>
-    <a:lvl1pPr marL="0" algn="l" defTabSz="914400" rtl="0" eaLnBrk="1" latinLnBrk="0" hangingPunct="1">
-      <a:defRPr sz="1200" kern="1200">
-        <a:solidFill>
-          <a:schemeClr val="tx1"/>
-        </a:solidFill>
-        <a:latin typeface="+mn-lt"/>
-        <a:ea typeface="+mn-ea"/>
-        <a:cs typeface="+mn-cs"/>
-      </a:defRPr>
-    </a:lvl1pPr>
-    <a:lvl2pPr marL="457200" algn="l" defTabSz="914400" rtl="0" eaLnBrk="1" latinLnBrk="0" hangingPunct="1">
-      <a:defRPr sz="1200" kern="1200">
-        <a:solidFill>
-          <a:schemeClr val="tx1"/>
-        </a:solidFill>
-        <a:latin typeface="+mn-lt"/>
-        <a:ea typeface="+mn-ea"/>
-        <a:cs typeface="+mn-cs"/>
-      </a:defRPr>
-    </a:lvl2pPr>
-    <a:lvl3pPr marL="914400" algn="l" defTabSz="914400" rtl="0" eaLnBrk="1" latinLnBrk="0" hangingPunct="1">
-      <a:defRPr sz="1200" kern="1200">
-        <a:solidFill>
-          <a:schemeClr val="tx1"/>
-        </a:solidFill>
-        <a:latin typeface="+mn-lt"/>
-        <a:ea typeface="+mn-ea"/>
-        <a:cs typeface="+mn-cs"/>
-      </a:defRPr>
-    </a:lvl3pPr>
-    <a:lvl4pPr marL="1371600" algn="l" defTabSz="914400" rtl="0" eaLnBrk="1" latinLnBrk="0" hangingPunct="1">
-      <a:defRPr sz="1200" kern="1200">
-        <a:solidFill>
-          <a:schemeClr val="tx1"/>
-        </a:solidFill>
-        <a:latin typeface="+mn-lt"/>
-        <a:ea typeface="+mn-ea"/>
-        <a:cs typeface="+mn-cs"/>
-      </a:defRPr>
-    </a:lvl4pPr>
-    <a:lvl5pPr marL="1828800" algn="l" defTabSz="914400" rtl="0" eaLnBrk="1" latinLnBrk="0" hangingPunct="1">
-      <a:defRPr sz="1200" kern="1200">
-        <a:solidFill>
-          <a:schemeClr val="tx1"/>
-        </a:solidFill>
-        <a:latin typeface="+mn-lt"/>
-        <a:ea typeface="+mn-ea"/>
-        <a:cs typeface="+mn-cs"/>
-      </a:defRPr>
-    </a:lvl5pPr>
-    <a:lvl6pPr marL="2286000" algn="l" defTabSz="914400" rtl="0" eaLnBrk="1" latinLnBrk="0" hangingPunct="1">
-      <a:defRPr sz="1200" kern="1200">
-        <a:solidFill>
-          <a:schemeClr val="tx1"/>
-        </a:solidFill>
-        <a:latin typeface="+mn-lt"/>
-        <a:ea typeface="+mn-ea"/>
-        <a:cs typeface="+mn-cs"/>
-      </a:defRPr>
-    </a:lvl6pPr>
-    <a:lvl7pPr marL="2743200" algn="l" defTabSz="914400" rtl="0" eaLnBrk="1" latinLnBrk="0" hangingPunct="1">
-      <a:defRPr sz="1200" kern="1200">
-        <a:solidFill>
-          <a:schemeClr val="tx1"/>
-        </a:solidFill>
-        <a:latin typeface="+mn-lt"/>
-        <a:ea typeface="+mn-ea"/>
-        <a:cs typeface="+mn-cs"/>
-      </a:defRPr>
-    </a:lvl7pPr>
-    <a:lvl8pPr marL="3200400" algn="l" defTabSz="914400" rtl="0" eaLnBrk="1" latinLnBrk="0" hangingPunct="1">
-      <a:defRPr sz="1200" kern="1200">
-        <a:solidFill>
-          <a:schemeClr val="tx1"/>
-        </a:solidFill>
-        <a:latin typeface="+mn-lt"/>
-        <a:ea typeface="+mn-ea"/>
-        <a:cs typeface="+mn-cs"/>
-      </a:defRPr>
-    </a:lvl8pPr>
-    <a:lvl9pPr marL="3657600" algn="l" defTabSz="914400" rtl="0" eaLnBrk="1" latinLnBrk="0" hangingPunct="1">
-      <a:defRPr sz="1200" kern="1200">
-        <a:solidFill>
-          <a:schemeClr val="tx1"/>
-        </a:solidFill>
-        <a:latin typeface="+mn-lt"/>
-        <a:ea typeface="+mn-ea"/>
-        <a:cs typeface="+mn-cs"/>
-      </a:defRPr>
-    </a:lvl9pPr>
-  </p:notesStyle>
-</p:notesMaster>
-</file>
-
-<file path=ppt/notesSlides/notesSlide1.xml><?xml version="1.0" encoding="utf-8"?>
+  <p:clrMapOvr>
+    <a:masterClrMapping/>
+  </p:clrMapOvr>
+</p:notes>
+</file>
+
+<file path=ppt/notesSlides/notesSlide10.xml><?xml version="1.0" encoding="utf-8"?>
 <p:notes xmlns:a="http://schemas.openxmlformats.org/drawingml/2006/main" xmlns:r="http://schemas.openxmlformats.org/officeDocument/2006/relationships" xmlns:p="http://schemas.openxmlformats.org/presentationml/2006/main">
   <p:cSld>
     <p:spTree>
@@ -527,10 +266,10 @@
           <a:p>
             <a:r>
               <a:rPr lang="en-US" dirty="0"/>
-              <a:t>Pattern: table. Style profile: minimal. Two-column comparison or structured attribute table.
-Slide 1: 表: 論点と判断材料をそろえる
-table-visual: 表 (table) schematic sample
-table-visual long description: 表 (table) のサンプルです。Two-column comparison or structured attribute table. pptcreater の安全なschematicプリセットで生成しています。</a:t>
+              <a:t>Pattern 10: matrix. 余白を広く取り、情報を削ぎ落として静かに見せるモード向けテンプレート。
+Slide 10: 優先度を二軸で判断する
+minimal-matrix-visual: マトリクス (matrix) minimal schematic template
+minimal-matrix-visual long description: 二つの評価軸で施策や論点を配置し、優先順位や位置づけを判断しやすくする図解です。 余白を広く取り、情報を削ぎ落として静かに見せるモード向けテンプレート。</a:t>
             </a:r>
             <a:endParaRPr lang="en-US" dirty="0"/>
           </a:p>
@@ -553,7 +292,7 @@
           <a:p>
             <a:fld id="{F7021451-1387-4CA6-816F-3879F97B5CBC}" type="slidenum">
               <a:rPr lang="en-US"/>
-              <a:t>1</a:t>
+              <a:t>10</a:t>
             </a:fld>
             <a:endParaRPr lang="en-US"/>
           </a:p>
@@ -572,7 +311,7 @@
 </p:notes>
 </file>
 
-<file path=ppt/notesSlides/notesSlide10.xml><?xml version="1.0" encoding="utf-8"?>
+<file path=ppt/notesSlides/notesSlide11.xml><?xml version="1.0" encoding="utf-8"?>
 <p:notes xmlns:a="http://schemas.openxmlformats.org/drawingml/2006/main" xmlns:r="http://schemas.openxmlformats.org/officeDocument/2006/relationships" xmlns:p="http://schemas.openxmlformats.org/presentationml/2006/main">
   <p:cSld>
     <p:spTree>
@@ -618,10 +357,10 @@
           <a:p>
             <a:r>
               <a:rPr lang="en-US" dirty="0"/>
-              <a:t>Pattern: matrix. Style profile: technical. 2x2 positioning map for prioritization or segmentation.
-Slide 10: マトリクス: 優先度を2軸で判断する
-matrix-visual: マトリクス (matrix) schematic sample
-matrix-visual long description: マトリクス (matrix) のサンプルです。2x2 positioning map for prioritization or segmentation. pptcreater の安全なschematicプリセットで生成しています。</a:t>
+              <a:t>Pattern 11: venn. 余白を広く取り、情報を削ぎ落として静かに見せるモード向けテンプレート。
+Slide 11: 重なりから価値を説明する
+minimal-venn-visual: ベン図 (venn) minimal schematic template
+minimal-venn-visual long description: 二つまたは三つの領域の重なりを示し、共通価値や交差領域を説明する図解です。 余白を広く取り、情報を削ぎ落として静かに見せるモード向けテンプレート。</a:t>
             </a:r>
             <a:endParaRPr lang="en-US" dirty="0"/>
           </a:p>
@@ -644,7 +383,7 @@
           <a:p>
             <a:fld id="{F7021451-1387-4CA6-816F-3879F97B5CBC}" type="slidenum">
               <a:rPr lang="en-US"/>
-              <a:t>10</a:t>
+              <a:t>11</a:t>
             </a:fld>
             <a:endParaRPr lang="en-US"/>
           </a:p>
@@ -663,7 +402,7 @@
 </p:notes>
 </file>
 
-<file path=ppt/notesSlides/notesSlide11.xml><?xml version="1.0" encoding="utf-8"?>
+<file path=ppt/notesSlides/notesSlide12.xml><?xml version="1.0" encoding="utf-8"?>
 <p:notes xmlns:a="http://schemas.openxmlformats.org/drawingml/2006/main" xmlns:r="http://schemas.openxmlformats.org/officeDocument/2006/relationships" xmlns:p="http://schemas.openxmlformats.org/presentationml/2006/main">
   <p:cSld>
     <p:spTree>
@@ -709,10 +448,10 @@
           <a:p>
             <a:r>
               <a:rPr lang="en-US" dirty="0"/>
-              <a:t>Pattern: venn. Style profile: minimal. Overlap among two or three sets with an intersection message.
-Slide 11: ベン図: 重なりから価値を説明する
-venn-visual: ベン図 (venn) schematic sample
-venn-visual long description: ベン図 (venn) のサンプルです。Overlap among two or three sets with an intersection message. pptcreater の安全なschematicプリセットで生成しています。</a:t>
+              <a:t>Pattern 12: cross. 余白を広く取り、情報を削ぎ落として静かに見せるモード向けテンプレート。
+Slide 12: 構成要素を成果へつなげる
+minimal-cross-visual: 数式 (cross) minimal schematic template
+minimal-cross-visual long description: 複数の入力や条件が組み合わさって成果へつながることを、数式のように簡潔に示す図解です。 余白を広く取り、情報を削ぎ落として静かに見せるモード向けテンプレート。</a:t>
             </a:r>
             <a:endParaRPr lang="en-US" dirty="0"/>
           </a:p>
@@ -735,7 +474,7 @@
           <a:p>
             <a:fld id="{F7021451-1387-4CA6-816F-3879F97B5CBC}" type="slidenum">
               <a:rPr lang="en-US"/>
-              <a:t>11</a:t>
+              <a:t>12</a:t>
             </a:fld>
             <a:endParaRPr lang="en-US"/>
           </a:p>
@@ -754,7 +493,7 @@
 </p:notes>
 </file>
 
-<file path=ppt/notesSlides/notesSlide12.xml><?xml version="1.0" encoding="utf-8"?>
+<file path=ppt/notesSlides/notesSlide13.xml><?xml version="1.0" encoding="utf-8"?>
 <p:notes xmlns:a="http://schemas.openxmlformats.org/drawingml/2006/main" xmlns:r="http://schemas.openxmlformats.org/officeDocument/2006/relationships" xmlns:p="http://schemas.openxmlformats.org/presentationml/2006/main">
   <p:cSld>
     <p:spTree>
@@ -800,10 +539,10 @@
           <a:p>
             <a:r>
               <a:rPr lang="en-US" dirty="0"/>
-              <a:t>Pattern: cross. Style profile: stylish. Inputs combined into a result using a simple plus/equal grammar.
-Slide 12: 数式: 複数要素を成果へつなげる
-cross-visual: 数式 (cross) schematic sample
-cross-visual long description: 数式 (cross) のサンプルです。Inputs combined into a result using a simple plus/equal grammar. pptcreater の安全なschematicプリセットで生成しています。</a:t>
+              <a:t>Pattern 13: set. 余白を広く取り、情報を削ぎ落として静かに見せるモード向けテンプレート。
+Slide 13: 要素をまとまりごとに整理する
+minimal-set-visual: グループ/集合 (set) minimal schematic template
+minimal-set-visual long description: 関連する要素をグループに分け、どの要素がどのまとまりに属するかを整理する図解です。 余白を広く取り、情報を削ぎ落として静かに見せるモード向けテンプレート。</a:t>
             </a:r>
             <a:endParaRPr lang="en-US" dirty="0"/>
           </a:p>
@@ -826,7 +565,7 @@
           <a:p>
             <a:fld id="{F7021451-1387-4CA6-816F-3879F97B5CBC}" type="slidenum">
               <a:rPr lang="en-US"/>
-              <a:t>12</a:t>
+              <a:t>13</a:t>
             </a:fld>
             <a:endParaRPr lang="en-US"/>
           </a:p>
@@ -845,7 +584,7 @@
 </p:notes>
 </file>
 
-<file path=ppt/notesSlides/notesSlide13.xml><?xml version="1.0" encoding="utf-8"?>
+<file path=ppt/notesSlides/notesSlide14.xml><?xml version="1.0" encoding="utf-8"?>
 <p:notes xmlns:a="http://schemas.openxmlformats.org/drawingml/2006/main" xmlns:r="http://schemas.openxmlformats.org/officeDocument/2006/relationships" xmlns:p="http://schemas.openxmlformats.org/presentationml/2006/main">
   <p:cSld>
     <p:spTree>
@@ -891,10 +630,10 @@
           <a:p>
             <a:r>
               <a:rPr lang="en-US" dirty="0"/>
-              <a:t>Pattern: set. Style profile: report. Grouped containers with optional member pills.
-Slide 13: グループ/集合: 要素をまとまりで見せる
-set-visual: グループ/集合 (set) schematic sample
-set-visual long description: グループ/集合 (set) のサンプルです。Grouped containers with optional member pills. pptcreater の安全なschematicプリセットで生成しています。</a:t>
+              <a:t>Pattern 14: contrast. 余白を広く取り、情報を削ぎ落として静かに見せるモード向けテンプレート。
+Slide 14: 二つの選択肢の違いを際立たせる
+minimal-contrast-visual: 項目比較 (contrast) minimal schematic template
+minimal-contrast-visual long description: 二つの選択肢や状態を左右に並べ、差分と判断材料を強調する比較図です。 余白を広く取り、情報を削ぎ落として静かに見せるモード向けテンプレート。</a:t>
             </a:r>
             <a:endParaRPr lang="en-US" dirty="0"/>
           </a:p>
@@ -917,7 +656,7 @@
           <a:p>
             <a:fld id="{F7021451-1387-4CA6-816F-3879F97B5CBC}" type="slidenum">
               <a:rPr lang="en-US"/>
-              <a:t>13</a:t>
+              <a:t>14</a:t>
             </a:fld>
             <a:endParaRPr lang="en-US"/>
           </a:p>
@@ -936,7 +675,7 @@
 </p:notes>
 </file>
 
-<file path=ppt/notesSlides/notesSlide14.xml><?xml version="1.0" encoding="utf-8"?>
+<file path=ppt/notesSlides/notesSlide15.xml><?xml version="1.0" encoding="utf-8"?>
 <p:notes xmlns:a="http://schemas.openxmlformats.org/drawingml/2006/main" xmlns:r="http://schemas.openxmlformats.org/officeDocument/2006/relationships" xmlns:p="http://schemas.openxmlformats.org/presentationml/2006/main">
   <p:cSld>
     <p:spTree>
@@ -982,10 +721,10 @@
           <a:p>
             <a:r>
               <a:rPr lang="en-US" dirty="0"/>
-              <a:t>Pattern: contrast. Style profile: presentation. Side-by-side option comparison with aligned rows and a center VS badge.
-Slide 14: 項目比較: 2案の違いを並べて見せる
-contrast-visual: 項目比較 (contrast) schematic sample
-contrast-visual long description: 項目比較 (contrast) のサンプルです。Side-by-side option comparison with aligned rows and a center VS badge. pptcreater の安全なschematicプリセットで生成しています。</a:t>
+              <a:t>Pattern 15: scale-contrast. 余白を広く取り、情報を削ぎ落として静かに見せるモード向けテンプレート。
+Slide 15: 数値差を面積で直感化する
+minimal-scale-contrast-visual: 規模比較 (scale-contrast) minimal schematic template
+minimal-scale-contrast-visual long description: 複数の数値差を円の面積で表し、大小関係を直感的に伝える図解です。 余白を広く取り、情報を削ぎ落として静かに見せるモード向けテンプレート。</a:t>
             </a:r>
             <a:endParaRPr lang="en-US" dirty="0"/>
           </a:p>
@@ -1008,7 +747,7 @@
           <a:p>
             <a:fld id="{F7021451-1387-4CA6-816F-3879F97B5CBC}" type="slidenum">
               <a:rPr lang="en-US"/>
-              <a:t>14</a:t>
+              <a:t>15</a:t>
             </a:fld>
             <a:endParaRPr lang="en-US"/>
           </a:p>
@@ -1027,7 +766,7 @@
 </p:notes>
 </file>
 
-<file path=ppt/notesSlides/notesSlide15.xml><?xml version="1.0" encoding="utf-8"?>
+<file path=ppt/notesSlides/notesSlide16.xml><?xml version="1.0" encoding="utf-8"?>
 <p:notes xmlns:a="http://schemas.openxmlformats.org/drawingml/2006/main" xmlns:r="http://schemas.openxmlformats.org/officeDocument/2006/relationships" xmlns:p="http://schemas.openxmlformats.org/presentationml/2006/main">
   <p:cSld>
     <p:spTree>
@@ -1073,10 +812,10 @@
           <a:p>
             <a:r>
               <a:rPr lang="en-US" dirty="0"/>
-              <a:t>Pattern: scale-contrast. Style profile: technical. Relative-size bubbles based on parsed numeric values.
-Slide 15: 規模比較: 数値差を面積で直感化する
-scale-contrast-visual: 規模比較 (scale-contrast) schematic sample
-scale-contrast-visual long description: 規模比較 (scale-contrast) のサンプルです。Relative-size bubbles based on parsed numeric values. pptcreater の安全なschematicプリセットで生成しています。</a:t>
+              <a:t>Pattern 16: grow. 余白を広く取り、情報を削ぎ落として静かに見せるモード向けテンプレート。
+Slide 16: 市場や対象範囲を段階で絞る
+minimal-grow-visual: 規模分析 (grow) minimal schematic template
+minimal-grow-visual long description: 全体から到達可能範囲、初期対象へと段階的に絞り込む考え方を同心円で示す図解です。 余白を広く取り、情報を削ぎ落として静かに見せるモード向けテンプレート。</a:t>
             </a:r>
             <a:endParaRPr lang="en-US" dirty="0"/>
           </a:p>
@@ -1099,7 +838,7 @@
           <a:p>
             <a:fld id="{F7021451-1387-4CA6-816F-3879F97B5CBC}" type="slidenum">
               <a:rPr lang="en-US"/>
-              <a:t>15</a:t>
+              <a:t>16</a:t>
             </a:fld>
             <a:endParaRPr lang="en-US"/>
           </a:p>
@@ -1118,7 +857,7 @@
 </p:notes>
 </file>
 
-<file path=ppt/notesSlides/notesSlide16.xml><?xml version="1.0" encoding="utf-8"?>
+<file path=ppt/notesSlides/notesSlide17.xml><?xml version="1.0" encoding="utf-8"?>
 <p:notes xmlns:a="http://schemas.openxmlformats.org/drawingml/2006/main" xmlns:r="http://schemas.openxmlformats.org/officeDocument/2006/relationships" xmlns:p="http://schemas.openxmlformats.org/presentationml/2006/main">
   <p:cSld>
     <p:spTree>
@@ -1164,10 +903,10 @@
           <a:p>
             <a:r>
               <a:rPr lang="en-US" dirty="0"/>
-              <a:t>Pattern: grow. Style profile: minimal. Concentric market-size or scope analysis.
-Slide 16: 規模分析: TAM/SAM/SOMを同心円で示す
-grow-visual: 規模分析 (grow) schematic sample
-grow-visual long description: 規模分析 (grow) のサンプルです。Concentric market-size or scope analysis. pptcreater の安全なschematicプリセットで生成しています。</a:t>
+              <a:t>Pattern 17: layer. 余白を広く取り、情報を削ぎ落として静かに見せるモード向けテンプレート。
+Slide 17: 役割をレイヤーで積み上げる
+minimal-layer-visual: レイヤー構造 (layer) minimal schematic template
+minimal-layer-visual long description: 上位から下位、または体験から基盤までの役割を層として積み上げる図解です。 余白を広く取り、情報を削ぎ落として静かに見せるモード向けテンプレート。</a:t>
             </a:r>
             <a:endParaRPr lang="en-US" dirty="0"/>
           </a:p>
@@ -1190,7 +929,7 @@
           <a:p>
             <a:fld id="{F7021451-1387-4CA6-816F-3879F97B5CBC}" type="slidenum">
               <a:rPr lang="en-US"/>
-              <a:t>16</a:t>
+              <a:t>17</a:t>
             </a:fld>
             <a:endParaRPr lang="en-US"/>
           </a:p>
@@ -1209,7 +948,7 @@
 </p:notes>
 </file>
 
-<file path=ppt/notesSlides/notesSlide17.xml><?xml version="1.0" encoding="utf-8"?>
+<file path=ppt/notesSlides/notesSlide18.xml><?xml version="1.0" encoding="utf-8"?>
 <p:notes xmlns:a="http://schemas.openxmlformats.org/drawingml/2006/main" xmlns:r="http://schemas.openxmlformats.org/officeDocument/2006/relationships" xmlns:p="http://schemas.openxmlformats.org/presentationml/2006/main">
   <p:cSld>
     <p:spTree>
@@ -1255,10 +994,10 @@
           <a:p>
             <a:r>
               <a:rPr lang="en-US" dirty="0"/>
-              <a:t>Pattern: layer. Style profile: stylish. Stacked architecture, governance, or responsibility layers.
-Slide 17: レイヤー構造: アーキテクチャを積層で説明する
-layer-visual: レイヤー構造 (layer) schematic sample
-layer-visual long description: レイヤー構造 (layer) のサンプルです。Stacked architecture, governance, or responsibility layers. pptcreater の安全なschematicプリセットで生成しています。</a:t>
+              <a:t>Pattern 18: triangle. 余白を広く取り、情報を削ぎ落として静かに見せるモード向けテンプレート。
+Slide 18: 基盤から成果までを積み上げる
+minimal-triangle-visual: トライアングル (triangle) minimal schematic template
+minimal-triangle-visual long description: 下層の基盤から上層の成果へ段階的に積み上がる関係を示す図解です。 余白を広く取り、情報を削ぎ落として静かに見せるモード向けテンプレート。</a:t>
             </a:r>
             <a:endParaRPr lang="en-US" dirty="0"/>
           </a:p>
@@ -1281,7 +1020,7 @@
           <a:p>
             <a:fld id="{F7021451-1387-4CA6-816F-3879F97B5CBC}" type="slidenum">
               <a:rPr lang="en-US"/>
-              <a:t>17</a:t>
+              <a:t>18</a:t>
             </a:fld>
             <a:endParaRPr lang="en-US"/>
           </a:p>
@@ -1300,7 +1039,7 @@
 </p:notes>
 </file>
 
-<file path=ppt/notesSlides/notesSlide18.xml><?xml version="1.0" encoding="utf-8"?>
+<file path=ppt/notesSlides/notesSlide19.xml><?xml version="1.0" encoding="utf-8"?>
 <p:notes xmlns:a="http://schemas.openxmlformats.org/drawingml/2006/main" xmlns:r="http://schemas.openxmlformats.org/officeDocument/2006/relationships" xmlns:p="http://schemas.openxmlformats.org/presentationml/2006/main">
   <p:cSld>
     <p:spTree>
@@ -1346,10 +1085,10 @@
           <a:p>
             <a:r>
               <a:rPr lang="en-US" dirty="0"/>
-              <a:t>Pattern: triangle. Style profile: report. Pyramid levels showing foundation to apex.
-Slide 18: トライアングル: 基盤から頂点までを示す
-triangle-visual: トライアングル (triangle) schematic sample
-triangle-visual long description: トライアングル (triangle) のサンプルです。Pyramid levels showing foundation to apex. pptcreater の安全なschematicプリセットで生成しています。</a:t>
+              <a:t>Pattern 19: step. 余白を広く取り、情報を削ぎ落として静かに見せるモード向けテンプレート。
+Slide 19: 成熟度を段階的に上げる
+minimal-step-visual: 階段/ステップ (step) minimal schematic template
+minimal-step-visual long description: 導入から展開までの成長段階を階段状に示し、進むべき順序を明確にする図解です。 余白を広く取り、情報を削ぎ落として静かに見せるモード向けテンプレート。</a:t>
             </a:r>
             <a:endParaRPr lang="en-US" dirty="0"/>
           </a:p>
@@ -1372,7 +1111,7 @@
           <a:p>
             <a:fld id="{F7021451-1387-4CA6-816F-3879F97B5CBC}" type="slidenum">
               <a:rPr lang="en-US"/>
-              <a:t>18</a:t>
+              <a:t>19</a:t>
             </a:fld>
             <a:endParaRPr lang="en-US"/>
           </a:p>
@@ -1391,7 +1130,7 @@
 </p:notes>
 </file>
 
-<file path=ppt/notesSlides/notesSlide19.xml><?xml version="1.0" encoding="utf-8"?>
+<file path=ppt/notesSlides/notesSlide2.xml><?xml version="1.0" encoding="utf-8"?>
 <p:notes xmlns:a="http://schemas.openxmlformats.org/drawingml/2006/main" xmlns:r="http://schemas.openxmlformats.org/officeDocument/2006/relationships" xmlns:p="http://schemas.openxmlformats.org/presentationml/2006/main">
   <p:cSld>
     <p:spTree>
@@ -1437,10 +1176,10 @@
           <a:p>
             <a:r>
               <a:rPr lang="en-US" dirty="0"/>
-              <a:t>Pattern: step. Style profile: presentation. Ascending maturity, roadmap, or progression steps.
-Slide 19: 階段: 成熟度やロードマップを段階で示す
-step-visual: 階段/ステップ (step) schematic sample
-step-visual long description: 階段/ステップ (step) のサンプルです。Ascending maturity, roadmap, or progression steps. pptcreater の安全なschematicプリセットで生成しています。</a:t>
+              <a:t>Pattern 2: tree. 余白を広く取り、情報を削ぎ落として静かに見せるモード向けテンプレート。
+Slide 2: 構造を階層でほどく
+minimal-tree-visual: ツリー (tree) minimal schematic template
+minimal-tree-visual long description: 中心テーマから構成要素へ枝分かれさせ、複雑な情報を上位下位の関係で理解しやすくする図解です。 余白を広く取り、情報を削ぎ落として静かに見せるモード向けテンプレート。</a:t>
             </a:r>
             <a:endParaRPr lang="en-US" dirty="0"/>
           </a:p>
@@ -1463,7 +1202,7 @@
           <a:p>
             <a:fld id="{F7021451-1387-4CA6-816F-3879F97B5CBC}" type="slidenum">
               <a:rPr lang="en-US"/>
-              <a:t>19</a:t>
+              <a:t>2</a:t>
             </a:fld>
             <a:endParaRPr lang="en-US"/>
           </a:p>
@@ -1482,7 +1221,7 @@
 </p:notes>
 </file>
 
-<file path=ppt/notesSlides/notesSlide2.xml><?xml version="1.0" encoding="utf-8"?>
+<file path=ppt/notesSlides/notesSlide20.xml><?xml version="1.0" encoding="utf-8"?>
 <p:notes xmlns:a="http://schemas.openxmlformats.org/drawingml/2006/main" xmlns:r="http://schemas.openxmlformats.org/officeDocument/2006/relationships" xmlns:p="http://schemas.openxmlformats.org/presentationml/2006/main">
   <p:cSld>
     <p:spTree>
@@ -1528,10 +1267,10 @@
           <a:p>
             <a:r>
               <a:rPr lang="en-US" dirty="0"/>
-              <a:t>Pattern: tree. Style profile: stylish. Hierarchy with a root concept and child branches.
-Slide 2: ツリー: 複雑な情報を階層で整理する
-tree-visual: ツリー (tree) schematic sample
-tree-visual long description: ツリー (tree) のサンプルです。Hierarchy with a root concept and child branches. pptcreater の安全なschematicプリセットで生成しています。</a:t>
+              <a:t>Pattern 20: gantt. 余白を広く取り、情報を削ぎ落として静かに見せるモード向けテンプレート。
+Slide 20: 作業と期間を同じ面で見る
+minimal-gantt-visual: ガントチャート (gantt) minimal schematic template
+minimal-gantt-visual long description: タスクと期間を同じ表面に並べ、進行計画や担当タイミングを把握しやすくする図解です。 余白を広く取り、情報を削ぎ落として静かに見せるモード向けテンプレート。</a:t>
             </a:r>
             <a:endParaRPr lang="en-US" dirty="0"/>
           </a:p>
@@ -1554,7 +1293,7 @@
           <a:p>
             <a:fld id="{F7021451-1387-4CA6-816F-3879F97B5CBC}" type="slidenum">
               <a:rPr lang="en-US"/>
-              <a:t>2</a:t>
+              <a:t>20</a:t>
             </a:fld>
             <a:endParaRPr lang="en-US"/>
           </a:p>
@@ -1573,7 +1312,7 @@
 </p:notes>
 </file>
 
-<file path=ppt/notesSlides/notesSlide20.xml><?xml version="1.0" encoding="utf-8"?>
+<file path=ppt/notesSlides/notesSlide21.xml><?xml version="1.0" encoding="utf-8"?>
 <p:notes xmlns:a="http://schemas.openxmlformats.org/drawingml/2006/main" xmlns:r="http://schemas.openxmlformats.org/officeDocument/2006/relationships" xmlns:p="http://schemas.openxmlformats.org/presentationml/2006/main">
   <p:cSld>
     <p:spTree>
@@ -1619,10 +1358,10 @@
           <a:p>
             <a:r>
               <a:rPr lang="en-US" dirty="0"/>
-              <a:t>Pattern: gantt. Style profile: technical. Simple task-by-period schedule with safe staggered bars.
-Slide 20: ガントチャート: 作業と期間を同じ面で見る
-gantt-visual: ガントチャート (gantt) schematic sample
-gantt-visual long description: ガントチャート (gantt) のサンプルです。Simple task-by-period schedule with safe staggered bars. pptcreater の安全なschematicプリセットで生成しています。</a:t>
+              <a:t>Pattern 21: ranking. 余白を広く取り、情報を削ぎ落として静かに見せるモード向けテンプレート。
+Slide 21: 優先順位と差を同時に見せる
+minimal-ranking-visual: ランキング (ranking) minimal schematic template
+minimal-ranking-visual long description: 順位だけでなく数値差も棒で示し、優先順位の意味を伝えやすくする図解です。 余白を広く取り、情報を削ぎ落として静かに見せるモード向けテンプレート。</a:t>
             </a:r>
             <a:endParaRPr lang="en-US" dirty="0"/>
           </a:p>
@@ -1645,7 +1384,7 @@
           <a:p>
             <a:fld id="{F7021451-1387-4CA6-816F-3879F97B5CBC}" type="slidenum">
               <a:rPr lang="en-US"/>
-              <a:t>20</a:t>
+              <a:t>21</a:t>
             </a:fld>
             <a:endParaRPr lang="en-US"/>
           </a:p>
@@ -1664,7 +1403,7 @@
 </p:notes>
 </file>
 
-<file path=ppt/notesSlides/notesSlide21.xml><?xml version="1.0" encoding="utf-8"?>
+<file path=ppt/notesSlides/notesSlide22.xml><?xml version="1.0" encoding="utf-8"?>
 <p:notes xmlns:a="http://schemas.openxmlformats.org/drawingml/2006/main" xmlns:r="http://schemas.openxmlformats.org/officeDocument/2006/relationships" xmlns:p="http://schemas.openxmlformats.org/presentationml/2006/main">
   <p:cSld>
     <p:spTree>
@@ -1710,10 +1449,10 @@
           <a:p>
             <a:r>
               <a:rPr lang="en-US" dirty="0"/>
-              <a:t>Pattern: ranking. Style profile: minimal. Ordered list with rank badges and value bars.
-Slide 21: ランキング: 優先順位と差を同時に見せる
-ranking-visual: ランキング (ranking) schematic sample
-ranking-visual long description: ランキング (ranking) のサンプルです。Ordered list with rank badges and value bars. pptcreater の安全なschematicプリセットで生成しています。</a:t>
+              <a:t>Pattern 22: list. 余白を広く取り、情報を削ぎ落として静かに見せるモード向けテンプレート。
+Slide 22: 重要項目を縦に読みやすく並べる
+minimal-list-visual: 箇条書き縦 (list) minimal schematic template
+minimal-list-visual long description: 複数の要点を縦方向に並べ、読み順と視線移動を安定させる図解です。 余白を広く取り、情報を削ぎ落として静かに見せるモード向けテンプレート。</a:t>
             </a:r>
             <a:endParaRPr lang="en-US" dirty="0"/>
           </a:p>
@@ -1736,7 +1475,7 @@
           <a:p>
             <a:fld id="{F7021451-1387-4CA6-816F-3879F97B5CBC}" type="slidenum">
               <a:rPr lang="en-US"/>
-              <a:t>21</a:t>
+              <a:t>22</a:t>
             </a:fld>
             <a:endParaRPr lang="en-US"/>
           </a:p>
@@ -1755,7 +1494,7 @@
 </p:notes>
 </file>
 
-<file path=ppt/notesSlides/notesSlide22.xml><?xml version="1.0" encoding="utf-8"?>
+<file path=ppt/notesSlides/notesSlide23.xml><?xml version="1.0" encoding="utf-8"?>
 <p:notes xmlns:a="http://schemas.openxmlformats.org/drawingml/2006/main" xmlns:r="http://schemas.openxmlformats.org/officeDocument/2006/relationships" xmlns:p="http://schemas.openxmlformats.org/presentationml/2006/main">
   <p:cSld>
     <p:spTree>
@@ -1801,10 +1540,10 @@
           <a:p>
             <a:r>
               <a:rPr lang="en-US" dirty="0"/>
-              <a:t>Pattern: list. Style profile: stylish. Readable vertical list with badges.
-Slide 22: 箇条書き縦: 重要項目を読みやすく並べる
-list-visual: 箇条書き縦 (list) schematic sample
-list-visual long description: 箇条書き縦 (list) のサンプルです。Readable vertical list with badges. pptcreater の安全なschematicプリセットで生成しています。</a:t>
+              <a:t>Pattern 23: list-horizontal. 余白を広く取り、情報を削ぎ落として静かに見せるモード向けテンプレート。
+Slide 23: 三つから四つの要点を横並びで見せる
+minimal-list-horizontal-visual: 箇条書き横 (list-horizontal) minimal schematic template
+minimal-list-horizontal-visual long description: 少数の重要ポイントを横並びカードで配置し、同列の観点として比較しやすくする図解です。 余白を広く取り、情報を削ぎ落として静かに見せるモード向けテンプレート。</a:t>
             </a:r>
             <a:endParaRPr lang="en-US" dirty="0"/>
           </a:p>
@@ -1827,7 +1566,7 @@
           <a:p>
             <a:fld id="{F7021451-1387-4CA6-816F-3879F97B5CBC}" type="slidenum">
               <a:rPr lang="en-US"/>
-              <a:t>22</a:t>
+              <a:t>23</a:t>
             </a:fld>
             <a:endParaRPr lang="en-US"/>
           </a:p>
@@ -1846,7 +1585,7 @@
 </p:notes>
 </file>
 
-<file path=ppt/notesSlides/notesSlide23.xml><?xml version="1.0" encoding="utf-8"?>
+<file path=ppt/notesSlides/notesSlide24.xml><?xml version="1.0" encoding="utf-8"?>
 <p:notes xmlns:a="http://schemas.openxmlformats.org/drawingml/2006/main" xmlns:r="http://schemas.openxmlformats.org/officeDocument/2006/relationships" xmlns:p="http://schemas.openxmlformats.org/presentationml/2006/main">
   <p:cSld>
     <p:spTree>
@@ -1892,10 +1631,10 @@
           <a:p>
             <a:r>
               <a:rPr lang="en-US" dirty="0"/>
-              <a:t>Pattern: list-horizontal. Style profile: report. Horizontal card list for three or four key points.
-Slide 23: 箇条書き横: 3-4点をカードで見せる
-list-horizontal-visual: 箇条書き横 (list-horizontal) schematic sample
-list-horizontal-visual long description: 箇条書き横 (list-horizontal) のサンプルです。Horizontal card list for three or four key points. pptcreater の安全なschematicプリセットで生成しています。</a:t>
+              <a:t>Pattern 24: list-enumeration. 余白を広く取り、情報を削ぎ落として静かに見せるモード向けテンプレート。
+Slide 24: 手順とチェックを番号で示す
+minimal-list-enumeration-visual: 箇条書き羅列 (list-enumeration) minimal schematic template
+minimal-list-enumeration-visual long description: 順番のある手順やチェック項目を番号付きで示し、抜け漏れなく追えるようにする図解です。 余白を広く取り、情報を削ぎ落として静かに見せるモード向けテンプレート。</a:t>
             </a:r>
             <a:endParaRPr lang="en-US" dirty="0"/>
           </a:p>
@@ -1918,7 +1657,7 @@
           <a:p>
             <a:fld id="{F7021451-1387-4CA6-816F-3879F97B5CBC}" type="slidenum">
               <a:rPr lang="en-US"/>
-              <a:t>23</a:t>
+              <a:t>24</a:t>
             </a:fld>
             <a:endParaRPr lang="en-US"/>
           </a:p>
@@ -1937,97 +1676,6 @@
 </p:notes>
 </file>
 
-<file path=ppt/notesSlides/notesSlide24.xml><?xml version="1.0" encoding="utf-8"?>
-<p:notes xmlns:a="http://schemas.openxmlformats.org/drawingml/2006/main" xmlns:r="http://schemas.openxmlformats.org/officeDocument/2006/relationships" xmlns:p="http://schemas.openxmlformats.org/presentationml/2006/main">
-  <p:cSld>
-    <p:spTree>
-      <p:nvGrpSpPr>
-        <p:cNvPr id="1" name=""/>
-        <p:cNvGrpSpPr/>
-        <p:nvPr/>
-      </p:nvGrpSpPr>
-      <p:grpSpPr>
-        <a:xfrm>
-          <a:off x="0" y="0"/>
-          <a:ext cx="0" cy="0"/>
-          <a:chOff x="0" y="0"/>
-          <a:chExt cx="0" cy="0"/>
-        </a:xfrm>
-      </p:grpSpPr>
-      <p:sp>
-        <p:nvSpPr>
-          <p:cNvPr id="2" name="Slide Image Placeholder 1"/>
-          <p:cNvSpPr>
-            <a:spLocks noGrp="1" noRot="1" noChangeAspect="1"/>
-          </p:cNvSpPr>
-          <p:nvPr>
-            <p:ph type="sldImg"/>
-          </p:nvPr>
-        </p:nvSpPr>
-        <p:spPr/>
-      </p:sp>
-      <p:sp>
-        <p:nvSpPr>
-          <p:cNvPr id="3" name="Notes Placeholder 2"/>
-          <p:cNvSpPr>
-            <a:spLocks noGrp="1"/>
-          </p:cNvSpPr>
-          <p:nvPr>
-            <p:ph type="body" idx="1"/>
-          </p:nvPr>
-        </p:nvSpPr>
-        <p:spPr/>
-        <p:txBody>
-          <a:bodyPr/>
-          <a:lstStyle/>
-          <a:p>
-            <a:r>
-              <a:rPr lang="en-US" dirty="0"/>
-              <a:t>Pattern: list-enumeration. Style profile: presentation. Numbered vertical list for ordered checkpoints.
-Slide 24: 箇条書き羅列: 手順やチェックを番号で示す
-list-enumeration-visual: 箇条書き羅列 (list-enumeration) schematic sample
-list-enumeration-visual long description: 箇条書き羅列 (list-enumeration) のサンプルです。Numbered vertical list for ordered checkpoints. pptcreater の安全なschematicプリセットで生成しています。</a:t>
-            </a:r>
-            <a:endParaRPr lang="en-US" dirty="0"/>
-          </a:p>
-        </p:txBody>
-      </p:sp>
-      <p:sp>
-        <p:nvSpPr>
-          <p:cNvPr id="4" name="Slide Number Placeholder 3"/>
-          <p:cNvSpPr>
-            <a:spLocks noGrp="1"/>
-          </p:cNvSpPr>
-          <p:nvPr>
-            <p:ph type="sldNum" sz="quarter" idx="10"/>
-          </p:nvPr>
-        </p:nvSpPr>
-        <p:spPr/>
-        <p:txBody>
-          <a:bodyPr/>
-          <a:lstStyle/>
-          <a:p>
-            <a:fld id="{F7021451-1387-4CA6-816F-3879F97B5CBC}" type="slidenum">
-              <a:rPr lang="en-US"/>
-              <a:t>24</a:t>
-            </a:fld>
-            <a:endParaRPr lang="en-US"/>
-          </a:p>
-        </p:txBody>
-      </p:sp>
-    </p:spTree>
-    <p:extLst>
-      <p:ext uri="{BB962C8B-B14F-4D97-AF65-F5344CB8AC3E}">
-        <p14:creationId xmlns:p14="http://schemas.microsoft.com/office/powerpoint/2010/main" val="1024086991"/>
-      </p:ext>
-    </p:extLst>
-  </p:cSld>
-  <p:clrMapOvr>
-    <a:masterClrMapping/>
-  </p:clrMapOvr>
-</p:notes>
-</file>
-
 <file path=ppt/notesSlides/notesSlide25.xml><?xml version="1.0" encoding="utf-8"?>
 <p:notes xmlns:a="http://schemas.openxmlformats.org/drawingml/2006/main" xmlns:r="http://schemas.openxmlformats.org/officeDocument/2006/relationships" xmlns:p="http://schemas.openxmlformats.org/presentationml/2006/main">
   <p:cSld>
@@ -2074,10 +1722,10 @@
           <a:p>
             <a:r>
               <a:rPr lang="en-US" dirty="0"/>
-              <a:t>Pattern: mockup. Style profile: technical. Window/card mockup for product, portal, or dashboard concepts.
-Slide 25: モックアップ: UIやポータルの概念を簡潔に示す
-mockup-visual: モックアップ (mockup) schematic sample
-mockup-visual long description: モックアップ (mockup) のサンプルです。Window/card mockup for product, portal, or dashboard concepts. pptcreater の安全なschematicプリセットで生成しています。</a:t>
+              <a:t>Pattern 25: mockup. 余白を広く取り、情報を削ぎ落として静かに見せるモード向けテンプレート。
+Slide 25: 画面イメージを簡潔に共有する
+minimal-mockup-visual: モックアップ (mockup) minimal schematic template
+minimal-mockup-visual long description: アプリやポータルの雰囲気を簡潔な画面風カードとして示し、概念を共有しやすくする図解です。 余白を広く取り、情報を削ぎ落として静かに見せるモード向けテンプレート。</a:t>
             </a:r>
             <a:endParaRPr lang="en-US" dirty="0"/>
           </a:p>
@@ -2255,10 +1903,10 @@
           <a:p>
             <a:r>
               <a:rPr lang="en-US" dirty="0"/>
-              <a:t>Pattern: flow. Style profile: report. Left-to-right process, handoff, or customer journey.
-Slide 3: 横型フロー: 作成から検証までを迷わず進める
-flow-visual: 横フロー (flow) schematic sample
-flow-visual long description: 横フロー (flow) のサンプルです。Left-to-right process, handoff, or customer journey. pptcreater の安全なschematicプリセットで生成しています。</a:t>
+              <a:t>Pattern 3: flow. 余白を広く取り、情報を削ぎ落として静かに見せるモード向けテンプレート。
+Slide 3: 作成から検証までを一直線で進める
+minimal-flow-visual: 横フロー (flow) minimal schematic template
+minimal-flow-visual long description: 左から右へ進む作業や判断の流れを短いステップで示し、次の行動を迷わせない図解です。 余白を広く取り、情報を削ぎ落として静かに見せるモード向けテンプレート。</a:t>
             </a:r>
             <a:endParaRPr lang="en-US" dirty="0"/>
           </a:p>
@@ -2346,10 +1994,10 @@
           <a:p>
             <a:r>
               <a:rPr lang="en-US" dirty="0"/>
-              <a:t>Pattern: vertical-flow. Style profile: presentation. Top-to-bottom sequence for procedures or escalation paths.
-Slide 4: 縦型フロー: 承認プロセスを上から下へ示す
-vertical-flow-visual: 縦フロー (vertical-flow) schematic sample
-vertical-flow-visual long description: 縦フロー (vertical-flow) のサンプルです。Top-to-bottom sequence for procedures or escalation paths. pptcreater の安全なschematicプリセットで生成しています。</a:t>
+              <a:t>Pattern 4: vertical-flow. 余白を広く取り、情報を削ぎ落として静かに見せるモード向けテンプレート。
+Slide 4: 承認の流れを上から下へ迷わせない
+minimal-vertical-flow-visual: 縦フロー (vertical-flow) minimal schematic template
+minimal-vertical-flow-visual long description: 上から下へ流れる手順、承認、エスカレーションを、読み順どおりに追える図解です。 余白を広く取り、情報を削ぎ落として静かに見せるモード向けテンプレート。</a:t>
             </a:r>
             <a:endParaRPr lang="en-US" dirty="0"/>
           </a:p>
@@ -2437,10 +2085,10 @@
           <a:p>
             <a:r>
               <a:rPr lang="en-US" dirty="0"/>
-              <a:t>Pattern: cycle. Style profile: technical. Repeating loop with directional relationships.
-Slide 5: サイクル: 継続改善を循環で見せる
-cycle-visual: サイクル (cycle) schematic sample
-cycle-visual long description: サイクル (cycle) のサンプルです。Repeating loop with directional relationships. pptcreater の安全なschematicプリセットで生成しています。</a:t>
+              <a:t>Pattern 5: cycle. 余白を広く取り、情報を削ぎ落として静かに見せるモード向けテンプレート。
+Slide 5: 改善の循環を途切れなく回す
+minimal-cycle-visual: サイクル (cycle) minimal schematic template
+minimal-cycle-visual long description: 繰り返し発生する活動を循環として示し、単発ではなく継続的に改善する関係を伝える図解です。 余白を広く取り、情報を削ぎ落として静かに見せるモード向けテンプレート。</a:t>
             </a:r>
             <a:endParaRPr lang="en-US" dirty="0"/>
           </a:p>
@@ -2528,10 +2176,10 @@
           <a:p>
             <a:r>
               <a:rPr lang="en-US" dirty="0"/>
-              <a:t>Pattern: before-after. Style profile: minimal. Current state versus target state with a central transition.
-Slide 6: 前後比較: 現状と改善後の差分を見せる
-before-after-visual: 前後比較 (before-after) schematic sample
-before-after-visual long description: 前後比較 (before-after) のサンプルです。Current state versus target state with a central transition. pptcreater の安全なschematicプリセットで生成しています。</a:t>
+              <a:t>Pattern 6: before-after. 余白を広く取り、情報を削ぎ落として静かに見せるモード向けテンプレート。
+Slide 6: 現状と改善後の差分を一目で伝える
+minimal-before-after-visual: 前後比較 (before-after) minimal schematic template
+minimal-before-after-visual long description: 現在の課題と改善後の状態を左右に置き、中央の遷移で変化の意味を説明する図解です。 余白を広く取り、情報を削ぎ落として静かに見せるモード向けテンプレート。</a:t>
             </a:r>
             <a:endParaRPr lang="en-US" dirty="0"/>
           </a:p>
@@ -2619,10 +2267,10 @@
           <a:p>
             <a:r>
               <a:rPr lang="en-US" dirty="0"/>
-              <a:t>Pattern: map. Style profile: stylish. Spatial control map or conceptual territory with numbered locations.
-Slide 7: マップ: 制御ポイントを空間的に把握する
-map-visual: マップ (map) schematic sample
-map-visual long description: マップ (map) のサンプルです。Spatial control map or conceptual territory with numbered locations. pptcreater の安全なschematicプリセットで生成しています。</a:t>
+              <a:t>Pattern 7: map. 余白を広く取り、情報を削ぎ落として静かに見せるモード向けテンプレート。
+Slide 7: 制御ポイントを地図のように把握する
+minimal-map-visual: マップ (map) minimal schematic template
+minimal-map-visual long description: 複数の重要地点を空間的に配置し、どこを確認・制御するかを直感的に把握するための図解です。 余白を広く取り、情報を削ぎ落として静かに見せるモード向けテンプレート。</a:t>
             </a:r>
             <a:endParaRPr lang="en-US" dirty="0"/>
           </a:p>
@@ -2710,10 +2358,10 @@
           <a:p>
             <a:r>
               <a:rPr lang="en-US" dirty="0"/>
-              <a:t>Pattern: puzzle. Style profile: report. Interlocking modules that form one capability set.
-Slide 8: パズル/ハニカム: 構成要素を一体感で示す
-puzzle-visual: パズル/ハニカム (puzzle) schematic sample
-puzzle-visual long description: パズル/ハニカム (puzzle) のサンプルです。Interlocking modules that form one capability set. pptcreater の安全なschematicプリセットで生成しています。</a:t>
+              <a:t>Pattern 8: puzzle. 余白を広く取り、情報を削ぎ落として静かに見せるモード向けテンプレート。
+Slide 8: 構成要素を一体の仕組みに見せる
+minimal-puzzle-visual: パズル/ハニカム (puzzle) minimal schematic template
+minimal-puzzle-visual long description: 複数の機能や観点が連動して一つの価値を作ることを、ハニカム状のまとまりで示す図解です。 余白を広く取り、情報を削ぎ落として静かに見せるモード向けテンプレート。</a:t>
             </a:r>
             <a:endParaRPr lang="en-US" dirty="0"/>
           </a:p>
@@ -2801,10 +2449,10 @@
           <a:p>
             <a:r>
               <a:rPr lang="en-US" dirty="0"/>
-              <a:t>Pattern: correlation. Style profile: presentation. Central concept with related surrounding ideas and optional relationship labels.
-Slide 9: 相関図: 中心概念と周辺要素の関係を示す
-correlation-visual: 相関図/概念図 (correlation) schematic sample
-correlation-visual long description: 相関図/概念図 (correlation) のサンプルです。Central concept with related surrounding ideas and optional relationship labels. pptcreater の安全なschematicプリセットで生成しています。</a:t>
+              <a:t>Pattern 9: correlation. 余白を広く取り、情報を削ぎ落として静かに見せるモード向けテンプレート。
+Slide 9: 中心概念と周辺要素の関係を描く
+minimal-correlation-visual: 相関図/概念図 (correlation) minimal schematic template
+minimal-correlation-visual long description: 中心となる概念と周辺要素の関係を放射状に整理し、全体像と関連性を一度に説明する図解です。 余白を広く取り、情報を削ぎ落として静かに見せるモード向けテンプレート。</a:t>
             </a:r>
             <a:endParaRPr lang="en-US" dirty="0"/>
           </a:p>
@@ -3179,7 +2827,7 @@
       </p:grpSpPr>
       <p:pic>
         <p:nvPicPr>
-          <p:cNvPr id="2" name="Image 0" descr="表 (table) schematic sample">    </p:cNvPr>
+          <p:cNvPr id="2" name="Image 0" descr="表 (table) minimal schematic template">    </p:cNvPr>
           <p:cNvPicPr>
             <a:picLocks noChangeAspect="1"/>
           </p:cNvPicPr>
@@ -3235,7 +2883,7 @@
       </p:grpSpPr>
       <p:pic>
         <p:nvPicPr>
-          <p:cNvPr id="2" name="Image 0" descr="マトリクス (matrix) schematic sample">    </p:cNvPr>
+          <p:cNvPr id="2" name="Image 0" descr="マトリクス (matrix) minimal schematic template">    </p:cNvPr>
           <p:cNvPicPr>
             <a:picLocks noChangeAspect="1"/>
           </p:cNvPicPr>
@@ -3291,7 +2939,7 @@
       </p:grpSpPr>
       <p:pic>
         <p:nvPicPr>
-          <p:cNvPr id="2" name="Image 0" descr="ベン図 (venn) schematic sample">    </p:cNvPr>
+          <p:cNvPr id="2" name="Image 0" descr="ベン図 (venn) minimal schematic template">    </p:cNvPr>
           <p:cNvPicPr>
             <a:picLocks noChangeAspect="1"/>
           </p:cNvPicPr>
@@ -3347,7 +2995,7 @@
       </p:grpSpPr>
       <p:pic>
         <p:nvPicPr>
-          <p:cNvPr id="2" name="Image 0" descr="数式 (cross) schematic sample">    </p:cNvPr>
+          <p:cNvPr id="2" name="Image 0" descr="数式 (cross) minimal schematic template">    </p:cNvPr>
           <p:cNvPicPr>
             <a:picLocks noChangeAspect="1"/>
           </p:cNvPicPr>
@@ -3403,7 +3051,7 @@
       </p:grpSpPr>
       <p:pic>
         <p:nvPicPr>
-          <p:cNvPr id="2" name="Image 0" descr="グループ/集合 (set) schematic sample">    </p:cNvPr>
+          <p:cNvPr id="2" name="Image 0" descr="グループ/集合 (set) minimal schematic template">    </p:cNvPr>
           <p:cNvPicPr>
             <a:picLocks noChangeAspect="1"/>
           </p:cNvPicPr>
@@ -3459,7 +3107,7 @@
       </p:grpSpPr>
       <p:pic>
         <p:nvPicPr>
-          <p:cNvPr id="2" name="Image 0" descr="項目比較 (contrast) schematic sample">    </p:cNvPr>
+          <p:cNvPr id="2" name="Image 0" descr="項目比較 (contrast) minimal schematic template">    </p:cNvPr>
           <p:cNvPicPr>
             <a:picLocks noChangeAspect="1"/>
           </p:cNvPicPr>
@@ -3515,7 +3163,7 @@
       </p:grpSpPr>
       <p:pic>
         <p:nvPicPr>
-          <p:cNvPr id="2" name="Image 0" descr="規模比較 (scale-contrast) schematic sample">    </p:cNvPr>
+          <p:cNvPr id="2" name="Image 0" descr="規模比較 (scale-contrast) minimal schematic template">    </p:cNvPr>
           <p:cNvPicPr>
             <a:picLocks noChangeAspect="1"/>
           </p:cNvPicPr>
@@ -3571,7 +3219,7 @@
       </p:grpSpPr>
       <p:pic>
         <p:nvPicPr>
-          <p:cNvPr id="2" name="Image 0" descr="規模分析 (grow) schematic sample">    </p:cNvPr>
+          <p:cNvPr id="2" name="Image 0" descr="規模分析 (grow) minimal schematic template">    </p:cNvPr>
           <p:cNvPicPr>
             <a:picLocks noChangeAspect="1"/>
           </p:cNvPicPr>
@@ -3627,7 +3275,7 @@
       </p:grpSpPr>
       <p:pic>
         <p:nvPicPr>
-          <p:cNvPr id="2" name="Image 0" descr="レイヤー構造 (layer) schematic sample">    </p:cNvPr>
+          <p:cNvPr id="2" name="Image 0" descr="レイヤー構造 (layer) minimal schematic template">    </p:cNvPr>
           <p:cNvPicPr>
             <a:picLocks noChangeAspect="1"/>
           </p:cNvPicPr>
@@ -3683,7 +3331,7 @@
       </p:grpSpPr>
       <p:pic>
         <p:nvPicPr>
-          <p:cNvPr id="2" name="Image 0" descr="トライアングル (triangle) schematic sample">    </p:cNvPr>
+          <p:cNvPr id="2" name="Image 0" descr="トライアングル (triangle) minimal schematic template">    </p:cNvPr>
           <p:cNvPicPr>
             <a:picLocks noChangeAspect="1"/>
           </p:cNvPicPr>
@@ -3739,7 +3387,7 @@
       </p:grpSpPr>
       <p:pic>
         <p:nvPicPr>
-          <p:cNvPr id="2" name="Image 0" descr="階段/ステップ (step) schematic sample">    </p:cNvPr>
+          <p:cNvPr id="2" name="Image 0" descr="階段/ステップ (step) minimal schematic template">    </p:cNvPr>
           <p:cNvPicPr>
             <a:picLocks noChangeAspect="1"/>
           </p:cNvPicPr>
@@ -3795,7 +3443,7 @@
       </p:grpSpPr>
       <p:pic>
         <p:nvPicPr>
-          <p:cNvPr id="2" name="Image 0" descr="ツリー (tree) schematic sample">    </p:cNvPr>
+          <p:cNvPr id="2" name="Image 0" descr="ツリー (tree) minimal schematic template">    </p:cNvPr>
           <p:cNvPicPr>
             <a:picLocks noChangeAspect="1"/>
           </p:cNvPicPr>
@@ -3851,7 +3499,7 @@
       </p:grpSpPr>
       <p:pic>
         <p:nvPicPr>
-          <p:cNvPr id="2" name="Image 0" descr="ガントチャート (gantt) schematic sample">    </p:cNvPr>
+          <p:cNvPr id="2" name="Image 0" descr="ガントチャート (gantt) minimal schematic template">    </p:cNvPr>
           <p:cNvPicPr>
             <a:picLocks noChangeAspect="1"/>
           </p:cNvPicPr>
@@ -3907,7 +3555,7 @@
       </p:grpSpPr>
       <p:pic>
         <p:nvPicPr>
-          <p:cNvPr id="2" name="Image 0" descr="ランキング (ranking) schematic sample">    </p:cNvPr>
+          <p:cNvPr id="2" name="Image 0" descr="ランキング (ranking) minimal schematic template">    </p:cNvPr>
           <p:cNvPicPr>
             <a:picLocks noChangeAspect="1"/>
           </p:cNvPicPr>
@@ -3963,7 +3611,7 @@
       </p:grpSpPr>
       <p:pic>
         <p:nvPicPr>
-          <p:cNvPr id="2" name="Image 0" descr="箇条書き縦 (list) schematic sample">    </p:cNvPr>
+          <p:cNvPr id="2" name="Image 0" descr="箇条書き縦 (list) minimal schematic template">    </p:cNvPr>
           <p:cNvPicPr>
             <a:picLocks noChangeAspect="1"/>
           </p:cNvPicPr>
@@ -4019,7 +3667,7 @@
       </p:grpSpPr>
       <p:pic>
         <p:nvPicPr>
-          <p:cNvPr id="2" name="Image 0" descr="箇条書き横 (list-horizontal) schematic sample">    </p:cNvPr>
+          <p:cNvPr id="2" name="Image 0" descr="箇条書き横 (list-horizontal) minimal schematic template">    </p:cNvPr>
           <p:cNvPicPr>
             <a:picLocks noChangeAspect="1"/>
           </p:cNvPicPr>
@@ -4075,7 +3723,7 @@
       </p:grpSpPr>
       <p:pic>
         <p:nvPicPr>
-          <p:cNvPr id="2" name="Image 0" descr="箇条書き羅列 (list-enumeration) schematic sample">    </p:cNvPr>
+          <p:cNvPr id="2" name="Image 0" descr="箇条書き羅列 (list-enumeration) minimal schematic template">    </p:cNvPr>
           <p:cNvPicPr>
             <a:picLocks noChangeAspect="1"/>
           </p:cNvPicPr>
@@ -4131,7 +3779,7 @@
       </p:grpSpPr>
       <p:pic>
         <p:nvPicPr>
-          <p:cNvPr id="2" name="Image 0" descr="モックアップ (mockup) schematic sample">    </p:cNvPr>
+          <p:cNvPr id="2" name="Image 0" descr="モックアップ (mockup) minimal schematic template">    </p:cNvPr>
           <p:cNvPicPr>
             <a:picLocks noChangeAspect="1"/>
           </p:cNvPicPr>
@@ -4359,7 +4007,7 @@
       </p:grpSpPr>
       <p:pic>
         <p:nvPicPr>
-          <p:cNvPr id="2" name="Image 0" descr="横フロー (flow) schematic sample">    </p:cNvPr>
+          <p:cNvPr id="2" name="Image 0" descr="横フロー (flow) minimal schematic template">    </p:cNvPr>
           <p:cNvPicPr>
             <a:picLocks noChangeAspect="1"/>
           </p:cNvPicPr>
@@ -4415,7 +4063,7 @@
       </p:grpSpPr>
       <p:pic>
         <p:nvPicPr>
-          <p:cNvPr id="2" name="Image 0" descr="縦フロー (vertical-flow) schematic sample">    </p:cNvPr>
+          <p:cNvPr id="2" name="Image 0" descr="縦フロー (vertical-flow) minimal schematic template">    </p:cNvPr>
           <p:cNvPicPr>
             <a:picLocks noChangeAspect="1"/>
           </p:cNvPicPr>
@@ -4471,7 +4119,7 @@
       </p:grpSpPr>
       <p:pic>
         <p:nvPicPr>
-          <p:cNvPr id="2" name="Image 0" descr="サイクル (cycle) schematic sample">    </p:cNvPr>
+          <p:cNvPr id="2" name="Image 0" descr="サイクル (cycle) minimal schematic template">    </p:cNvPr>
           <p:cNvPicPr>
             <a:picLocks noChangeAspect="1"/>
           </p:cNvPicPr>
@@ -4527,7 +4175,7 @@
       </p:grpSpPr>
       <p:pic>
         <p:nvPicPr>
-          <p:cNvPr id="2" name="Image 0" descr="前後比較 (before-after) schematic sample">    </p:cNvPr>
+          <p:cNvPr id="2" name="Image 0" descr="前後比較 (before-after) minimal schematic template">    </p:cNvPr>
           <p:cNvPicPr>
             <a:picLocks noChangeAspect="1"/>
           </p:cNvPicPr>
@@ -4583,7 +4231,7 @@
       </p:grpSpPr>
       <p:pic>
         <p:nvPicPr>
-          <p:cNvPr id="2" name="Image 0" descr="マップ (map) schematic sample">    </p:cNvPr>
+          <p:cNvPr id="2" name="Image 0" descr="マップ (map) minimal schematic template">    </p:cNvPr>
           <p:cNvPicPr>
             <a:picLocks noChangeAspect="1"/>
           </p:cNvPicPr>
@@ -4639,7 +4287,7 @@
       </p:grpSpPr>
       <p:pic>
         <p:nvPicPr>
-          <p:cNvPr id="2" name="Image 0" descr="パズル/ハニカム (puzzle) schematic sample">    </p:cNvPr>
+          <p:cNvPr id="2" name="Image 0" descr="パズル/ハニカム (puzzle) minimal schematic template">    </p:cNvPr>
           <p:cNvPicPr>
             <a:picLocks noChangeAspect="1"/>
           </p:cNvPicPr>
@@ -4695,7 +4343,7 @@
       </p:grpSpPr>
       <p:pic>
         <p:nvPicPr>
-          <p:cNvPr id="2" name="Image 0" descr="相関図/概念図 (correlation) schematic sample">    </p:cNvPr>
+          <p:cNvPr id="2" name="Image 0" descr="相関図/概念図 (correlation) minimal schematic template">    </p:cNvPr>
           <p:cNvPicPr>
             <a:picLocks noChangeAspect="1"/>
           </p:cNvPicPr>
